--- a/reports/canary_deck.pptx
+++ b/reports/canary_deck.pptx
@@ -1710,6 +1710,48 @@
             <a:r>
               <a:rPr lang="en-US" sz="1100" dirty="0">
                 <a:solidFill>
+                  <a:srgbClr val="CFD8E8"/>
+                </a:solidFill>
+                <a:latin typeface="Calibri" pitchFamily="34" charset="0"/>
+                <a:ea typeface="Calibri" pitchFamily="34" charset="-122"/>
+                <a:cs typeface="Calibri" pitchFamily="34" charset="-120"/>
+              </a:rPr>
+              <a:t>Live demo: </a:t>
+            </a:r>
+            <a:pPr indent="0" marL="0">
+              <a:buNone/>
+            </a:pPr>
+            <a:r>
+              <a:rPr lang="en-US" sz="1100" b="1" dirty="0">
+                <a:solidFill>
+                  <a:srgbClr val="D4A017"/>
+                </a:solidFill>
+                <a:latin typeface="Calibri" pitchFamily="34" charset="0"/>
+                <a:ea typeface="Calibri" pitchFamily="34" charset="-122"/>
+                <a:cs typeface="Calibri" pitchFamily="34" charset="-120"/>
+              </a:rPr>
+              <a:t>canary-psi.vercel.app</a:t>
+            </a:r>
+            <a:pPr indent="0" marL="0">
+              <a:buNone/>
+            </a:pPr>
+            <a:r>
+              <a:rPr lang="en-US" sz="1100" dirty="0">
+                <a:solidFill>
+                  <a:srgbClr val="CFD8E8"/>
+                </a:solidFill>
+                <a:latin typeface="Calibri" pitchFamily="34" charset="0"/>
+                <a:ea typeface="Calibri" pitchFamily="34" charset="-122"/>
+                <a:cs typeface="Calibri" pitchFamily="34" charset="-120"/>
+              </a:rPr>
+              <a:t>    ·    Code: </a:t>
+            </a:r>
+            <a:pPr indent="0" marL="0">
+              <a:buNone/>
+            </a:pPr>
+            <a:r>
+              <a:rPr lang="en-US" sz="1100" dirty="0">
+                <a:solidFill>
                   <a:srgbClr val="D4A017"/>
                 </a:solidFill>
                 <a:latin typeface="Calibri" pitchFamily="34" charset="0"/>
@@ -7980,7 +8022,7 @@
               <a:buNone/>
             </a:pPr>
             <a:r>
-              <a:rPr lang="en-US" sz="1300" dirty="0">
+              <a:rPr lang="en-US" sz="1200" dirty="0">
                 <a:solidFill>
                   <a:srgbClr val="CFD8E8"/>
                 </a:solidFill>
@@ -7988,13 +8030,13 @@
                 <a:ea typeface="Calibri" pitchFamily="34" charset="-122"/>
                 <a:cs typeface="Calibri" pitchFamily="34" charset="-120"/>
               </a:rPr>
-              <a:t>Code &amp; data:  </a:t>
+              <a:t>Try it:  </a:t>
             </a:r>
             <a:pPr indent="0" marL="0">
               <a:buNone/>
             </a:pPr>
             <a:r>
-              <a:rPr lang="en-US" sz="1300" b="1" dirty="0">
+              <a:rPr lang="en-US" sz="1200" b="1" dirty="0">
                 <a:solidFill>
                   <a:srgbClr val="D4A017"/>
                 </a:solidFill>
@@ -8002,13 +8044,13 @@
                 <a:ea typeface="Calibri" pitchFamily="34" charset="-122"/>
                 <a:cs typeface="Calibri" pitchFamily="34" charset="-120"/>
               </a:rPr>
-              <a:t>github.com/ArseniiChan/canary</a:t>
+              <a:t>canary-psi.vercel.app/scan</a:t>
             </a:r>
             <a:pPr indent="0" marL="0">
               <a:buNone/>
             </a:pPr>
             <a:r>
-              <a:rPr lang="en-US" sz="1300" dirty="0">
+              <a:rPr lang="en-US" sz="1200" dirty="0">
                 <a:solidFill>
                   <a:srgbClr val="CFD8E8"/>
                 </a:solidFill>
@@ -8016,13 +8058,13 @@
                 <a:ea typeface="Calibri" pitchFamily="34" charset="-122"/>
                 <a:cs typeface="Calibri" pitchFamily="34" charset="-120"/>
               </a:rPr>
-              <a:t>       ·       Frozen spec tag:  </a:t>
+              <a:t>    ·    Code:  </a:t>
             </a:r>
             <a:pPr indent="0" marL="0">
               <a:buNone/>
             </a:pPr>
             <a:r>
-              <a:rPr lang="en-US" sz="1300" b="1" dirty="0">
+              <a:rPr lang="en-US" sz="1200" b="1" dirty="0">
                 <a:solidFill>
                   <a:srgbClr val="D4A017"/>
                 </a:solidFill>
@@ -8030,9 +8072,37 @@
                 <a:ea typeface="Calibri" pitchFamily="34" charset="-122"/>
                 <a:cs typeface="Calibri" pitchFamily="34" charset="-120"/>
               </a:rPr>
+              <a:t>github.com/ArseniiChan/canary</a:t>
+            </a:r>
+            <a:pPr indent="0" marL="0">
+              <a:buNone/>
+            </a:pPr>
+            <a:r>
+              <a:rPr lang="en-US" sz="1200" dirty="0">
+                <a:solidFill>
+                  <a:srgbClr val="CFD8E8"/>
+                </a:solidFill>
+                <a:latin typeface="Calibri" pitchFamily="34" charset="0"/>
+                <a:ea typeface="Calibri" pitchFamily="34" charset="-122"/>
+                <a:cs typeface="Calibri" pitchFamily="34" charset="-120"/>
+              </a:rPr>
+              <a:t>    ·    Tag:  </a:t>
+            </a:r>
+            <a:pPr indent="0" marL="0">
+              <a:buNone/>
+            </a:pPr>
+            <a:r>
+              <a:rPr lang="en-US" sz="1200" b="1" dirty="0">
+                <a:solidFill>
+                  <a:srgbClr val="D4A017"/>
+                </a:solidFill>
+                <a:latin typeface="Calibri" pitchFamily="34" charset="0"/>
+                <a:ea typeface="Calibri" pitchFamily="34" charset="-122"/>
+                <a:cs typeface="Calibri" pitchFamily="34" charset="-120"/>
+              </a:rPr>
               <a:t>validation-spec-frozen</a:t>
             </a:r>
-            <a:endParaRPr lang="en-US" sz="1300" dirty="0"/>
+            <a:endParaRPr lang="en-US" sz="1200" dirty="0"/>
           </a:p>
         </p:txBody>
       </p:sp>

--- a/reports/canary_deck.pptx
+++ b/reports/canary_deck.pptx
@@ -1504,7 +1504,7 @@
                 <a:ea typeface="Georgia" pitchFamily="34" charset="-122"/>
                 <a:cs typeface="Georgia" pitchFamily="34" charset="-120"/>
               </a:rPr>
-              <a:t>flag the companies that turned out to be frauds?</a:t>
+              <a:t>rank known fraud filings as anomalous?</a:t>
             </a:r>
             <a:endParaRPr lang="en-US" sz="3600" dirty="0"/>
           </a:p>
@@ -1610,7 +1610,7 @@
                 <a:ea typeface="Georgia" pitchFamily="34" charset="-122"/>
                 <a:cs typeface="Georgia" pitchFamily="34" charset="-120"/>
               </a:rPr>
-              <a:t>Primary contribution: a pre-registered null result with a baseline that beat the proposed model — exactly the artifact the field claims to want and rarely produces.</a:t>
+              <a:t>Primary contribution: a pre-registered null result plus a baseline that beat the proposed model.</a:t>
             </a:r>
             <a:endParaRPr lang="en-US" sz="1400" dirty="0"/>
           </a:p>
@@ -1663,7 +1663,7 @@
                 <a:ea typeface="Calibri" pitchFamily="34" charset="-122"/>
                 <a:cs typeface="Calibri" pitchFamily="34" charset="-120"/>
               </a:rPr>
-              <a:t>   ·   CSC 44800 — Artificial Intelligence</a:t>
+              <a:t>   ·   CSC 44800 Artificial Intelligence</a:t>
             </a:r>
             <a:pPr indent="0" marL="0">
               <a:buNone/>
@@ -1680,87 +1680,6 @@
               <a:t>   ·   Spring 2026 · CCNY</a:t>
             </a:r>
             <a:endParaRPr lang="en-US" sz="1400" dirty="0"/>
-          </a:p>
-        </p:txBody>
-      </p:sp>
-      <p:sp>
-        <p:nvSpPr>
-          <p:cNvPr id="8" name="Text 6"/>
-          <p:cNvSpPr/>
-          <p:nvPr/>
-        </p:nvSpPr>
-        <p:spPr>
-          <a:xfrm>
-            <a:off x="640080" y="6126480"/>
-            <a:ext cx="10972800" cy="274320"/>
-          </a:xfrm>
-          <a:prstGeom prst="rect">
-            <a:avLst/>
-          </a:prstGeom>
-          <a:noFill/>
-          <a:ln/>
-        </p:spPr>
-        <p:txBody>
-          <a:bodyPr wrap="square" rtlCol="0" anchor="ctr"/>
-          <a:lstStyle/>
-          <a:p>
-            <a:pPr indent="0" marL="0">
-              <a:buNone/>
-            </a:pPr>
-            <a:r>
-              <a:rPr lang="en-US" sz="1100" dirty="0">
-                <a:solidFill>
-                  <a:srgbClr val="CFD8E8"/>
-                </a:solidFill>
-                <a:latin typeface="Calibri" pitchFamily="34" charset="0"/>
-                <a:ea typeface="Calibri" pitchFamily="34" charset="-122"/>
-                <a:cs typeface="Calibri" pitchFamily="34" charset="-120"/>
-              </a:rPr>
-              <a:t>Live demo: </a:t>
-            </a:r>
-            <a:pPr indent="0" marL="0">
-              <a:buNone/>
-            </a:pPr>
-            <a:r>
-              <a:rPr lang="en-US" sz="1100" b="1" dirty="0">
-                <a:solidFill>
-                  <a:srgbClr val="D4A017"/>
-                </a:solidFill>
-                <a:latin typeface="Calibri" pitchFamily="34" charset="0"/>
-                <a:ea typeface="Calibri" pitchFamily="34" charset="-122"/>
-                <a:cs typeface="Calibri" pitchFamily="34" charset="-120"/>
-              </a:rPr>
-              <a:t>canary-psi.vercel.app</a:t>
-            </a:r>
-            <a:pPr indent="0" marL="0">
-              <a:buNone/>
-            </a:pPr>
-            <a:r>
-              <a:rPr lang="en-US" sz="1100" dirty="0">
-                <a:solidFill>
-                  <a:srgbClr val="CFD8E8"/>
-                </a:solidFill>
-                <a:latin typeface="Calibri" pitchFamily="34" charset="0"/>
-                <a:ea typeface="Calibri" pitchFamily="34" charset="-122"/>
-                <a:cs typeface="Calibri" pitchFamily="34" charset="-120"/>
-              </a:rPr>
-              <a:t>    ·    Code: </a:t>
-            </a:r>
-            <a:pPr indent="0" marL="0">
-              <a:buNone/>
-            </a:pPr>
-            <a:r>
-              <a:rPr lang="en-US" sz="1100" dirty="0">
-                <a:solidFill>
-                  <a:srgbClr val="D4A017"/>
-                </a:solidFill>
-                <a:latin typeface="Calibri" pitchFamily="34" charset="0"/>
-                <a:ea typeface="Calibri" pitchFamily="34" charset="-122"/>
-                <a:cs typeface="Calibri" pitchFamily="34" charset="-120"/>
-              </a:rPr>
-              <a:t>github.com/ArseniiChan/canary</a:t>
-            </a:r>
-            <a:endParaRPr lang="en-US" sz="1100" dirty="0"/>
           </a:p>
         </p:txBody>
       </p:sp>
@@ -2041,7 +1960,7 @@
                 <a:ea typeface="Georgia" pitchFamily="34" charset="-122"/>
                 <a:cs typeface="Georgia" pitchFamily="34" charset="-120"/>
               </a:rPr>
-              <a:t>At N = 6 frauds, with strict pre-registration: NO for four of five evaluable cohorts, NO for Enron (excluded by the rule itself), and the one cohort that ranks high (Lehman) is matched or exceeded by a 1990s TF-IDF baseline.</a:t>
+              <a:t>At N = 6 frauds, with strict pre-registration: no useful autoencoder signal across four of five evaluable cohorts; Enron is not evaluable under the frozen rule; the one cohort that ranks high (Lehman) is n = 1, and a 1990s TF-IDF baseline ranks it higher.</a:t>
             </a:r>
             <a:endParaRPr lang="en-US" sz="1800" dirty="0"/>
           </a:p>
@@ -2190,7 +2109,7 @@
                 <a:ea typeface="Calibri" pitchFamily="34" charset="-122"/>
                 <a:cs typeface="Calibri" pitchFamily="34" charset="-120"/>
               </a:rPr>
-              <a:t>THE LEDE — METHODOLOGICAL CONTRACT</a:t>
+              <a:t>THE METHODOLOGICAL CONTRACT</a:t>
             </a:r>
             <a:endParaRPr lang="en-US" sz="1100" dirty="0"/>
           </a:p>
@@ -2254,7 +2173,7 @@
                 <a:ea typeface="Georgia" pitchFamily="34" charset="-122"/>
                 <a:cs typeface="Georgia" pitchFamily="34" charset="-120"/>
               </a:rPr>
-              <a:t>The work is the contract</a:t>
+              <a:t>The contract is the contribution.</a:t>
             </a:r>
             <a:endParaRPr lang="en-US" sz="3200" dirty="0"/>
           </a:p>
@@ -2293,7 +2212,7 @@
                 <a:ea typeface="Calibri" pitchFamily="34" charset="-122"/>
                 <a:cs typeface="Calibri" pitchFamily="34" charset="-120"/>
               </a:rPr>
-              <a:t>git-tagged validation-spec-frozen — committed before any validation script ran</a:t>
+              <a:t>git-tagged validation-spec-frozen, committed before any validation script ran.</a:t>
             </a:r>
             <a:endParaRPr lang="en-US" sz="1400" dirty="0"/>
           </a:p>
@@ -2357,7 +2276,7 @@
                 <a:ea typeface="Calibri" pitchFamily="34" charset="-122"/>
                 <a:cs typeface="Calibri" pitchFamily="34" charset="-120"/>
               </a:rPr>
-              <a:t>01 — Out-of-sample, always</a:t>
+              <a:t>Out-of-sample, always</a:t>
             </a:r>
             <a:endParaRPr lang="en-US" sz="1100" dirty="0"/>
           </a:p>
@@ -2424,7 +2343,7 @@
                 <a:ea typeface="Georgia" pitchFamily="34" charset="-122"/>
                 <a:cs typeface="Georgia" pitchFamily="34" charset="-120"/>
               </a:rPr>
-              <a:t>Leave-one-cohort-out: for each held-out fraud, the autoencoder is trained on clean filings from OTHER cohorts only. The fraud and its peers are never in the training set. Without this, peers carry an in-sample reconstruction-error advantage.</a:t>
+              <a:t>Leave-one-cohort-out. For each held-out fraud, the autoencoder is trained on clean filings from other cohorts only. The fraud and its peers are never in the training set.</a:t>
             </a:r>
             <a:endParaRPr lang="en-US" sz="1300" dirty="0"/>
           </a:p>
@@ -2488,7 +2407,7 @@
                 <a:ea typeface="Calibri" pitchFamily="34" charset="-122"/>
                 <a:cs typeface="Calibri" pitchFamily="34" charset="-120"/>
               </a:rPr>
-              <a:t>02 — Time-controlled training</a:t>
+              <a:t>Time-controlled training</a:t>
             </a:r>
             <a:endParaRPr lang="en-US" sz="1100" dirty="0"/>
           </a:p>
@@ -2555,7 +2474,7 @@
                 <a:ea typeface="Georgia" pitchFamily="34" charset="-122"/>
                 <a:cs typeface="Georgia" pitchFamily="34" charset="-120"/>
               </a:rPr>
-              <a:t>Within the LOCO training set, only filings dated ≤ that fraud's filing date are eligible. The model's representation of "clean" cannot be contaminated by post-fraud disclosure language.</a:t>
+              <a:t>Within the LOCO training set, only filings dated on or before that fraud's filing date are eligible. The model's representation of "clean" cannot include post-fraud disclosure language.</a:t>
             </a:r>
             <a:endParaRPr lang="en-US" sz="1300" dirty="0"/>
           </a:p>
@@ -2619,7 +2538,7 @@
                 <a:ea typeface="Calibri" pitchFamily="34" charset="-122"/>
                 <a:cs typeface="Calibri" pitchFamily="34" charset="-120"/>
               </a:rPr>
-              <a:t>03 — Single pass, no tuning</a:t>
+              <a:t>Single pass, no tuning</a:t>
             </a:r>
             <a:endParaRPr lang="en-US" sz="1100" dirty="0"/>
           </a:p>
@@ -2686,7 +2605,7 @@
                 <a:ea typeface="Georgia" pitchFamily="34" charset="-122"/>
                 <a:cs typeface="Georgia" pitchFamily="34" charset="-120"/>
               </a:rPr>
-              <a:t>Architecture, hyperparameters, sentence cap, seeds — all committed and tagged before validation ran. scripts/06_validate.py runs ONCE. Whatever the numbers say, that is the result. No iteration, no excuses.</a:t>
+              <a:t>Architecture, hyperparameters, sentence cap, seeds: all committed and tagged before validation ran. scripts/06_validate.py runs once. Whatever the numbers say, that is the result.</a:t>
             </a:r>
             <a:endParaRPr lang="en-US" sz="1300" dirty="0"/>
           </a:p>
@@ -2725,7 +2644,7 @@
                 <a:ea typeface="Georgia" pitchFamily="34" charset="-122"/>
                 <a:cs typeface="Georgia" pitchFamily="34" charset="-120"/>
               </a:rPr>
-              <a:t>If the contract holds, the result is informative whatever the numbers say. The discipline IS the deliverable.</a:t>
+              <a:t>The contract makes the null result interpretable, not conclusive.</a:t>
             </a:r>
             <a:endParaRPr lang="en-US" sz="1400" dirty="0"/>
           </a:p>
@@ -2984,7 +2903,7 @@
                 <a:ea typeface="Calibri" pitchFamily="34" charset="-122"/>
                 <a:cs typeface="Calibri" pitchFamily="34" charset="-120"/>
               </a:rPr>
-              <a:t>RESULTS — 5 OF 6 COHORTS, ENRON EXCLUDED BY THE RULE</a:t>
+              <a:t>RESULTS · 5 OF 6 COHORTS · ENRON EXCLUDED BY THE RULE</a:t>
             </a:r>
             <a:endParaRPr lang="en-US" sz="1100" dirty="0"/>
           </a:p>
@@ -3048,7 +2967,7 @@
                 <a:ea typeface="Georgia" pitchFamily="34" charset="-122"/>
                 <a:cs typeface="Georgia" pitchFamily="34" charset="-120"/>
               </a:rPr>
-              <a:t>One detectable. Four indistinguishable. One excluded by design.</a:t>
+              <a:t>One high-ranked outlier. Four non-positive. One excluded by design.</a:t>
             </a:r>
             <a:endParaRPr lang="en-US" sz="2600" dirty="0"/>
           </a:p>
@@ -3070,19 +2989,16 @@
         </p:nvGraphicFramePr>
         <p:xfrm>
           <a:off x="640080" y="1783080"/>
-          <a:ext cx="7315200" cy="3657600"/>
+          <a:ext cx="7315200" cy="3200400"/>
         </p:xfrm>
         <a:graphic>
           <a:graphicData uri="http://schemas.openxmlformats.org/drawingml/2006/table">
             <a:tbl>
               <a:tblPr/>
               <a:tblGrid>
-                <a:gridCol w="2286000"/>
-                <a:gridCol w="914400"/>
-                <a:gridCol w="1280160"/>
-                <a:gridCol w="914400"/>
-                <a:gridCol w="1005840"/>
-                <a:gridCol w="914400"/>
+                <a:gridCol w="2560320"/>
+                <a:gridCol w="1097280"/>
+                <a:gridCol w="3657600"/>
               </a:tblGrid>
               <a:tr h="365760">
                 <a:tc>
@@ -3094,7 +3010,7 @@
                         <a:buNone/>
                       </a:pPr>
                       <a:r>
-                        <a:rPr lang="en-US" sz="1200" b="1" dirty="0">
+                        <a:rPr lang="en-US" sz="1300" b="1" dirty="0">
                           <a:solidFill>
                             <a:srgbClr val="FFFFFF"/>
                           </a:solidFill>
@@ -3104,7 +3020,7 @@
                         </a:rPr>
                         <a:t>Cohort</a:t>
                       </a:r>
-                      <a:endParaRPr lang="en-US" sz="1200" dirty="0">
+                      <a:endParaRPr lang="en-US" sz="1300" dirty="0">
                         <a:latin typeface="Calibri" charset="0"/>
                         <a:ea typeface="Calibri" charset="0"/>
                         <a:cs typeface="Calibri" charset="0"/>
@@ -3162,7 +3078,7 @@
                         <a:buNone/>
                       </a:pPr>
                       <a:r>
-                        <a:rPr lang="en-US" sz="1200" b="1" dirty="0">
+                        <a:rPr lang="en-US" sz="1300" b="1" dirty="0">
                           <a:solidFill>
                             <a:srgbClr val="FFFFFF"/>
                           </a:solidFill>
@@ -3172,7 +3088,7 @@
                         </a:rPr>
                         <a:t>Rank</a:t>
                       </a:r>
-                      <a:endParaRPr lang="en-US" sz="1200" dirty="0">
+                      <a:endParaRPr lang="en-US" sz="1300" dirty="0">
                         <a:latin typeface="Calibri" charset="0"/>
                         <a:ea typeface="Calibri" charset="0"/>
                         <a:cs typeface="Calibri" charset="0"/>
@@ -3226,11 +3142,11 @@
                     <a:bodyPr/>
                     <a:lstStyle/>
                     <a:p>
-                      <a:pPr algn="ctr" indent="0" marL="0">
+                      <a:pPr algn="l" indent="0" marL="0">
                         <a:buNone/>
                       </a:pPr>
                       <a:r>
-                        <a:rPr lang="en-US" sz="1200" b="1" dirty="0">
+                        <a:rPr lang="en-US" sz="1300" b="1" dirty="0">
                           <a:solidFill>
                             <a:srgbClr val="FFFFFF"/>
                           </a:solidFill>
@@ -3238,213 +3154,9 @@
                           <a:ea typeface="Calibri" pitchFamily="34" charset="-122"/>
                           <a:cs typeface="Calibri" pitchFamily="34" charset="-120"/>
                         </a:rPr>
-                        <a:t>MW p</a:t>
+                        <a:t>Note</a:t>
                       </a:r>
-                      <a:endParaRPr lang="en-US" sz="1200" dirty="0">
-                        <a:latin typeface="Calibri" charset="0"/>
-                        <a:ea typeface="Calibri" charset="0"/>
-                        <a:cs typeface="Calibri" charset="0"/>
-                      </a:endParaRPr>
-                    </a:p>
-                  </a:txBody>
-                  <a:tcPr marL="91440" marR="91440" marT="45720" marB="45720">
-                    <a:lnL w="6350" cap="flat" cmpd="sng" algn="ctr">
-                      <a:solidFill>
-                        <a:srgbClr val="D9D9D9"/>
-                      </a:solidFill>
-                      <a:prstDash val="solid"/>
-                      <a:round/>
-                      <a:headEnd type="none" w="med" len="med"/>
-                      <a:tailEnd type="none" w="med" len="med"/>
-                    </a:lnL>
-                    <a:lnR w="6350" cap="flat" cmpd="sng" algn="ctr">
-                      <a:solidFill>
-                        <a:srgbClr val="D9D9D9"/>
-                      </a:solidFill>
-                      <a:prstDash val="solid"/>
-                      <a:round/>
-                      <a:headEnd type="none" w="med" len="med"/>
-                      <a:tailEnd type="none" w="med" len="med"/>
-                    </a:lnR>
-                    <a:lnT w="6350" cap="flat" cmpd="sng" algn="ctr">
-                      <a:solidFill>
-                        <a:srgbClr val="D9D9D9"/>
-                      </a:solidFill>
-                      <a:prstDash val="solid"/>
-                      <a:round/>
-                      <a:headEnd type="none" w="med" len="med"/>
-                      <a:tailEnd type="none" w="med" len="med"/>
-                    </a:lnT>
-                    <a:lnB w="6350" cap="flat" cmpd="sng" algn="ctr">
-                      <a:solidFill>
-                        <a:srgbClr val="D9D9D9"/>
-                      </a:solidFill>
-                      <a:prstDash val="solid"/>
-                      <a:round/>
-                      <a:headEnd type="none" w="med" len="med"/>
-                      <a:tailEnd type="none" w="med" len="med"/>
-                    </a:lnB>
-                    <a:solidFill>
-                      <a:srgbClr val="0E1A33"/>
-                    </a:solidFill>
-                  </a:tcPr>
-                </a:tc>
-                <a:tc>
-                  <a:txBody>
-                    <a:bodyPr/>
-                    <a:lstStyle/>
-                    <a:p>
-                      <a:pPr algn="ctr" indent="0" marL="0">
-                        <a:buNone/>
-                      </a:pPr>
-                      <a:r>
-                        <a:rPr lang="en-US" sz="1200" b="1" dirty="0">
-                          <a:solidFill>
-                            <a:srgbClr val="FFFFFF"/>
-                          </a:solidFill>
-                          <a:latin typeface="Calibri" pitchFamily="34" charset="0"/>
-                          <a:ea typeface="Calibri" pitchFamily="34" charset="-122"/>
-                          <a:cs typeface="Calibri" pitchFamily="34" charset="-120"/>
-                        </a:rPr>
-                        <a:t>Effect</a:t>
-                      </a:r>
-                      <a:endParaRPr lang="en-US" sz="1200" dirty="0">
-                        <a:latin typeface="Calibri" charset="0"/>
-                        <a:ea typeface="Calibri" charset="0"/>
-                        <a:cs typeface="Calibri" charset="0"/>
-                      </a:endParaRPr>
-                    </a:p>
-                  </a:txBody>
-                  <a:tcPr marL="91440" marR="91440" marT="45720" marB="45720">
-                    <a:lnL w="6350" cap="flat" cmpd="sng" algn="ctr">
-                      <a:solidFill>
-                        <a:srgbClr val="D9D9D9"/>
-                      </a:solidFill>
-                      <a:prstDash val="solid"/>
-                      <a:round/>
-                      <a:headEnd type="none" w="med" len="med"/>
-                      <a:tailEnd type="none" w="med" len="med"/>
-                    </a:lnL>
-                    <a:lnR w="6350" cap="flat" cmpd="sng" algn="ctr">
-                      <a:solidFill>
-                        <a:srgbClr val="D9D9D9"/>
-                      </a:solidFill>
-                      <a:prstDash val="solid"/>
-                      <a:round/>
-                      <a:headEnd type="none" w="med" len="med"/>
-                      <a:tailEnd type="none" w="med" len="med"/>
-                    </a:lnR>
-                    <a:lnT w="6350" cap="flat" cmpd="sng" algn="ctr">
-                      <a:solidFill>
-                        <a:srgbClr val="D9D9D9"/>
-                      </a:solidFill>
-                      <a:prstDash val="solid"/>
-                      <a:round/>
-                      <a:headEnd type="none" w="med" len="med"/>
-                      <a:tailEnd type="none" w="med" len="med"/>
-                    </a:lnT>
-                    <a:lnB w="6350" cap="flat" cmpd="sng" algn="ctr">
-                      <a:solidFill>
-                        <a:srgbClr val="D9D9D9"/>
-                      </a:solidFill>
-                      <a:prstDash val="solid"/>
-                      <a:round/>
-                      <a:headEnd type="none" w="med" len="med"/>
-                      <a:tailEnd type="none" w="med" len="med"/>
-                    </a:lnB>
-                    <a:solidFill>
-                      <a:srgbClr val="0E1A33"/>
-                    </a:solidFill>
-                  </a:tcPr>
-                </a:tc>
-                <a:tc>
-                  <a:txBody>
-                    <a:bodyPr/>
-                    <a:lstStyle/>
-                    <a:p>
-                      <a:pPr algn="ctr" indent="0" marL="0">
-                        <a:buNone/>
-                      </a:pPr>
-                      <a:r>
-                        <a:rPr lang="en-US" sz="1200" b="1" dirty="0">
-                          <a:solidFill>
-                            <a:srgbClr val="FFFFFF"/>
-                          </a:solidFill>
-                          <a:latin typeface="Calibri" pitchFamily="34" charset="0"/>
-                          <a:ea typeface="Calibri" pitchFamily="34" charset="-122"/>
-                          <a:cs typeface="Calibri" pitchFamily="34" charset="-120"/>
-                        </a:rPr>
-                        <a:t>95% CI</a:t>
-                      </a:r>
-                      <a:endParaRPr lang="en-US" sz="1200" dirty="0">
-                        <a:latin typeface="Calibri" charset="0"/>
-                        <a:ea typeface="Calibri" charset="0"/>
-                        <a:cs typeface="Calibri" charset="0"/>
-                      </a:endParaRPr>
-                    </a:p>
-                  </a:txBody>
-                  <a:tcPr marL="91440" marR="91440" marT="45720" marB="45720">
-                    <a:lnL w="6350" cap="flat" cmpd="sng" algn="ctr">
-                      <a:solidFill>
-                        <a:srgbClr val="D9D9D9"/>
-                      </a:solidFill>
-                      <a:prstDash val="solid"/>
-                      <a:round/>
-                      <a:headEnd type="none" w="med" len="med"/>
-                      <a:tailEnd type="none" w="med" len="med"/>
-                    </a:lnL>
-                    <a:lnR w="6350" cap="flat" cmpd="sng" algn="ctr">
-                      <a:solidFill>
-                        <a:srgbClr val="D9D9D9"/>
-                      </a:solidFill>
-                      <a:prstDash val="solid"/>
-                      <a:round/>
-                      <a:headEnd type="none" w="med" len="med"/>
-                      <a:tailEnd type="none" w="med" len="med"/>
-                    </a:lnR>
-                    <a:lnT w="6350" cap="flat" cmpd="sng" algn="ctr">
-                      <a:solidFill>
-                        <a:srgbClr val="D9D9D9"/>
-                      </a:solidFill>
-                      <a:prstDash val="solid"/>
-                      <a:round/>
-                      <a:headEnd type="none" w="med" len="med"/>
-                      <a:tailEnd type="none" w="med" len="med"/>
-                    </a:lnT>
-                    <a:lnB w="6350" cap="flat" cmpd="sng" algn="ctr">
-                      <a:solidFill>
-                        <a:srgbClr val="D9D9D9"/>
-                      </a:solidFill>
-                      <a:prstDash val="solid"/>
-                      <a:round/>
-                      <a:headEnd type="none" w="med" len="med"/>
-                      <a:tailEnd type="none" w="med" len="med"/>
-                    </a:lnB>
-                    <a:solidFill>
-                      <a:srgbClr val="0E1A33"/>
-                    </a:solidFill>
-                  </a:tcPr>
-                </a:tc>
-                <a:tc>
-                  <a:txBody>
-                    <a:bodyPr/>
-                    <a:lstStyle/>
-                    <a:p>
-                      <a:pPr algn="ctr" indent="0" marL="0">
-                        <a:buNone/>
-                      </a:pPr>
-                      <a:r>
-                        <a:rPr lang="en-US" sz="1200" b="1" dirty="0">
-                          <a:solidFill>
-                            <a:srgbClr val="FFFFFF"/>
-                          </a:solidFill>
-                          <a:latin typeface="Calibri" pitchFamily="34" charset="0"/>
-                          <a:ea typeface="Calibri" pitchFamily="34" charset="-122"/>
-                          <a:cs typeface="Calibri" pitchFamily="34" charset="-120"/>
-                        </a:rPr>
-                        <a:t>Train sents</a:t>
-                      </a:r>
-                      <a:endParaRPr lang="en-US" sz="1200" dirty="0">
+                      <a:endParaRPr lang="en-US" sz="1300" dirty="0">
                         <a:latin typeface="Calibri" charset="0"/>
                         <a:ea typeface="Calibri" charset="0"/>
                         <a:cs typeface="Calibri" charset="0"/>
@@ -3504,7 +3216,7 @@
                         <a:buNone/>
                       </a:pPr>
                       <a:r>
-                        <a:rPr lang="en-US" sz="1200" b="1" dirty="0">
+                        <a:rPr lang="en-US" sz="1300" b="1" dirty="0">
                           <a:solidFill>
                             <a:srgbClr val="0E1A33"/>
                           </a:solidFill>
@@ -3512,9 +3224,9 @@
                           <a:ea typeface="Calibri" pitchFamily="34" charset="-122"/>
                           <a:cs typeface="Calibri" pitchFamily="34" charset="-120"/>
                         </a:rPr>
-                        <a:t>Lehman (LEH) — FY2007  ⚑</a:t>
+                        <a:t>Lehman (LEH, FY 2007)  ⚠</a:t>
                       </a:r>
-                      <a:endParaRPr lang="en-US" sz="1200" dirty="0">
+                      <a:endParaRPr lang="en-US" sz="1300" dirty="0">
                         <a:latin typeface="Calibri" charset="0"/>
                         <a:ea typeface="Calibri" charset="0"/>
                         <a:cs typeface="Calibri" charset="0"/>
@@ -3569,7 +3281,7 @@
                         <a:buNone/>
                       </a:pPr>
                       <a:r>
-                        <a:rPr lang="en-US" sz="1200" b="1" dirty="0">
+                        <a:rPr lang="en-US" sz="1300" b="1" dirty="0">
                           <a:solidFill>
                             <a:srgbClr val="0E1A33"/>
                           </a:solidFill>
@@ -3579,7 +3291,7 @@
                         </a:rPr>
                         <a:t>3 / 13</a:t>
                       </a:r>
-                      <a:endParaRPr lang="en-US" sz="1200" dirty="0">
+                      <a:endParaRPr lang="en-US" sz="1300" dirty="0">
                         <a:latin typeface="Calibri" charset="0"/>
                         <a:ea typeface="Calibri" charset="0"/>
                         <a:cs typeface="Calibri" charset="0"/>
@@ -3630,216 +3342,21 @@
                     <a:bodyPr/>
                     <a:lstStyle/>
                     <a:p>
-                      <a:pPr algn="ctr" indent="0" marL="0">
+                      <a:pPr indent="0" marL="0">
                         <a:buNone/>
                       </a:pPr>
                       <a:r>
-                        <a:rPr lang="en-US" sz="1200" dirty="0">
+                        <a:rPr lang="en-US" sz="1300" i="1" dirty="0">
                           <a:solidFill>
-                            <a:srgbClr val="1A1A1A"/>
+                            <a:srgbClr val="555555"/>
                           </a:solidFill>
                           <a:latin typeface="Calibri" pitchFamily="34" charset="0"/>
                           <a:ea typeface="Calibri" pitchFamily="34" charset="-122"/>
                           <a:cs typeface="Calibri" pitchFamily="34" charset="-120"/>
                         </a:rPr>
-                        <a:t>1.3 × 10⁻⁹</a:t>
+                        <a:t>n = 1, baseline beats AE</a:t>
                       </a:r>
-                      <a:endParaRPr lang="en-US" sz="1200" dirty="0">
-                        <a:latin typeface="Calibri" charset="0"/>
-                        <a:ea typeface="Calibri" charset="0"/>
-                        <a:cs typeface="Calibri" charset="0"/>
-                      </a:endParaRPr>
-                    </a:p>
-                  </a:txBody>
-                  <a:tcPr marL="91440" marR="91440" marT="45720" marB="45720">
-                    <a:lnL w="6350" cap="flat" cmpd="sng" algn="ctr">
-                      <a:solidFill>
-                        <a:srgbClr val="D9D9D9"/>
-                      </a:solidFill>
-                      <a:prstDash val="solid"/>
-                      <a:round/>
-                      <a:headEnd type="none" w="med" len="med"/>
-                      <a:tailEnd type="none" w="med" len="med"/>
-                    </a:lnL>
-                    <a:lnR w="6350" cap="flat" cmpd="sng" algn="ctr">
-                      <a:solidFill>
-                        <a:srgbClr val="D9D9D9"/>
-                      </a:solidFill>
-                      <a:prstDash val="solid"/>
-                      <a:round/>
-                      <a:headEnd type="none" w="med" len="med"/>
-                      <a:tailEnd type="none" w="med" len="med"/>
-                    </a:lnR>
-                    <a:lnT w="6350" cap="flat" cmpd="sng" algn="ctr">
-                      <a:solidFill>
-                        <a:srgbClr val="D9D9D9"/>
-                      </a:solidFill>
-                      <a:prstDash val="solid"/>
-                      <a:round/>
-                      <a:headEnd type="none" w="med" len="med"/>
-                      <a:tailEnd type="none" w="med" len="med"/>
-                    </a:lnT>
-                    <a:lnB w="6350" cap="flat" cmpd="sng" algn="ctr">
-                      <a:solidFill>
-                        <a:srgbClr val="D9D9D9"/>
-                      </a:solidFill>
-                      <a:prstDash val="solid"/>
-                      <a:round/>
-                      <a:headEnd type="none" w="med" len="med"/>
-                      <a:tailEnd type="none" w="med" len="med"/>
-                    </a:lnB>
-                  </a:tcPr>
-                </a:tc>
-                <a:tc>
-                  <a:txBody>
-                    <a:bodyPr/>
-                    <a:lstStyle/>
-                    <a:p>
-                      <a:pPr algn="ctr" indent="0" marL="0">
-                        <a:buNone/>
-                      </a:pPr>
-                      <a:r>
-                        <a:rPr lang="en-US" sz="1200" dirty="0">
-                          <a:solidFill>
-                            <a:srgbClr val="1A1A1A"/>
-                          </a:solidFill>
-                          <a:latin typeface="Calibri" pitchFamily="34" charset="0"/>
-                          <a:ea typeface="Calibri" pitchFamily="34" charset="-122"/>
-                          <a:cs typeface="Calibri" pitchFamily="34" charset="-120"/>
-                        </a:rPr>
-                        <a:t>+0.12 (small)</a:t>
-                      </a:r>
-                      <a:endParaRPr lang="en-US" sz="1200" dirty="0">
-                        <a:latin typeface="Calibri" charset="0"/>
-                        <a:ea typeface="Calibri" charset="0"/>
-                        <a:cs typeface="Calibri" charset="0"/>
-                      </a:endParaRPr>
-                    </a:p>
-                  </a:txBody>
-                  <a:tcPr marL="91440" marR="91440" marT="45720" marB="45720">
-                    <a:lnL w="6350" cap="flat" cmpd="sng" algn="ctr">
-                      <a:solidFill>
-                        <a:srgbClr val="D9D9D9"/>
-                      </a:solidFill>
-                      <a:prstDash val="solid"/>
-                      <a:round/>
-                      <a:headEnd type="none" w="med" len="med"/>
-                      <a:tailEnd type="none" w="med" len="med"/>
-                    </a:lnL>
-                    <a:lnR w="6350" cap="flat" cmpd="sng" algn="ctr">
-                      <a:solidFill>
-                        <a:srgbClr val="D9D9D9"/>
-                      </a:solidFill>
-                      <a:prstDash val="solid"/>
-                      <a:round/>
-                      <a:headEnd type="none" w="med" len="med"/>
-                      <a:tailEnd type="none" w="med" len="med"/>
-                    </a:lnR>
-                    <a:lnT w="6350" cap="flat" cmpd="sng" algn="ctr">
-                      <a:solidFill>
-                        <a:srgbClr val="D9D9D9"/>
-                      </a:solidFill>
-                      <a:prstDash val="solid"/>
-                      <a:round/>
-                      <a:headEnd type="none" w="med" len="med"/>
-                      <a:tailEnd type="none" w="med" len="med"/>
-                    </a:lnT>
-                    <a:lnB w="6350" cap="flat" cmpd="sng" algn="ctr">
-                      <a:solidFill>
-                        <a:srgbClr val="D9D9D9"/>
-                      </a:solidFill>
-                      <a:prstDash val="solid"/>
-                      <a:round/>
-                      <a:headEnd type="none" w="med" len="med"/>
-                      <a:tailEnd type="none" w="med" len="med"/>
-                    </a:lnB>
-                  </a:tcPr>
-                </a:tc>
-                <a:tc>
-                  <a:txBody>
-                    <a:bodyPr/>
-                    <a:lstStyle/>
-                    <a:p>
-                      <a:pPr algn="ctr" indent="0" marL="0">
-                        <a:buNone/>
-                      </a:pPr>
-                      <a:r>
-                        <a:rPr lang="en-US" sz="1200" dirty="0">
-                          <a:solidFill>
-                            <a:srgbClr val="1A1A1A"/>
-                          </a:solidFill>
-                          <a:latin typeface="Calibri" pitchFamily="34" charset="0"/>
-                          <a:ea typeface="Calibri" pitchFamily="34" charset="-122"/>
-                          <a:cs typeface="Calibri" pitchFamily="34" charset="-120"/>
-                        </a:rPr>
-                        <a:t>[1, 6]</a:t>
-                      </a:r>
-                      <a:endParaRPr lang="en-US" sz="1200" dirty="0">
-                        <a:latin typeface="Calibri" charset="0"/>
-                        <a:ea typeface="Calibri" charset="0"/>
-                        <a:cs typeface="Calibri" charset="0"/>
-                      </a:endParaRPr>
-                    </a:p>
-                  </a:txBody>
-                  <a:tcPr marL="91440" marR="91440" marT="45720" marB="45720">
-                    <a:lnL w="6350" cap="flat" cmpd="sng" algn="ctr">
-                      <a:solidFill>
-                        <a:srgbClr val="D9D9D9"/>
-                      </a:solidFill>
-                      <a:prstDash val="solid"/>
-                      <a:round/>
-                      <a:headEnd type="none" w="med" len="med"/>
-                      <a:tailEnd type="none" w="med" len="med"/>
-                    </a:lnL>
-                    <a:lnR w="6350" cap="flat" cmpd="sng" algn="ctr">
-                      <a:solidFill>
-                        <a:srgbClr val="D9D9D9"/>
-                      </a:solidFill>
-                      <a:prstDash val="solid"/>
-                      <a:round/>
-                      <a:headEnd type="none" w="med" len="med"/>
-                      <a:tailEnd type="none" w="med" len="med"/>
-                    </a:lnR>
-                    <a:lnT w="6350" cap="flat" cmpd="sng" algn="ctr">
-                      <a:solidFill>
-                        <a:srgbClr val="D9D9D9"/>
-                      </a:solidFill>
-                      <a:prstDash val="solid"/>
-                      <a:round/>
-                      <a:headEnd type="none" w="med" len="med"/>
-                      <a:tailEnd type="none" w="med" len="med"/>
-                    </a:lnT>
-                    <a:lnB w="6350" cap="flat" cmpd="sng" algn="ctr">
-                      <a:solidFill>
-                        <a:srgbClr val="D9D9D9"/>
-                      </a:solidFill>
-                      <a:prstDash val="solid"/>
-                      <a:round/>
-                      <a:headEnd type="none" w="med" len="med"/>
-                      <a:tailEnd type="none" w="med" len="med"/>
-                    </a:lnB>
-                  </a:tcPr>
-                </a:tc>
-                <a:tc>
-                  <a:txBody>
-                    <a:bodyPr/>
-                    <a:lstStyle/>
-                    <a:p>
-                      <a:pPr algn="ctr" indent="0" marL="0">
-                        <a:buNone/>
-                      </a:pPr>
-                      <a:r>
-                        <a:rPr lang="en-US" sz="1200" dirty="0">
-                          <a:solidFill>
-                            <a:srgbClr val="1A1A1A"/>
-                          </a:solidFill>
-                          <a:latin typeface="Calibri" pitchFamily="34" charset="0"/>
-                          <a:ea typeface="Calibri" pitchFamily="34" charset="-122"/>
-                          <a:cs typeface="Calibri" pitchFamily="34" charset="-120"/>
-                        </a:rPr>
-                        <a:t>3,367</a:t>
-                      </a:r>
-                      <a:endParaRPr lang="en-US" sz="1200" dirty="0">
+                      <a:endParaRPr lang="en-US" sz="1300" dirty="0">
                         <a:latin typeface="Calibri" charset="0"/>
                         <a:ea typeface="Calibri" charset="0"/>
                         <a:cs typeface="Calibri" charset="0"/>
@@ -3896,7 +3413,7 @@
                         <a:buNone/>
                       </a:pPr>
                       <a:r>
-                        <a:rPr lang="en-US" sz="1200" dirty="0">
+                        <a:rPr lang="en-US" sz="1300" dirty="0">
                           <a:solidFill>
                             <a:srgbClr val="1A1A1A"/>
                           </a:solidFill>
@@ -3906,7 +3423,7 @@
                         </a:rPr>
                         <a:t>HealthSouth (HRC)</a:t>
                       </a:r>
-                      <a:endParaRPr lang="en-US" sz="1200" dirty="0">
+                      <a:endParaRPr lang="en-US" sz="1300" dirty="0">
                         <a:latin typeface="Calibri" charset="0"/>
                         <a:ea typeface="Calibri" charset="0"/>
                         <a:cs typeface="Calibri" charset="0"/>
@@ -3961,7 +3478,7 @@
                         <a:buNone/>
                       </a:pPr>
                       <a:r>
-                        <a:rPr lang="en-US" sz="1200" dirty="0">
+                        <a:rPr lang="en-US" sz="1300" dirty="0">
                           <a:solidFill>
                             <a:srgbClr val="1A1A1A"/>
                           </a:solidFill>
@@ -3971,7 +3488,7 @@
                         </a:rPr>
                         <a:t>7 / 12</a:t>
                       </a:r>
-                      <a:endParaRPr lang="en-US" sz="1200" dirty="0">
+                      <a:endParaRPr lang="en-US" sz="1300" dirty="0">
                         <a:latin typeface="Calibri" charset="0"/>
                         <a:ea typeface="Calibri" charset="0"/>
                         <a:cs typeface="Calibri" charset="0"/>
@@ -4022,216 +3539,21 @@
                     <a:bodyPr/>
                     <a:lstStyle/>
                     <a:p>
-                      <a:pPr algn="ctr" indent="0" marL="0">
+                      <a:pPr indent="0" marL="0">
                         <a:buNone/>
                       </a:pPr>
                       <a:r>
-                        <a:rPr lang="en-US" sz="1200" dirty="0">
+                        <a:rPr lang="en-US" sz="1300" dirty="0">
                           <a:solidFill>
-                            <a:srgbClr val="1A1A1A"/>
+                            <a:srgbClr val="555555"/>
                           </a:solidFill>
                           <a:latin typeface="Calibri" pitchFamily="34" charset="0"/>
                           <a:ea typeface="Calibri" pitchFamily="34" charset="-122"/>
                           <a:cs typeface="Calibri" pitchFamily="34" charset="-120"/>
                         </a:rPr>
-                        <a:t>1.0</a:t>
+                        <a:t>non-positive</a:t>
                       </a:r>
-                      <a:endParaRPr lang="en-US" sz="1200" dirty="0">
-                        <a:latin typeface="Calibri" charset="0"/>
-                        <a:ea typeface="Calibri" charset="0"/>
-                        <a:cs typeface="Calibri" charset="0"/>
-                      </a:endParaRPr>
-                    </a:p>
-                  </a:txBody>
-                  <a:tcPr marL="91440" marR="91440" marT="45720" marB="45720">
-                    <a:lnL w="6350" cap="flat" cmpd="sng" algn="ctr">
-                      <a:solidFill>
-                        <a:srgbClr val="D9D9D9"/>
-                      </a:solidFill>
-                      <a:prstDash val="solid"/>
-                      <a:round/>
-                      <a:headEnd type="none" w="med" len="med"/>
-                      <a:tailEnd type="none" w="med" len="med"/>
-                    </a:lnL>
-                    <a:lnR w="6350" cap="flat" cmpd="sng" algn="ctr">
-                      <a:solidFill>
-                        <a:srgbClr val="D9D9D9"/>
-                      </a:solidFill>
-                      <a:prstDash val="solid"/>
-                      <a:round/>
-                      <a:headEnd type="none" w="med" len="med"/>
-                      <a:tailEnd type="none" w="med" len="med"/>
-                    </a:lnR>
-                    <a:lnT w="6350" cap="flat" cmpd="sng" algn="ctr">
-                      <a:solidFill>
-                        <a:srgbClr val="D9D9D9"/>
-                      </a:solidFill>
-                      <a:prstDash val="solid"/>
-                      <a:round/>
-                      <a:headEnd type="none" w="med" len="med"/>
-                      <a:tailEnd type="none" w="med" len="med"/>
-                    </a:lnT>
-                    <a:lnB w="6350" cap="flat" cmpd="sng" algn="ctr">
-                      <a:solidFill>
-                        <a:srgbClr val="D9D9D9"/>
-                      </a:solidFill>
-                      <a:prstDash val="solid"/>
-                      <a:round/>
-                      <a:headEnd type="none" w="med" len="med"/>
-                      <a:tailEnd type="none" w="med" len="med"/>
-                    </a:lnB>
-                  </a:tcPr>
-                </a:tc>
-                <a:tc>
-                  <a:txBody>
-                    <a:bodyPr/>
-                    <a:lstStyle/>
-                    <a:p>
-                      <a:pPr algn="ctr" indent="0" marL="0">
-                        <a:buNone/>
-                      </a:pPr>
-                      <a:r>
-                        <a:rPr lang="en-US" sz="1200" dirty="0">
-                          <a:solidFill>
-                            <a:srgbClr val="1A1A1A"/>
-                          </a:solidFill>
-                          <a:latin typeface="Calibri" pitchFamily="34" charset="0"/>
-                          <a:ea typeface="Calibri" pitchFamily="34" charset="-122"/>
-                          <a:cs typeface="Calibri" pitchFamily="34" charset="-120"/>
-                        </a:rPr>
-                        <a:t>−0.17</a:t>
-                      </a:r>
-                      <a:endParaRPr lang="en-US" sz="1200" dirty="0">
-                        <a:latin typeface="Calibri" charset="0"/>
-                        <a:ea typeface="Calibri" charset="0"/>
-                        <a:cs typeface="Calibri" charset="0"/>
-                      </a:endParaRPr>
-                    </a:p>
-                  </a:txBody>
-                  <a:tcPr marL="91440" marR="91440" marT="45720" marB="45720">
-                    <a:lnL w="6350" cap="flat" cmpd="sng" algn="ctr">
-                      <a:solidFill>
-                        <a:srgbClr val="D9D9D9"/>
-                      </a:solidFill>
-                      <a:prstDash val="solid"/>
-                      <a:round/>
-                      <a:headEnd type="none" w="med" len="med"/>
-                      <a:tailEnd type="none" w="med" len="med"/>
-                    </a:lnL>
-                    <a:lnR w="6350" cap="flat" cmpd="sng" algn="ctr">
-                      <a:solidFill>
-                        <a:srgbClr val="D9D9D9"/>
-                      </a:solidFill>
-                      <a:prstDash val="solid"/>
-                      <a:round/>
-                      <a:headEnd type="none" w="med" len="med"/>
-                      <a:tailEnd type="none" w="med" len="med"/>
-                    </a:lnR>
-                    <a:lnT w="6350" cap="flat" cmpd="sng" algn="ctr">
-                      <a:solidFill>
-                        <a:srgbClr val="D9D9D9"/>
-                      </a:solidFill>
-                      <a:prstDash val="solid"/>
-                      <a:round/>
-                      <a:headEnd type="none" w="med" len="med"/>
-                      <a:tailEnd type="none" w="med" len="med"/>
-                    </a:lnT>
-                    <a:lnB w="6350" cap="flat" cmpd="sng" algn="ctr">
-                      <a:solidFill>
-                        <a:srgbClr val="D9D9D9"/>
-                      </a:solidFill>
-                      <a:prstDash val="solid"/>
-                      <a:round/>
-                      <a:headEnd type="none" w="med" len="med"/>
-                      <a:tailEnd type="none" w="med" len="med"/>
-                    </a:lnB>
-                  </a:tcPr>
-                </a:tc>
-                <a:tc>
-                  <a:txBody>
-                    <a:bodyPr/>
-                    <a:lstStyle/>
-                    <a:p>
-                      <a:pPr algn="ctr" indent="0" marL="0">
-                        <a:buNone/>
-                      </a:pPr>
-                      <a:r>
-                        <a:rPr lang="en-US" sz="1200" dirty="0">
-                          <a:solidFill>
-                            <a:srgbClr val="1A1A1A"/>
-                          </a:solidFill>
-                          <a:latin typeface="Calibri" pitchFamily="34" charset="0"/>
-                          <a:ea typeface="Calibri" pitchFamily="34" charset="-122"/>
-                          <a:cs typeface="Calibri" pitchFamily="34" charset="-120"/>
-                        </a:rPr>
-                        <a:t>[4, 10]</a:t>
-                      </a:r>
-                      <a:endParaRPr lang="en-US" sz="1200" dirty="0">
-                        <a:latin typeface="Calibri" charset="0"/>
-                        <a:ea typeface="Calibri" charset="0"/>
-                        <a:cs typeface="Calibri" charset="0"/>
-                      </a:endParaRPr>
-                    </a:p>
-                  </a:txBody>
-                  <a:tcPr marL="91440" marR="91440" marT="45720" marB="45720">
-                    <a:lnL w="6350" cap="flat" cmpd="sng" algn="ctr">
-                      <a:solidFill>
-                        <a:srgbClr val="D9D9D9"/>
-                      </a:solidFill>
-                      <a:prstDash val="solid"/>
-                      <a:round/>
-                      <a:headEnd type="none" w="med" len="med"/>
-                      <a:tailEnd type="none" w="med" len="med"/>
-                    </a:lnL>
-                    <a:lnR w="6350" cap="flat" cmpd="sng" algn="ctr">
-                      <a:solidFill>
-                        <a:srgbClr val="D9D9D9"/>
-                      </a:solidFill>
-                      <a:prstDash val="solid"/>
-                      <a:round/>
-                      <a:headEnd type="none" w="med" len="med"/>
-                      <a:tailEnd type="none" w="med" len="med"/>
-                    </a:lnR>
-                    <a:lnT w="6350" cap="flat" cmpd="sng" algn="ctr">
-                      <a:solidFill>
-                        <a:srgbClr val="D9D9D9"/>
-                      </a:solidFill>
-                      <a:prstDash val="solid"/>
-                      <a:round/>
-                      <a:headEnd type="none" w="med" len="med"/>
-                      <a:tailEnd type="none" w="med" len="med"/>
-                    </a:lnT>
-                    <a:lnB w="6350" cap="flat" cmpd="sng" algn="ctr">
-                      <a:solidFill>
-                        <a:srgbClr val="D9D9D9"/>
-                      </a:solidFill>
-                      <a:prstDash val="solid"/>
-                      <a:round/>
-                      <a:headEnd type="none" w="med" len="med"/>
-                      <a:tailEnd type="none" w="med" len="med"/>
-                    </a:lnB>
-                  </a:tcPr>
-                </a:tc>
-                <a:tc>
-                  <a:txBody>
-                    <a:bodyPr/>
-                    <a:lstStyle/>
-                    <a:p>
-                      <a:pPr algn="ctr" indent="0" marL="0">
-                        <a:buNone/>
-                      </a:pPr>
-                      <a:r>
-                        <a:rPr lang="en-US" sz="1200" dirty="0">
-                          <a:solidFill>
-                            <a:srgbClr val="1A1A1A"/>
-                          </a:solidFill>
-                          <a:latin typeface="Calibri" pitchFamily="34" charset="0"/>
-                          <a:ea typeface="Calibri" pitchFamily="34" charset="-122"/>
-                          <a:cs typeface="Calibri" pitchFamily="34" charset="-120"/>
-                        </a:rPr>
-                        <a:t>2,283</a:t>
-                      </a:r>
-                      <a:endParaRPr lang="en-US" sz="1200" dirty="0">
+                      <a:endParaRPr lang="en-US" sz="1300" dirty="0">
                         <a:latin typeface="Calibri" charset="0"/>
                         <a:ea typeface="Calibri" charset="0"/>
                         <a:cs typeface="Calibri" charset="0"/>
@@ -4288,7 +3610,7 @@
                         <a:buNone/>
                       </a:pPr>
                       <a:r>
-                        <a:rPr lang="en-US" sz="1200" dirty="0">
+                        <a:rPr lang="en-US" sz="1300" dirty="0">
                           <a:solidFill>
                             <a:srgbClr val="1A1A1A"/>
                           </a:solidFill>
@@ -4298,7 +3620,7 @@
                         </a:rPr>
                         <a:t>Valeant (VRX)</a:t>
                       </a:r>
-                      <a:endParaRPr lang="en-US" sz="1200" dirty="0">
+                      <a:endParaRPr lang="en-US" sz="1300" dirty="0">
                         <a:latin typeface="Calibri" charset="0"/>
                         <a:ea typeface="Calibri" charset="0"/>
                         <a:cs typeface="Calibri" charset="0"/>
@@ -4353,7 +3675,7 @@
                         <a:buNone/>
                       </a:pPr>
                       <a:r>
-                        <a:rPr lang="en-US" sz="1200" dirty="0">
+                        <a:rPr lang="en-US" sz="1300" dirty="0">
                           <a:solidFill>
                             <a:srgbClr val="1A1A1A"/>
                           </a:solidFill>
@@ -4363,7 +3685,7 @@
                         </a:rPr>
                         <a:t>8 / 13</a:t>
                       </a:r>
-                      <a:endParaRPr lang="en-US" sz="1200" dirty="0">
+                      <a:endParaRPr lang="en-US" sz="1300" dirty="0">
                         <a:latin typeface="Calibri" charset="0"/>
                         <a:ea typeface="Calibri" charset="0"/>
                         <a:cs typeface="Calibri" charset="0"/>
@@ -4414,216 +3736,21 @@
                     <a:bodyPr/>
                     <a:lstStyle/>
                     <a:p>
-                      <a:pPr algn="ctr" indent="0" marL="0">
+                      <a:pPr indent="0" marL="0">
                         <a:buNone/>
                       </a:pPr>
                       <a:r>
-                        <a:rPr lang="en-US" sz="1200" dirty="0">
+                        <a:rPr lang="en-US" sz="1300" dirty="0">
                           <a:solidFill>
-                            <a:srgbClr val="1A1A1A"/>
+                            <a:srgbClr val="555555"/>
                           </a:solidFill>
                           <a:latin typeface="Calibri" pitchFamily="34" charset="0"/>
                           <a:ea typeface="Calibri" pitchFamily="34" charset="-122"/>
                           <a:cs typeface="Calibri" pitchFamily="34" charset="-120"/>
                         </a:rPr>
-                        <a:t>1.0</a:t>
+                        <a:t>non-positive</a:t>
                       </a:r>
-                      <a:endParaRPr lang="en-US" sz="1200" dirty="0">
-                        <a:latin typeface="Calibri" charset="0"/>
-                        <a:ea typeface="Calibri" charset="0"/>
-                        <a:cs typeface="Calibri" charset="0"/>
-                      </a:endParaRPr>
-                    </a:p>
-                  </a:txBody>
-                  <a:tcPr marL="91440" marR="91440" marT="45720" marB="45720">
-                    <a:lnL w="6350" cap="flat" cmpd="sng" algn="ctr">
-                      <a:solidFill>
-                        <a:srgbClr val="D9D9D9"/>
-                      </a:solidFill>
-                      <a:prstDash val="solid"/>
-                      <a:round/>
-                      <a:headEnd type="none" w="med" len="med"/>
-                      <a:tailEnd type="none" w="med" len="med"/>
-                    </a:lnL>
-                    <a:lnR w="6350" cap="flat" cmpd="sng" algn="ctr">
-                      <a:solidFill>
-                        <a:srgbClr val="D9D9D9"/>
-                      </a:solidFill>
-                      <a:prstDash val="solid"/>
-                      <a:round/>
-                      <a:headEnd type="none" w="med" len="med"/>
-                      <a:tailEnd type="none" w="med" len="med"/>
-                    </a:lnR>
-                    <a:lnT w="6350" cap="flat" cmpd="sng" algn="ctr">
-                      <a:solidFill>
-                        <a:srgbClr val="D9D9D9"/>
-                      </a:solidFill>
-                      <a:prstDash val="solid"/>
-                      <a:round/>
-                      <a:headEnd type="none" w="med" len="med"/>
-                      <a:tailEnd type="none" w="med" len="med"/>
-                    </a:lnT>
-                    <a:lnB w="6350" cap="flat" cmpd="sng" algn="ctr">
-                      <a:solidFill>
-                        <a:srgbClr val="D9D9D9"/>
-                      </a:solidFill>
-                      <a:prstDash val="solid"/>
-                      <a:round/>
-                      <a:headEnd type="none" w="med" len="med"/>
-                      <a:tailEnd type="none" w="med" len="med"/>
-                    </a:lnB>
-                  </a:tcPr>
-                </a:tc>
-                <a:tc>
-                  <a:txBody>
-                    <a:bodyPr/>
-                    <a:lstStyle/>
-                    <a:p>
-                      <a:pPr algn="ctr" indent="0" marL="0">
-                        <a:buNone/>
-                      </a:pPr>
-                      <a:r>
-                        <a:rPr lang="en-US" sz="1200" dirty="0">
-                          <a:solidFill>
-                            <a:srgbClr val="1A1A1A"/>
-                          </a:solidFill>
-                          <a:latin typeface="Calibri" pitchFamily="34" charset="0"/>
-                          <a:ea typeface="Calibri" pitchFamily="34" charset="-122"/>
-                          <a:cs typeface="Calibri" pitchFamily="34" charset="-120"/>
-                        </a:rPr>
-                        <a:t>−0.19</a:t>
-                      </a:r>
-                      <a:endParaRPr lang="en-US" sz="1200" dirty="0">
-                        <a:latin typeface="Calibri" charset="0"/>
-                        <a:ea typeface="Calibri" charset="0"/>
-                        <a:cs typeface="Calibri" charset="0"/>
-                      </a:endParaRPr>
-                    </a:p>
-                  </a:txBody>
-                  <a:tcPr marL="91440" marR="91440" marT="45720" marB="45720">
-                    <a:lnL w="6350" cap="flat" cmpd="sng" algn="ctr">
-                      <a:solidFill>
-                        <a:srgbClr val="D9D9D9"/>
-                      </a:solidFill>
-                      <a:prstDash val="solid"/>
-                      <a:round/>
-                      <a:headEnd type="none" w="med" len="med"/>
-                      <a:tailEnd type="none" w="med" len="med"/>
-                    </a:lnL>
-                    <a:lnR w="6350" cap="flat" cmpd="sng" algn="ctr">
-                      <a:solidFill>
-                        <a:srgbClr val="D9D9D9"/>
-                      </a:solidFill>
-                      <a:prstDash val="solid"/>
-                      <a:round/>
-                      <a:headEnd type="none" w="med" len="med"/>
-                      <a:tailEnd type="none" w="med" len="med"/>
-                    </a:lnR>
-                    <a:lnT w="6350" cap="flat" cmpd="sng" algn="ctr">
-                      <a:solidFill>
-                        <a:srgbClr val="D9D9D9"/>
-                      </a:solidFill>
-                      <a:prstDash val="solid"/>
-                      <a:round/>
-                      <a:headEnd type="none" w="med" len="med"/>
-                      <a:tailEnd type="none" w="med" len="med"/>
-                    </a:lnT>
-                    <a:lnB w="6350" cap="flat" cmpd="sng" algn="ctr">
-                      <a:solidFill>
-                        <a:srgbClr val="D9D9D9"/>
-                      </a:solidFill>
-                      <a:prstDash val="solid"/>
-                      <a:round/>
-                      <a:headEnd type="none" w="med" len="med"/>
-                      <a:tailEnd type="none" w="med" len="med"/>
-                    </a:lnB>
-                  </a:tcPr>
-                </a:tc>
-                <a:tc>
-                  <a:txBody>
-                    <a:bodyPr/>
-                    <a:lstStyle/>
-                    <a:p>
-                      <a:pPr algn="ctr" indent="0" marL="0">
-                        <a:buNone/>
-                      </a:pPr>
-                      <a:r>
-                        <a:rPr lang="en-US" sz="1200" dirty="0">
-                          <a:solidFill>
-                            <a:srgbClr val="1A1A1A"/>
-                          </a:solidFill>
-                          <a:latin typeface="Calibri" pitchFamily="34" charset="0"/>
-                          <a:ea typeface="Calibri" pitchFamily="34" charset="-122"/>
-                          <a:cs typeface="Calibri" pitchFamily="34" charset="-120"/>
-                        </a:rPr>
-                        <a:t>[5, 11]</a:t>
-                      </a:r>
-                      <a:endParaRPr lang="en-US" sz="1200" dirty="0">
-                        <a:latin typeface="Calibri" charset="0"/>
-                        <a:ea typeface="Calibri" charset="0"/>
-                        <a:cs typeface="Calibri" charset="0"/>
-                      </a:endParaRPr>
-                    </a:p>
-                  </a:txBody>
-                  <a:tcPr marL="91440" marR="91440" marT="45720" marB="45720">
-                    <a:lnL w="6350" cap="flat" cmpd="sng" algn="ctr">
-                      <a:solidFill>
-                        <a:srgbClr val="D9D9D9"/>
-                      </a:solidFill>
-                      <a:prstDash val="solid"/>
-                      <a:round/>
-                      <a:headEnd type="none" w="med" len="med"/>
-                      <a:tailEnd type="none" w="med" len="med"/>
-                    </a:lnL>
-                    <a:lnR w="6350" cap="flat" cmpd="sng" algn="ctr">
-                      <a:solidFill>
-                        <a:srgbClr val="D9D9D9"/>
-                      </a:solidFill>
-                      <a:prstDash val="solid"/>
-                      <a:round/>
-                      <a:headEnd type="none" w="med" len="med"/>
-                      <a:tailEnd type="none" w="med" len="med"/>
-                    </a:lnR>
-                    <a:lnT w="6350" cap="flat" cmpd="sng" algn="ctr">
-                      <a:solidFill>
-                        <a:srgbClr val="D9D9D9"/>
-                      </a:solidFill>
-                      <a:prstDash val="solid"/>
-                      <a:round/>
-                      <a:headEnd type="none" w="med" len="med"/>
-                      <a:tailEnd type="none" w="med" len="med"/>
-                    </a:lnT>
-                    <a:lnB w="6350" cap="flat" cmpd="sng" algn="ctr">
-                      <a:solidFill>
-                        <a:srgbClr val="D9D9D9"/>
-                      </a:solidFill>
-                      <a:prstDash val="solid"/>
-                      <a:round/>
-                      <a:headEnd type="none" w="med" len="med"/>
-                      <a:tailEnd type="none" w="med" len="med"/>
-                    </a:lnB>
-                  </a:tcPr>
-                </a:tc>
-                <a:tc>
-                  <a:txBody>
-                    <a:bodyPr/>
-                    <a:lstStyle/>
-                    <a:p>
-                      <a:pPr algn="ctr" indent="0" marL="0">
-                        <a:buNone/>
-                      </a:pPr>
-                      <a:r>
-                        <a:rPr lang="en-US" sz="1200" dirty="0">
-                          <a:solidFill>
-                            <a:srgbClr val="1A1A1A"/>
-                          </a:solidFill>
-                          <a:latin typeface="Calibri" pitchFamily="34" charset="0"/>
-                          <a:ea typeface="Calibri" pitchFamily="34" charset="-122"/>
-                          <a:cs typeface="Calibri" pitchFamily="34" charset="-120"/>
-                        </a:rPr>
-                        <a:t>4,327</a:t>
-                      </a:r>
-                      <a:endParaRPr lang="en-US" sz="1200" dirty="0">
+                      <a:endParaRPr lang="en-US" sz="1300" dirty="0">
                         <a:latin typeface="Calibri" charset="0"/>
                         <a:ea typeface="Calibri" charset="0"/>
                         <a:cs typeface="Calibri" charset="0"/>
@@ -4680,7 +3807,7 @@
                         <a:buNone/>
                       </a:pPr>
                       <a:r>
-                        <a:rPr lang="en-US" sz="1200" dirty="0">
+                        <a:rPr lang="en-US" sz="1300" dirty="0">
                           <a:solidFill>
                             <a:srgbClr val="1A1A1A"/>
                           </a:solidFill>
@@ -4690,7 +3817,7 @@
                         </a:rPr>
                         <a:t>Tyco (TYC)</a:t>
                       </a:r>
-                      <a:endParaRPr lang="en-US" sz="1200" dirty="0">
+                      <a:endParaRPr lang="en-US" sz="1300" dirty="0">
                         <a:latin typeface="Calibri" charset="0"/>
                         <a:ea typeface="Calibri" charset="0"/>
                         <a:cs typeface="Calibri" charset="0"/>
@@ -4745,7 +3872,7 @@
                         <a:buNone/>
                       </a:pPr>
                       <a:r>
-                        <a:rPr lang="en-US" sz="1200" dirty="0">
+                        <a:rPr lang="en-US" sz="1300" dirty="0">
                           <a:solidFill>
                             <a:srgbClr val="1A1A1A"/>
                           </a:solidFill>
@@ -4755,7 +3882,7 @@
                         </a:rPr>
                         <a:t>9 / 13</a:t>
                       </a:r>
-                      <a:endParaRPr lang="en-US" sz="1200" dirty="0">
+                      <a:endParaRPr lang="en-US" sz="1300" dirty="0">
                         <a:latin typeface="Calibri" charset="0"/>
                         <a:ea typeface="Calibri" charset="0"/>
                         <a:cs typeface="Calibri" charset="0"/>
@@ -4806,216 +3933,21 @@
                     <a:bodyPr/>
                     <a:lstStyle/>
                     <a:p>
-                      <a:pPr algn="ctr" indent="0" marL="0">
+                      <a:pPr indent="0" marL="0">
                         <a:buNone/>
                       </a:pPr>
                       <a:r>
-                        <a:rPr lang="en-US" sz="1200" dirty="0">
+                        <a:rPr lang="en-US" sz="1300" dirty="0">
                           <a:solidFill>
-                            <a:srgbClr val="1A1A1A"/>
+                            <a:srgbClr val="555555"/>
                           </a:solidFill>
                           <a:latin typeface="Calibri" pitchFamily="34" charset="0"/>
                           <a:ea typeface="Calibri" pitchFamily="34" charset="-122"/>
                           <a:cs typeface="Calibri" pitchFamily="34" charset="-120"/>
                         </a:rPr>
-                        <a:t>1.0</a:t>
+                        <a:t>non-positive</a:t>
                       </a:r>
-                      <a:endParaRPr lang="en-US" sz="1200" dirty="0">
-                        <a:latin typeface="Calibri" charset="0"/>
-                        <a:ea typeface="Calibri" charset="0"/>
-                        <a:cs typeface="Calibri" charset="0"/>
-                      </a:endParaRPr>
-                    </a:p>
-                  </a:txBody>
-                  <a:tcPr marL="91440" marR="91440" marT="45720" marB="45720">
-                    <a:lnL w="6350" cap="flat" cmpd="sng" algn="ctr">
-                      <a:solidFill>
-                        <a:srgbClr val="D9D9D9"/>
-                      </a:solidFill>
-                      <a:prstDash val="solid"/>
-                      <a:round/>
-                      <a:headEnd type="none" w="med" len="med"/>
-                      <a:tailEnd type="none" w="med" len="med"/>
-                    </a:lnL>
-                    <a:lnR w="6350" cap="flat" cmpd="sng" algn="ctr">
-                      <a:solidFill>
-                        <a:srgbClr val="D9D9D9"/>
-                      </a:solidFill>
-                      <a:prstDash val="solid"/>
-                      <a:round/>
-                      <a:headEnd type="none" w="med" len="med"/>
-                      <a:tailEnd type="none" w="med" len="med"/>
-                    </a:lnR>
-                    <a:lnT w="6350" cap="flat" cmpd="sng" algn="ctr">
-                      <a:solidFill>
-                        <a:srgbClr val="D9D9D9"/>
-                      </a:solidFill>
-                      <a:prstDash val="solid"/>
-                      <a:round/>
-                      <a:headEnd type="none" w="med" len="med"/>
-                      <a:tailEnd type="none" w="med" len="med"/>
-                    </a:lnT>
-                    <a:lnB w="6350" cap="flat" cmpd="sng" algn="ctr">
-                      <a:solidFill>
-                        <a:srgbClr val="D9D9D9"/>
-                      </a:solidFill>
-                      <a:prstDash val="solid"/>
-                      <a:round/>
-                      <a:headEnd type="none" w="med" len="med"/>
-                      <a:tailEnd type="none" w="med" len="med"/>
-                    </a:lnB>
-                  </a:tcPr>
-                </a:tc>
-                <a:tc>
-                  <a:txBody>
-                    <a:bodyPr/>
-                    <a:lstStyle/>
-                    <a:p>
-                      <a:pPr algn="ctr" indent="0" marL="0">
-                        <a:buNone/>
-                      </a:pPr>
-                      <a:r>
-                        <a:rPr lang="en-US" sz="1200" dirty="0">
-                          <a:solidFill>
-                            <a:srgbClr val="1A1A1A"/>
-                          </a:solidFill>
-                          <a:latin typeface="Calibri" pitchFamily="34" charset="0"/>
-                          <a:ea typeface="Calibri" pitchFamily="34" charset="-122"/>
-                          <a:cs typeface="Calibri" pitchFamily="34" charset="-120"/>
-                        </a:rPr>
-                        <a:t>−0.14</a:t>
-                      </a:r>
-                      <a:endParaRPr lang="en-US" sz="1200" dirty="0">
-                        <a:latin typeface="Calibri" charset="0"/>
-                        <a:ea typeface="Calibri" charset="0"/>
-                        <a:cs typeface="Calibri" charset="0"/>
-                      </a:endParaRPr>
-                    </a:p>
-                  </a:txBody>
-                  <a:tcPr marL="91440" marR="91440" marT="45720" marB="45720">
-                    <a:lnL w="6350" cap="flat" cmpd="sng" algn="ctr">
-                      <a:solidFill>
-                        <a:srgbClr val="D9D9D9"/>
-                      </a:solidFill>
-                      <a:prstDash val="solid"/>
-                      <a:round/>
-                      <a:headEnd type="none" w="med" len="med"/>
-                      <a:tailEnd type="none" w="med" len="med"/>
-                    </a:lnL>
-                    <a:lnR w="6350" cap="flat" cmpd="sng" algn="ctr">
-                      <a:solidFill>
-                        <a:srgbClr val="D9D9D9"/>
-                      </a:solidFill>
-                      <a:prstDash val="solid"/>
-                      <a:round/>
-                      <a:headEnd type="none" w="med" len="med"/>
-                      <a:tailEnd type="none" w="med" len="med"/>
-                    </a:lnR>
-                    <a:lnT w="6350" cap="flat" cmpd="sng" algn="ctr">
-                      <a:solidFill>
-                        <a:srgbClr val="D9D9D9"/>
-                      </a:solidFill>
-                      <a:prstDash val="solid"/>
-                      <a:round/>
-                      <a:headEnd type="none" w="med" len="med"/>
-                      <a:tailEnd type="none" w="med" len="med"/>
-                    </a:lnT>
-                    <a:lnB w="6350" cap="flat" cmpd="sng" algn="ctr">
-                      <a:solidFill>
-                        <a:srgbClr val="D9D9D9"/>
-                      </a:solidFill>
-                      <a:prstDash val="solid"/>
-                      <a:round/>
-                      <a:headEnd type="none" w="med" len="med"/>
-                      <a:tailEnd type="none" w="med" len="med"/>
-                    </a:lnB>
-                  </a:tcPr>
-                </a:tc>
-                <a:tc>
-                  <a:txBody>
-                    <a:bodyPr/>
-                    <a:lstStyle/>
-                    <a:p>
-                      <a:pPr algn="ctr" indent="0" marL="0">
-                        <a:buNone/>
-                      </a:pPr>
-                      <a:r>
-                        <a:rPr lang="en-US" sz="1200" dirty="0">
-                          <a:solidFill>
-                            <a:srgbClr val="1A1A1A"/>
-                          </a:solidFill>
-                          <a:latin typeface="Calibri" pitchFamily="34" charset="0"/>
-                          <a:ea typeface="Calibri" pitchFamily="34" charset="-122"/>
-                          <a:cs typeface="Calibri" pitchFamily="34" charset="-120"/>
-                        </a:rPr>
-                        <a:t>[6, 12]</a:t>
-                      </a:r>
-                      <a:endParaRPr lang="en-US" sz="1200" dirty="0">
-                        <a:latin typeface="Calibri" charset="0"/>
-                        <a:ea typeface="Calibri" charset="0"/>
-                        <a:cs typeface="Calibri" charset="0"/>
-                      </a:endParaRPr>
-                    </a:p>
-                  </a:txBody>
-                  <a:tcPr marL="91440" marR="91440" marT="45720" marB="45720">
-                    <a:lnL w="6350" cap="flat" cmpd="sng" algn="ctr">
-                      <a:solidFill>
-                        <a:srgbClr val="D9D9D9"/>
-                      </a:solidFill>
-                      <a:prstDash val="solid"/>
-                      <a:round/>
-                      <a:headEnd type="none" w="med" len="med"/>
-                      <a:tailEnd type="none" w="med" len="med"/>
-                    </a:lnL>
-                    <a:lnR w="6350" cap="flat" cmpd="sng" algn="ctr">
-                      <a:solidFill>
-                        <a:srgbClr val="D9D9D9"/>
-                      </a:solidFill>
-                      <a:prstDash val="solid"/>
-                      <a:round/>
-                      <a:headEnd type="none" w="med" len="med"/>
-                      <a:tailEnd type="none" w="med" len="med"/>
-                    </a:lnR>
-                    <a:lnT w="6350" cap="flat" cmpd="sng" algn="ctr">
-                      <a:solidFill>
-                        <a:srgbClr val="D9D9D9"/>
-                      </a:solidFill>
-                      <a:prstDash val="solid"/>
-                      <a:round/>
-                      <a:headEnd type="none" w="med" len="med"/>
-                      <a:tailEnd type="none" w="med" len="med"/>
-                    </a:lnT>
-                    <a:lnB w="6350" cap="flat" cmpd="sng" algn="ctr">
-                      <a:solidFill>
-                        <a:srgbClr val="D9D9D9"/>
-                      </a:solidFill>
-                      <a:prstDash val="solid"/>
-                      <a:round/>
-                      <a:headEnd type="none" w="med" len="med"/>
-                      <a:tailEnd type="none" w="med" len="med"/>
-                    </a:lnB>
-                  </a:tcPr>
-                </a:tc>
-                <a:tc>
-                  <a:txBody>
-                    <a:bodyPr/>
-                    <a:lstStyle/>
-                    <a:p>
-                      <a:pPr algn="ctr" indent="0" marL="0">
-                        <a:buNone/>
-                      </a:pPr>
-                      <a:r>
-                        <a:rPr lang="en-US" sz="1200" dirty="0">
-                          <a:solidFill>
-                            <a:srgbClr val="1A1A1A"/>
-                          </a:solidFill>
-                          <a:latin typeface="Calibri" pitchFamily="34" charset="0"/>
-                          <a:ea typeface="Calibri" pitchFamily="34" charset="-122"/>
-                          <a:cs typeface="Calibri" pitchFamily="34" charset="-120"/>
-                        </a:rPr>
-                        <a:t>861</a:t>
-                      </a:r>
-                      <a:endParaRPr lang="en-US" sz="1200" dirty="0">
+                      <a:endParaRPr lang="en-US" sz="1300" dirty="0">
                         <a:latin typeface="Calibri" charset="0"/>
                         <a:ea typeface="Calibri" charset="0"/>
                         <a:cs typeface="Calibri" charset="0"/>
@@ -5072,7 +4004,7 @@
                         <a:buNone/>
                       </a:pPr>
                       <a:r>
-                        <a:rPr lang="en-US" sz="1200" dirty="0">
+                        <a:rPr lang="en-US" sz="1300" dirty="0">
                           <a:solidFill>
                             <a:srgbClr val="1A1A1A"/>
                           </a:solidFill>
@@ -5082,7 +4014,7 @@
                         </a:rPr>
                         <a:t>WorldCom (WCOM)</a:t>
                       </a:r>
-                      <a:endParaRPr lang="en-US" sz="1200" dirty="0">
+                      <a:endParaRPr lang="en-US" sz="1300" dirty="0">
                         <a:latin typeface="Calibri" charset="0"/>
                         <a:ea typeface="Calibri" charset="0"/>
                         <a:cs typeface="Calibri" charset="0"/>
@@ -5137,7 +4069,7 @@
                         <a:buNone/>
                       </a:pPr>
                       <a:r>
-                        <a:rPr lang="en-US" sz="1200" dirty="0">
+                        <a:rPr lang="en-US" sz="1300" dirty="0">
                           <a:solidFill>
                             <a:srgbClr val="1A1A1A"/>
                           </a:solidFill>
@@ -5147,7 +4079,7 @@
                         </a:rPr>
                         <a:t>12 / 13</a:t>
                       </a:r>
-                      <a:endParaRPr lang="en-US" sz="1200" dirty="0">
+                      <a:endParaRPr lang="en-US" sz="1300" dirty="0">
                         <a:latin typeface="Calibri" charset="0"/>
                         <a:ea typeface="Calibri" charset="0"/>
                         <a:cs typeface="Calibri" charset="0"/>
@@ -5198,216 +4130,21 @@
                     <a:bodyPr/>
                     <a:lstStyle/>
                     <a:p>
-                      <a:pPr algn="ctr" indent="0" marL="0">
+                      <a:pPr indent="0" marL="0">
                         <a:buNone/>
                       </a:pPr>
                       <a:r>
-                        <a:rPr lang="en-US" sz="1200" dirty="0">
+                        <a:rPr lang="en-US" sz="1300" dirty="0">
                           <a:solidFill>
-                            <a:srgbClr val="1A1A1A"/>
+                            <a:srgbClr val="555555"/>
                           </a:solidFill>
                           <a:latin typeface="Calibri" pitchFamily="34" charset="0"/>
                           <a:ea typeface="Calibri" pitchFamily="34" charset="-122"/>
                           <a:cs typeface="Calibri" pitchFamily="34" charset="-120"/>
                         </a:rPr>
-                        <a:t>1.0</a:t>
+                        <a:t>non-positive</a:t>
                       </a:r>
-                      <a:endParaRPr lang="en-US" sz="1200" dirty="0">
-                        <a:latin typeface="Calibri" charset="0"/>
-                        <a:ea typeface="Calibri" charset="0"/>
-                        <a:cs typeface="Calibri" charset="0"/>
-                      </a:endParaRPr>
-                    </a:p>
-                  </a:txBody>
-                  <a:tcPr marL="91440" marR="91440" marT="45720" marB="45720">
-                    <a:lnL w="6350" cap="flat" cmpd="sng" algn="ctr">
-                      <a:solidFill>
-                        <a:srgbClr val="D9D9D9"/>
-                      </a:solidFill>
-                      <a:prstDash val="solid"/>
-                      <a:round/>
-                      <a:headEnd type="none" w="med" len="med"/>
-                      <a:tailEnd type="none" w="med" len="med"/>
-                    </a:lnL>
-                    <a:lnR w="6350" cap="flat" cmpd="sng" algn="ctr">
-                      <a:solidFill>
-                        <a:srgbClr val="D9D9D9"/>
-                      </a:solidFill>
-                      <a:prstDash val="solid"/>
-                      <a:round/>
-                      <a:headEnd type="none" w="med" len="med"/>
-                      <a:tailEnd type="none" w="med" len="med"/>
-                    </a:lnR>
-                    <a:lnT w="6350" cap="flat" cmpd="sng" algn="ctr">
-                      <a:solidFill>
-                        <a:srgbClr val="D9D9D9"/>
-                      </a:solidFill>
-                      <a:prstDash val="solid"/>
-                      <a:round/>
-                      <a:headEnd type="none" w="med" len="med"/>
-                      <a:tailEnd type="none" w="med" len="med"/>
-                    </a:lnT>
-                    <a:lnB w="6350" cap="flat" cmpd="sng" algn="ctr">
-                      <a:solidFill>
-                        <a:srgbClr val="D9D9D9"/>
-                      </a:solidFill>
-                      <a:prstDash val="solid"/>
-                      <a:round/>
-                      <a:headEnd type="none" w="med" len="med"/>
-                      <a:tailEnd type="none" w="med" len="med"/>
-                    </a:lnB>
-                  </a:tcPr>
-                </a:tc>
-                <a:tc>
-                  <a:txBody>
-                    <a:bodyPr/>
-                    <a:lstStyle/>
-                    <a:p>
-                      <a:pPr algn="ctr" indent="0" marL="0">
-                        <a:buNone/>
-                      </a:pPr>
-                      <a:r>
-                        <a:rPr lang="en-US" sz="1200" dirty="0">
-                          <a:solidFill>
-                            <a:srgbClr val="1A1A1A"/>
-                          </a:solidFill>
-                          <a:latin typeface="Calibri" pitchFamily="34" charset="0"/>
-                          <a:ea typeface="Calibri" pitchFamily="34" charset="-122"/>
-                          <a:cs typeface="Calibri" pitchFamily="34" charset="-120"/>
-                        </a:rPr>
-                        <a:t>−0.15</a:t>
-                      </a:r>
-                      <a:endParaRPr lang="en-US" sz="1200" dirty="0">
-                        <a:latin typeface="Calibri" charset="0"/>
-                        <a:ea typeface="Calibri" charset="0"/>
-                        <a:cs typeface="Calibri" charset="0"/>
-                      </a:endParaRPr>
-                    </a:p>
-                  </a:txBody>
-                  <a:tcPr marL="91440" marR="91440" marT="45720" marB="45720">
-                    <a:lnL w="6350" cap="flat" cmpd="sng" algn="ctr">
-                      <a:solidFill>
-                        <a:srgbClr val="D9D9D9"/>
-                      </a:solidFill>
-                      <a:prstDash val="solid"/>
-                      <a:round/>
-                      <a:headEnd type="none" w="med" len="med"/>
-                      <a:tailEnd type="none" w="med" len="med"/>
-                    </a:lnL>
-                    <a:lnR w="6350" cap="flat" cmpd="sng" algn="ctr">
-                      <a:solidFill>
-                        <a:srgbClr val="D9D9D9"/>
-                      </a:solidFill>
-                      <a:prstDash val="solid"/>
-                      <a:round/>
-                      <a:headEnd type="none" w="med" len="med"/>
-                      <a:tailEnd type="none" w="med" len="med"/>
-                    </a:lnR>
-                    <a:lnT w="6350" cap="flat" cmpd="sng" algn="ctr">
-                      <a:solidFill>
-                        <a:srgbClr val="D9D9D9"/>
-                      </a:solidFill>
-                      <a:prstDash val="solid"/>
-                      <a:round/>
-                      <a:headEnd type="none" w="med" len="med"/>
-                      <a:tailEnd type="none" w="med" len="med"/>
-                    </a:lnT>
-                    <a:lnB w="6350" cap="flat" cmpd="sng" algn="ctr">
-                      <a:solidFill>
-                        <a:srgbClr val="D9D9D9"/>
-                      </a:solidFill>
-                      <a:prstDash val="solid"/>
-                      <a:round/>
-                      <a:headEnd type="none" w="med" len="med"/>
-                      <a:tailEnd type="none" w="med" len="med"/>
-                    </a:lnB>
-                  </a:tcPr>
-                </a:tc>
-                <a:tc>
-                  <a:txBody>
-                    <a:bodyPr/>
-                    <a:lstStyle/>
-                    <a:p>
-                      <a:pPr algn="ctr" indent="0" marL="0">
-                        <a:buNone/>
-                      </a:pPr>
-                      <a:r>
-                        <a:rPr lang="en-US" sz="1200" dirty="0">
-                          <a:solidFill>
-                            <a:srgbClr val="1A1A1A"/>
-                          </a:solidFill>
-                          <a:latin typeface="Calibri" pitchFamily="34" charset="0"/>
-                          <a:ea typeface="Calibri" pitchFamily="34" charset="-122"/>
-                          <a:cs typeface="Calibri" pitchFamily="34" charset="-120"/>
-                        </a:rPr>
-                        <a:t>[10, 13]</a:t>
-                      </a:r>
-                      <a:endParaRPr lang="en-US" sz="1200" dirty="0">
-                        <a:latin typeface="Calibri" charset="0"/>
-                        <a:ea typeface="Calibri" charset="0"/>
-                        <a:cs typeface="Calibri" charset="0"/>
-                      </a:endParaRPr>
-                    </a:p>
-                  </a:txBody>
-                  <a:tcPr marL="91440" marR="91440" marT="45720" marB="45720">
-                    <a:lnL w="6350" cap="flat" cmpd="sng" algn="ctr">
-                      <a:solidFill>
-                        <a:srgbClr val="D9D9D9"/>
-                      </a:solidFill>
-                      <a:prstDash val="solid"/>
-                      <a:round/>
-                      <a:headEnd type="none" w="med" len="med"/>
-                      <a:tailEnd type="none" w="med" len="med"/>
-                    </a:lnL>
-                    <a:lnR w="6350" cap="flat" cmpd="sng" algn="ctr">
-                      <a:solidFill>
-                        <a:srgbClr val="D9D9D9"/>
-                      </a:solidFill>
-                      <a:prstDash val="solid"/>
-                      <a:round/>
-                      <a:headEnd type="none" w="med" len="med"/>
-                      <a:tailEnd type="none" w="med" len="med"/>
-                    </a:lnR>
-                    <a:lnT w="6350" cap="flat" cmpd="sng" algn="ctr">
-                      <a:solidFill>
-                        <a:srgbClr val="D9D9D9"/>
-                      </a:solidFill>
-                      <a:prstDash val="solid"/>
-                      <a:round/>
-                      <a:headEnd type="none" w="med" len="med"/>
-                      <a:tailEnd type="none" w="med" len="med"/>
-                    </a:lnT>
-                    <a:lnB w="6350" cap="flat" cmpd="sng" algn="ctr">
-                      <a:solidFill>
-                        <a:srgbClr val="D9D9D9"/>
-                      </a:solidFill>
-                      <a:prstDash val="solid"/>
-                      <a:round/>
-                      <a:headEnd type="none" w="med" len="med"/>
-                      <a:tailEnd type="none" w="med" len="med"/>
-                    </a:lnB>
-                  </a:tcPr>
-                </a:tc>
-                <a:tc>
-                  <a:txBody>
-                    <a:bodyPr/>
-                    <a:lstStyle/>
-                    <a:p>
-                      <a:pPr algn="ctr" indent="0" marL="0">
-                        <a:buNone/>
-                      </a:pPr>
-                      <a:r>
-                        <a:rPr lang="en-US" sz="1200" dirty="0">
-                          <a:solidFill>
-                            <a:srgbClr val="1A1A1A"/>
-                          </a:solidFill>
-                          <a:latin typeface="Calibri" pitchFamily="34" charset="0"/>
-                          <a:ea typeface="Calibri" pitchFamily="34" charset="-122"/>
-                          <a:cs typeface="Calibri" pitchFamily="34" charset="-120"/>
-                        </a:rPr>
-                        <a:t>1,477</a:t>
-                      </a:r>
-                      <a:endParaRPr lang="en-US" sz="1200" dirty="0">
+                      <a:endParaRPr lang="en-US" sz="1300" dirty="0">
                         <a:latin typeface="Calibri" charset="0"/>
                         <a:ea typeface="Calibri" charset="0"/>
                         <a:cs typeface="Calibri" charset="0"/>
@@ -5464,7 +4201,7 @@
                         <a:buNone/>
                       </a:pPr>
                       <a:r>
-                        <a:rPr lang="en-US" sz="1200" i="1" dirty="0">
+                        <a:rPr lang="en-US" sz="1300" i="1" dirty="0">
                           <a:solidFill>
                             <a:srgbClr val="555555"/>
                           </a:solidFill>
@@ -5472,9 +4209,9 @@
                           <a:ea typeface="Calibri" pitchFamily="34" charset="-122"/>
                           <a:cs typeface="Calibri" pitchFamily="34" charset="-120"/>
                         </a:rPr>
-                        <a:t>Enron (ENE) — FY2000</a:t>
+                        <a:t>Enron (ENE, FY 2000)</a:t>
                       </a:r>
-                      <a:endParaRPr lang="en-US" sz="1200" dirty="0">
+                      <a:endParaRPr lang="en-US" sz="1300" dirty="0">
                         <a:latin typeface="Calibri" charset="0"/>
                         <a:ea typeface="Calibri" charset="0"/>
                         <a:cs typeface="Calibri" charset="0"/>
@@ -5529,7 +4266,7 @@
                         <a:buNone/>
                       </a:pPr>
                       <a:r>
-                        <a:rPr lang="en-US" sz="1200" i="1" dirty="0">
+                        <a:rPr lang="en-US" sz="1300" i="1" dirty="0">
                           <a:solidFill>
                             <a:srgbClr val="555555"/>
                           </a:solidFill>
@@ -5539,7 +4276,7 @@
                         </a:rPr>
                         <a:t>—</a:t>
                       </a:r>
-                      <a:endParaRPr lang="en-US" sz="1200" dirty="0">
+                      <a:endParaRPr lang="en-US" sz="1300" dirty="0">
                         <a:latin typeface="Calibri" charset="0"/>
                         <a:ea typeface="Calibri" charset="0"/>
                         <a:cs typeface="Calibri" charset="0"/>
@@ -5590,11 +4327,11 @@
                     <a:bodyPr/>
                     <a:lstStyle/>
                     <a:p>
-                      <a:pPr algn="ctr" indent="0" marL="0">
+                      <a:pPr indent="0" marL="0">
                         <a:buNone/>
                       </a:pPr>
                       <a:r>
-                        <a:rPr lang="en-US" sz="1200" i="1" dirty="0">
+                        <a:rPr lang="en-US" sz="1300" i="1" dirty="0">
                           <a:solidFill>
                             <a:srgbClr val="555555"/>
                           </a:solidFill>
@@ -5602,9 +4339,9 @@
                           <a:ea typeface="Calibri" pitchFamily="34" charset="-122"/>
                           <a:cs typeface="Calibri" pitchFamily="34" charset="-120"/>
                         </a:rPr>
-                        <a:t>—</a:t>
+                        <a:t>not evaluable under the frozen rule</a:t>
                       </a:r>
-                      <a:endParaRPr lang="en-US" sz="1200" dirty="0">
+                      <a:endParaRPr lang="en-US" sz="1300" dirty="0">
                         <a:latin typeface="Calibri" charset="0"/>
                         <a:ea typeface="Calibri" charset="0"/>
                         <a:cs typeface="Calibri" charset="0"/>
@@ -5650,201 +4387,6 @@
                     </a:lnB>
                   </a:tcPr>
                 </a:tc>
-                <a:tc>
-                  <a:txBody>
-                    <a:bodyPr/>
-                    <a:lstStyle/>
-                    <a:p>
-                      <a:pPr algn="ctr" indent="0" marL="0">
-                        <a:buNone/>
-                      </a:pPr>
-                      <a:r>
-                        <a:rPr lang="en-US" sz="1200" i="1" dirty="0">
-                          <a:solidFill>
-                            <a:srgbClr val="555555"/>
-                          </a:solidFill>
-                          <a:latin typeface="Calibri" pitchFamily="34" charset="0"/>
-                          <a:ea typeface="Calibri" pitchFamily="34" charset="-122"/>
-                          <a:cs typeface="Calibri" pitchFamily="34" charset="-120"/>
-                        </a:rPr>
-                        <a:t>—</a:t>
-                      </a:r>
-                      <a:endParaRPr lang="en-US" sz="1200" dirty="0">
-                        <a:latin typeface="Calibri" charset="0"/>
-                        <a:ea typeface="Calibri" charset="0"/>
-                        <a:cs typeface="Calibri" charset="0"/>
-                      </a:endParaRPr>
-                    </a:p>
-                  </a:txBody>
-                  <a:tcPr marL="91440" marR="91440" marT="45720" marB="45720">
-                    <a:lnL w="6350" cap="flat" cmpd="sng" algn="ctr">
-                      <a:solidFill>
-                        <a:srgbClr val="D9D9D9"/>
-                      </a:solidFill>
-                      <a:prstDash val="solid"/>
-                      <a:round/>
-                      <a:headEnd type="none" w="med" len="med"/>
-                      <a:tailEnd type="none" w="med" len="med"/>
-                    </a:lnL>
-                    <a:lnR w="6350" cap="flat" cmpd="sng" algn="ctr">
-                      <a:solidFill>
-                        <a:srgbClr val="D9D9D9"/>
-                      </a:solidFill>
-                      <a:prstDash val="solid"/>
-                      <a:round/>
-                      <a:headEnd type="none" w="med" len="med"/>
-                      <a:tailEnd type="none" w="med" len="med"/>
-                    </a:lnR>
-                    <a:lnT w="6350" cap="flat" cmpd="sng" algn="ctr">
-                      <a:solidFill>
-                        <a:srgbClr val="D9D9D9"/>
-                      </a:solidFill>
-                      <a:prstDash val="solid"/>
-                      <a:round/>
-                      <a:headEnd type="none" w="med" len="med"/>
-                      <a:tailEnd type="none" w="med" len="med"/>
-                    </a:lnT>
-                    <a:lnB w="6350" cap="flat" cmpd="sng" algn="ctr">
-                      <a:solidFill>
-                        <a:srgbClr val="D9D9D9"/>
-                      </a:solidFill>
-                      <a:prstDash val="solid"/>
-                      <a:round/>
-                      <a:headEnd type="none" w="med" len="med"/>
-                      <a:tailEnd type="none" w="med" len="med"/>
-                    </a:lnB>
-                  </a:tcPr>
-                </a:tc>
-                <a:tc>
-                  <a:txBody>
-                    <a:bodyPr/>
-                    <a:lstStyle/>
-                    <a:p>
-                      <a:pPr algn="ctr" indent="0" marL="0">
-                        <a:buNone/>
-                      </a:pPr>
-                      <a:r>
-                        <a:rPr lang="en-US" sz="1200" i="1" dirty="0">
-                          <a:solidFill>
-                            <a:srgbClr val="555555"/>
-                          </a:solidFill>
-                          <a:latin typeface="Calibri" pitchFamily="34" charset="0"/>
-                          <a:ea typeface="Calibri" pitchFamily="34" charset="-122"/>
-                          <a:cs typeface="Calibri" pitchFamily="34" charset="-120"/>
-                        </a:rPr>
-                        <a:t>—</a:t>
-                      </a:r>
-                      <a:endParaRPr lang="en-US" sz="1200" dirty="0">
-                        <a:latin typeface="Calibri" charset="0"/>
-                        <a:ea typeface="Calibri" charset="0"/>
-                        <a:cs typeface="Calibri" charset="0"/>
-                      </a:endParaRPr>
-                    </a:p>
-                  </a:txBody>
-                  <a:tcPr marL="91440" marR="91440" marT="45720" marB="45720">
-                    <a:lnL w="6350" cap="flat" cmpd="sng" algn="ctr">
-                      <a:solidFill>
-                        <a:srgbClr val="D9D9D9"/>
-                      </a:solidFill>
-                      <a:prstDash val="solid"/>
-                      <a:round/>
-                      <a:headEnd type="none" w="med" len="med"/>
-                      <a:tailEnd type="none" w="med" len="med"/>
-                    </a:lnL>
-                    <a:lnR w="6350" cap="flat" cmpd="sng" algn="ctr">
-                      <a:solidFill>
-                        <a:srgbClr val="D9D9D9"/>
-                      </a:solidFill>
-                      <a:prstDash val="solid"/>
-                      <a:round/>
-                      <a:headEnd type="none" w="med" len="med"/>
-                      <a:tailEnd type="none" w="med" len="med"/>
-                    </a:lnR>
-                    <a:lnT w="6350" cap="flat" cmpd="sng" algn="ctr">
-                      <a:solidFill>
-                        <a:srgbClr val="D9D9D9"/>
-                      </a:solidFill>
-                      <a:prstDash val="solid"/>
-                      <a:round/>
-                      <a:headEnd type="none" w="med" len="med"/>
-                      <a:tailEnd type="none" w="med" len="med"/>
-                    </a:lnT>
-                    <a:lnB w="6350" cap="flat" cmpd="sng" algn="ctr">
-                      <a:solidFill>
-                        <a:srgbClr val="D9D9D9"/>
-                      </a:solidFill>
-                      <a:prstDash val="solid"/>
-                      <a:round/>
-                      <a:headEnd type="none" w="med" len="med"/>
-                      <a:tailEnd type="none" w="med" len="med"/>
-                    </a:lnB>
-                  </a:tcPr>
-                </a:tc>
-                <a:tc>
-                  <a:txBody>
-                    <a:bodyPr/>
-                    <a:lstStyle/>
-                    <a:p>
-                      <a:pPr algn="ctr" indent="0" marL="0">
-                        <a:buNone/>
-                      </a:pPr>
-                      <a:r>
-                        <a:rPr lang="en-US" sz="1200" i="1" dirty="0">
-                          <a:solidFill>
-                            <a:srgbClr val="555555"/>
-                          </a:solidFill>
-                          <a:latin typeface="Calibri" pitchFamily="34" charset="0"/>
-                          <a:ea typeface="Calibri" pitchFamily="34" charset="-122"/>
-                          <a:cs typeface="Calibri" pitchFamily="34" charset="-120"/>
-                        </a:rPr>
-                        <a:t>—</a:t>
-                      </a:r>
-                      <a:endParaRPr lang="en-US" sz="1200" dirty="0">
-                        <a:latin typeface="Calibri" charset="0"/>
-                        <a:ea typeface="Calibri" charset="0"/>
-                        <a:cs typeface="Calibri" charset="0"/>
-                      </a:endParaRPr>
-                    </a:p>
-                  </a:txBody>
-                  <a:tcPr marL="91440" marR="91440" marT="45720" marB="45720">
-                    <a:lnL w="6350" cap="flat" cmpd="sng" algn="ctr">
-                      <a:solidFill>
-                        <a:srgbClr val="D9D9D9"/>
-                      </a:solidFill>
-                      <a:prstDash val="solid"/>
-                      <a:round/>
-                      <a:headEnd type="none" w="med" len="med"/>
-                      <a:tailEnd type="none" w="med" len="med"/>
-                    </a:lnL>
-                    <a:lnR w="6350" cap="flat" cmpd="sng" algn="ctr">
-                      <a:solidFill>
-                        <a:srgbClr val="D9D9D9"/>
-                      </a:solidFill>
-                      <a:prstDash val="solid"/>
-                      <a:round/>
-                      <a:headEnd type="none" w="med" len="med"/>
-                      <a:tailEnd type="none" w="med" len="med"/>
-                    </a:lnR>
-                    <a:lnT w="6350" cap="flat" cmpd="sng" algn="ctr">
-                      <a:solidFill>
-                        <a:srgbClr val="D9D9D9"/>
-                      </a:solidFill>
-                      <a:prstDash val="solid"/>
-                      <a:round/>
-                      <a:headEnd type="none" w="med" len="med"/>
-                      <a:tailEnd type="none" w="med" len="med"/>
-                    </a:lnT>
-                    <a:lnB w="6350" cap="flat" cmpd="sng" algn="ctr">
-                      <a:solidFill>
-                        <a:srgbClr val="D9D9D9"/>
-                      </a:solidFill>
-                      <a:prstDash val="solid"/>
-                      <a:round/>
-                      <a:headEnd type="none" w="med" len="med"/>
-                      <a:tailEnd type="none" w="med" len="med"/>
-                    </a:lnB>
-                  </a:tcPr>
-                </a:tc>
               </a:tr>
             </a:tbl>
           </a:graphicData>
@@ -5859,7 +4401,7 @@
         <p:spPr>
           <a:xfrm>
             <a:off x="8183880" y="1783080"/>
-            <a:ext cx="3520440" cy="3657600"/>
+            <a:ext cx="3520440" cy="3200400"/>
           </a:xfrm>
           <a:prstGeom prst="rect">
             <a:avLst/>
@@ -5948,7 +4490,7 @@
         <p:spPr>
           <a:xfrm>
             <a:off x="8366760" y="2423160"/>
-            <a:ext cx="3200400" cy="1463040"/>
+            <a:ext cx="3200400" cy="2377440"/>
           </a:xfrm>
           <a:prstGeom prst="rect">
             <a:avLst/>
@@ -6127,8 +4669,8 @@
         </p:nvSpPr>
         <p:spPr>
           <a:xfrm>
-            <a:off x="8366760" y="4023360"/>
-            <a:ext cx="3200400" cy="274320"/>
+            <a:off x="640080" y="5212080"/>
+            <a:ext cx="10972800" cy="731520"/>
           </a:xfrm>
           <a:prstGeom prst="rect">
             <a:avLst/>
@@ -6141,174 +4683,68 @@
           <a:lstStyle/>
           <a:p>
             <a:pPr indent="0" marL="0">
-              <a:buNone/>
-            </a:pPr>
-            <a:r>
-              <a:rPr lang="en-US" sz="1100" b="1" spc="300" kern="0" dirty="0">
-                <a:solidFill>
-                  <a:srgbClr val="5B7BB0"/>
+              <a:lnSpc>
+                <a:spcPct val="130000"/>
+              </a:lnSpc>
+              <a:buNone/>
+            </a:pPr>
+            <a:r>
+              <a:rPr lang="en-US" sz="1300" i="1" dirty="0">
+                <a:solidFill>
+                  <a:srgbClr val="555555"/>
+                </a:solidFill>
+                <a:latin typeface="Georgia" pitchFamily="34" charset="0"/>
+                <a:ea typeface="Georgia" pitchFamily="34" charset="-122"/>
+                <a:cs typeface="Georgia" pitchFamily="34" charset="-120"/>
+              </a:rPr>
+              <a:t>⚠ Lehman is the only rank better than random expectation, and a 1990s baseline ranks it higher (slide 5). The aggregate is entirely Lehman.</a:t>
+            </a:r>
+            <a:endParaRPr lang="en-US" sz="1300" dirty="0"/>
+          </a:p>
+        </p:txBody>
+      </p:sp>
+      <p:sp>
+        <p:nvSpPr>
+          <p:cNvPr id="11" name="Text 8"/>
+          <p:cNvSpPr/>
+          <p:nvPr/>
+        </p:nvSpPr>
+        <p:spPr>
+          <a:xfrm>
+            <a:off x="457200" y="6446520"/>
+            <a:ext cx="7315200" cy="274320"/>
+          </a:xfrm>
+          <a:prstGeom prst="rect">
+            <a:avLst/>
+          </a:prstGeom>
+          <a:noFill/>
+          <a:ln/>
+        </p:spPr>
+        <p:txBody>
+          <a:bodyPr wrap="square" rtlCol="0" anchor="ctr"/>
+          <a:lstStyle/>
+          <a:p>
+            <a:pPr algn="l" indent="0" marL="0">
+              <a:buNone/>
+            </a:pPr>
+            <a:r>
+              <a:rPr lang="en-US" sz="1000" dirty="0">
+                <a:solidFill>
+                  <a:srgbClr val="8A8A8A"/>
                 </a:solidFill>
                 <a:latin typeface="Calibri" pitchFamily="34" charset="0"/>
                 <a:ea typeface="Calibri" pitchFamily="34" charset="-122"/>
                 <a:cs typeface="Calibri" pitchFamily="34" charset="-120"/>
               </a:rPr>
-              <a:t>Enron is excluded by the rule itself</a:t>
-            </a:r>
-            <a:endParaRPr lang="en-US" sz="1100" dirty="0"/>
-          </a:p>
-        </p:txBody>
-      </p:sp>
-      <p:sp>
-        <p:nvSpPr>
-          <p:cNvPr id="11" name="Shape 8"/>
-          <p:cNvSpPr/>
-          <p:nvPr/>
-        </p:nvSpPr>
-        <p:spPr>
-          <a:xfrm>
-            <a:off x="8366760" y="4343400"/>
-            <a:ext cx="365760" cy="36576"/>
-          </a:xfrm>
-          <a:prstGeom prst="rect">
-            <a:avLst/>
-          </a:prstGeom>
-          <a:solidFill>
-            <a:srgbClr val="5B7BB0"/>
-          </a:solidFill>
-          <a:ln w="12700">
-            <a:solidFill>
-              <a:srgbClr val="5B7BB0"/>
-            </a:solidFill>
-            <a:prstDash val="solid"/>
-          </a:ln>
-        </p:spPr>
+              <a:t>Canary  ·  Arsenii Chan  ·  CSC 44800</a:t>
+            </a:r>
+            <a:endParaRPr lang="en-US" sz="1000" dirty="0"/>
+          </a:p>
+        </p:txBody>
       </p:sp>
       <p:sp>
         <p:nvSpPr>
           <p:cNvPr id="12" name="Text 9"/>
-          <p:cNvSpPr/>
-          <p:nvPr/>
-        </p:nvSpPr>
-        <p:spPr>
-          <a:xfrm>
-            <a:off x="8366760" y="4526280"/>
-            <a:ext cx="3200400" cy="914400"/>
-          </a:xfrm>
-          <a:prstGeom prst="rect">
-            <a:avLst/>
-          </a:prstGeom>
-          <a:noFill/>
-          <a:ln/>
-        </p:spPr>
-        <p:txBody>
-          <a:bodyPr wrap="square" rtlCol="0" anchor="ctr"/>
-          <a:lstStyle/>
-          <a:p>
-            <a:pPr indent="0" marL="0">
-              <a:lnSpc>
-                <a:spcPct val="130000"/>
-              </a:lnSpc>
-              <a:buNone/>
-            </a:pPr>
-            <a:r>
-              <a:rPr lang="en-US" sz="1200" i="1" dirty="0">
-                <a:solidFill>
-                  <a:srgbClr val="1A1A1A"/>
-                </a:solidFill>
-                <a:latin typeface="Georgia" pitchFamily="34" charset="0"/>
-                <a:ea typeface="Georgia" pitchFamily="34" charset="-122"/>
-                <a:cs typeface="Georgia" pitchFamily="34" charset="-120"/>
-              </a:rPr>
-              <a:t>Filed 2001-04-02 — earlier than every peer in every other cohort. LOCO + time-controlled admits no eligible training data. Exclusion IS the finding.</a:t>
-            </a:r>
-            <a:endParaRPr lang="en-US" sz="1200" dirty="0"/>
-          </a:p>
-        </p:txBody>
-      </p:sp>
-      <p:sp>
-        <p:nvSpPr>
-          <p:cNvPr id="13" name="Text 10"/>
-          <p:cNvSpPr/>
-          <p:nvPr/>
-        </p:nvSpPr>
-        <p:spPr>
-          <a:xfrm>
-            <a:off x="640080" y="5623560"/>
-            <a:ext cx="10972800" cy="548640"/>
-          </a:xfrm>
-          <a:prstGeom prst="rect">
-            <a:avLst/>
-          </a:prstGeom>
-          <a:noFill/>
-          <a:ln/>
-        </p:spPr>
-        <p:txBody>
-          <a:bodyPr wrap="square" rtlCol="0" anchor="ctr"/>
-          <a:lstStyle/>
-          <a:p>
-            <a:pPr indent="0" marL="0">
-              <a:lnSpc>
-                <a:spcPct val="120000"/>
-              </a:lnSpc>
-              <a:buNone/>
-            </a:pPr>
-            <a:r>
-              <a:rPr lang="en-US" sz="1300" i="1" dirty="0">
-                <a:solidFill>
-                  <a:srgbClr val="555555"/>
-                </a:solidFill>
-                <a:latin typeface="Georgia" pitchFamily="34" charset="0"/>
-                <a:ea typeface="Georgia" pitchFamily="34" charset="-122"/>
-                <a:cs typeface="Georgia" pitchFamily="34" charset="-120"/>
-              </a:rPr>
-              <a:t>⚑ = Lehman is the only cohort above chance — but a 1990s baseline beats the autoencoder there too. See slide 5. Aggregate hit@k falls at or below random. The aggregate is entirely Lehman.</a:t>
-            </a:r>
-            <a:endParaRPr lang="en-US" sz="1300" dirty="0"/>
-          </a:p>
-        </p:txBody>
-      </p:sp>
-      <p:sp>
-        <p:nvSpPr>
-          <p:cNvPr id="14" name="Text 11"/>
-          <p:cNvSpPr/>
-          <p:nvPr/>
-        </p:nvSpPr>
-        <p:spPr>
-          <a:xfrm>
-            <a:off x="457200" y="6446520"/>
-            <a:ext cx="7315200" cy="274320"/>
-          </a:xfrm>
-          <a:prstGeom prst="rect">
-            <a:avLst/>
-          </a:prstGeom>
-          <a:noFill/>
-          <a:ln/>
-        </p:spPr>
-        <p:txBody>
-          <a:bodyPr wrap="square" rtlCol="0" anchor="ctr"/>
-          <a:lstStyle/>
-          <a:p>
-            <a:pPr algn="l" indent="0" marL="0">
-              <a:buNone/>
-            </a:pPr>
-            <a:r>
-              <a:rPr lang="en-US" sz="1000" dirty="0">
-                <a:solidFill>
-                  <a:srgbClr val="8A8A8A"/>
-                </a:solidFill>
-                <a:latin typeface="Calibri" pitchFamily="34" charset="0"/>
-                <a:ea typeface="Calibri" pitchFamily="34" charset="-122"/>
-                <a:cs typeface="Calibri" pitchFamily="34" charset="-120"/>
-              </a:rPr>
-              <a:t>Canary  ·  Arsenii Chan  ·  CSC 44800</a:t>
-            </a:r>
-            <a:endParaRPr lang="en-US" sz="1000" dirty="0"/>
-          </a:p>
-        </p:txBody>
-      </p:sp>
-      <p:sp>
-        <p:nvSpPr>
-          <p:cNvPr id="15" name="Text 12"/>
           <p:cNvSpPr/>
           <p:nvPr/>
         </p:nvSpPr>
@@ -6410,7 +4846,7 @@
                 <a:ea typeface="Calibri" pitchFamily="34" charset="-122"/>
                 <a:cs typeface="Calibri" pitchFamily="34" charset="-120"/>
               </a:rPr>
-              <a:t>THE BASELINE CHECK — TF-IDF + SVD32 (POST-HOC)</a:t>
+              <a:t>THE BASELINE CHECK · TF-IDF + SVD32 (POST-HOC)</a:t>
             </a:r>
             <a:endParaRPr lang="en-US" sz="1100" dirty="0"/>
           </a:p>
@@ -6496,47 +4932,23 @@
         </p:blipFill>
         <p:spPr>
           <a:xfrm>
-            <a:off x="548640" y="1828800"/>
-            <a:ext cx="5852160" cy="3657600"/>
+            <a:off x="1371600" y="1783080"/>
+            <a:ext cx="9418320" cy="3840480"/>
           </a:xfrm>
           <a:prstGeom prst="rect">
             <a:avLst/>
           </a:prstGeom>
         </p:spPr>
       </p:pic>
-      <p:pic>
-        <p:nvPicPr>
-          <p:cNvPr id="6" name="Image 1" descr="/Users/arseniichan/Documents/Claude/Projects/CSC448/canary/reports/figures/ae_vs_tfidf_mw.png">    </p:cNvPr>
-          <p:cNvPicPr>
-            <a:picLocks noChangeAspect="1"/>
-          </p:cNvPicPr>
-          <p:nvPr/>
-        </p:nvPicPr>
-        <p:blipFill>
-          <a:blip r:embed="rId2"/>
-          <a:stretch>
-            <a:fillRect/>
-          </a:stretch>
-        </p:blipFill>
-        <p:spPr>
-          <a:xfrm>
-            <a:off x="6583680" y="1828800"/>
-            <a:ext cx="5486400" cy="3657600"/>
-          </a:xfrm>
-          <a:prstGeom prst="rect">
-            <a:avLst/>
-          </a:prstGeom>
-        </p:spPr>
-      </p:pic>
-      <p:sp>
-        <p:nvSpPr>
-          <p:cNvPr id="7" name="Text 3"/>
-          <p:cNvSpPr/>
-          <p:nvPr/>
-        </p:nvSpPr>
-        <p:spPr>
-          <a:xfrm>
-            <a:off x="640080" y="5623560"/>
+      <p:sp>
+        <p:nvSpPr>
+          <p:cNvPr id="6" name="Text 3"/>
+          <p:cNvSpPr/>
+          <p:nvPr/>
+        </p:nvSpPr>
+        <p:spPr>
+          <a:xfrm>
+            <a:off x="640080" y="5715000"/>
             <a:ext cx="10972800" cy="640080"/>
           </a:xfrm>
           <a:prstGeom prst="rect">
@@ -6564,7 +4976,7 @@
                 <a:ea typeface="Georgia" pitchFamily="34" charset="-122"/>
                 <a:cs typeface="Georgia" pitchFamily="34" charset="-120"/>
               </a:rPr>
-              <a:t>On the one cohort with any signal at all, the 1990s baseline is stronger: rank 1/13 vs 3/13, p ≈ 5×10⁻²² vs 1.3×10⁻⁹, effect +0.19 vs +0.12. Aggregate hit@5 = 0.40 (TF-IDF) vs 0.20 (autoencoder). The pre-registered model is not the signal carrier.</a:t>
+              <a:t>Lehman: AE rank 3/13, TF-IDF rank 1/13. Aggregate hit@5 is 0.40 (TF-IDF) vs 0.20 (autoencoder). Mann-Whitney p is much smaller for TF-IDF on Lehman; exact values are in the report. The pre-registered model is not the signal carrier.</a:t>
             </a:r>
             <a:endParaRPr lang="en-US" sz="1300" dirty="0"/>
           </a:p>
@@ -6572,7 +4984,7 @@
       </p:sp>
       <p:sp>
         <p:nvSpPr>
-          <p:cNvPr id="8" name="Text 4"/>
+          <p:cNvPr id="7" name="Text 4"/>
           <p:cNvSpPr/>
           <p:nvPr/>
         </p:nvSpPr>
@@ -6611,7 +5023,7 @@
       </p:sp>
       <p:sp>
         <p:nvSpPr>
-          <p:cNvPr id="9" name="Text 5"/>
+          <p:cNvPr id="8" name="Text 5"/>
           <p:cNvSpPr/>
           <p:nvPr/>
         </p:nvSpPr>
@@ -6713,7 +5125,7 @@
                 <a:ea typeface="Calibri" pitchFamily="34" charset="-122"/>
                 <a:cs typeface="Calibri" pitchFamily="34" charset="-120"/>
               </a:rPr>
-              <a:t>ANTICIPATED QUESTIONS</a:t>
+              <a:t>QUESTIONS I EXPECT</a:t>
             </a:r>
             <a:endParaRPr lang="en-US" sz="1100" dirty="0"/>
           </a:p>
@@ -6777,7 +5189,7 @@
                 <a:ea typeface="Georgia" pitchFamily="34" charset="-122"/>
                 <a:cs typeface="Georgia" pitchFamily="34" charset="-120"/>
               </a:rPr>
-              <a:t>The questions a sharp reviewer asks first — pre-empted.</a:t>
+              <a:t>Questions I expect.</a:t>
             </a:r>
             <a:endParaRPr lang="en-US" sz="2400" dirty="0"/>
           </a:p>
@@ -6792,7 +5204,7 @@
         <p:spPr>
           <a:xfrm>
             <a:off x="640080" y="1783080"/>
-            <a:ext cx="11064240" cy="1097280"/>
+            <a:ext cx="11064240" cy="1417320"/>
           </a:xfrm>
           <a:prstGeom prst="rect">
             <a:avLst/>
@@ -6817,7 +5229,7 @@
         <p:spPr>
           <a:xfrm>
             <a:off x="640080" y="1783080"/>
-            <a:ext cx="36576" cy="1097280"/>
+            <a:ext cx="36576" cy="1417320"/>
           </a:xfrm>
           <a:prstGeom prst="rect">
             <a:avLst/>
@@ -6920,7 +5332,7 @@
         <p:spPr>
           <a:xfrm>
             <a:off x="1280160" y="2240280"/>
-            <a:ext cx="10241280" cy="594360"/>
+            <a:ext cx="10241280" cy="914400"/>
           </a:xfrm>
           <a:prstGeom prst="rect">
             <a:avLst/>
@@ -6947,7 +5359,7 @@
                 <a:ea typeface="Georgia" pitchFamily="34" charset="-122"/>
                 <a:cs typeface="Georgia" pitchFamily="34" charset="-120"/>
               </a:rPr>
-              <a:t>Yes — TF-IDF + truncated-SVD with the same bottleneck dimension and the same training corpora. It matches or beats the autoencoder on every cohort. The honest claim is that the autoencoder adds nothing here. Slide 5.</a:t>
+              <a:t>Yes. TF-IDF + truncated-SVD, same bottleneck dimension, same training corpora. It matches or beats the autoencoder on every cohort. The honest claim is that the autoencoder adds nothing here. Slide 5.</a:t>
             </a:r>
             <a:endParaRPr lang="en-US" sz="1200" dirty="0"/>
           </a:p>
@@ -6961,8 +5373,8 @@
         </p:nvSpPr>
         <p:spPr>
           <a:xfrm>
-            <a:off x="640080" y="2971800"/>
-            <a:ext cx="11064240" cy="1097280"/>
+            <a:off x="640080" y="3291840"/>
+            <a:ext cx="11064240" cy="1417320"/>
           </a:xfrm>
           <a:prstGeom prst="rect">
             <a:avLst/>
@@ -6986,8 +5398,8 @@
         </p:nvSpPr>
         <p:spPr>
           <a:xfrm>
-            <a:off x="640080" y="2971800"/>
-            <a:ext cx="36576" cy="1097280"/>
+            <a:off x="640080" y="3291840"/>
+            <a:ext cx="36576" cy="1417320"/>
           </a:xfrm>
           <a:prstGeom prst="rect">
             <a:avLst/>
@@ -7011,7 +5423,7 @@
         </p:nvSpPr>
         <p:spPr>
           <a:xfrm>
-            <a:off x="777240" y="3063240"/>
+            <a:off x="777240" y="3383280"/>
             <a:ext cx="457200" cy="365760"/>
           </a:xfrm>
           <a:prstGeom prst="rect">
@@ -7050,7 +5462,7 @@
         </p:nvSpPr>
         <p:spPr>
           <a:xfrm>
-            <a:off x="1280160" y="3063240"/>
+            <a:off x="1280160" y="3383280"/>
             <a:ext cx="10058400" cy="365760"/>
           </a:xfrm>
           <a:prstGeom prst="rect">
@@ -7075,7 +5487,7 @@
                 <a:ea typeface="Calibri" pitchFamily="34" charset="-122"/>
                 <a:cs typeface="Calibri" pitchFamily="34" charset="-120"/>
               </a:rPr>
-              <a:t>Why is Enron excluded — isn't that convenient?</a:t>
+              <a:t>Why is Enron excluded; isn't that convenient?</a:t>
             </a:r>
             <a:endParaRPr lang="en-US" sz="1400" dirty="0"/>
           </a:p>
@@ -7089,8 +5501,8 @@
         </p:nvSpPr>
         <p:spPr>
           <a:xfrm>
-            <a:off x="1280160" y="3429000"/>
-            <a:ext cx="10241280" cy="594360"/>
+            <a:off x="1280160" y="3749040"/>
+            <a:ext cx="10241280" cy="914400"/>
           </a:xfrm>
           <a:prstGeom prst="rect">
             <a:avLst/>
@@ -7117,7 +5529,7 @@
                 <a:ea typeface="Georgia" pitchFamily="34" charset="-122"/>
                 <a:cs typeface="Georgia" pitchFamily="34" charset="-120"/>
               </a:rPr>
-              <a:t>The pre-registered LOCO + time-controlled rule admits no training data for Enron because it was filed earliest. The exclusion is the rule biting back. Owned as a design error in §7.1, not a workaround.</a:t>
+              <a:t>The pre-registered LOCO + time-controlled rule admits no training data for Enron because it was filed earliest. The exclusion is the rule biting back. I report Enron as a design failure, not a result.</a:t>
             </a:r>
             <a:endParaRPr lang="en-US" sz="1200" dirty="0"/>
           </a:p>
@@ -7131,8 +5543,8 @@
         </p:nvSpPr>
         <p:spPr>
           <a:xfrm>
-            <a:off x="640080" y="4160520"/>
-            <a:ext cx="11064240" cy="1097280"/>
+            <a:off x="640080" y="4800600"/>
+            <a:ext cx="11064240" cy="1417320"/>
           </a:xfrm>
           <a:prstGeom prst="rect">
             <a:avLst/>
@@ -7156,8 +5568,8 @@
         </p:nvSpPr>
         <p:spPr>
           <a:xfrm>
-            <a:off x="640080" y="4160520"/>
-            <a:ext cx="36576" cy="1097280"/>
+            <a:off x="640080" y="4800600"/>
+            <a:ext cx="36576" cy="1417320"/>
           </a:xfrm>
           <a:prstGeom prst="rect">
             <a:avLst/>
@@ -7181,7 +5593,7 @@
         </p:nvSpPr>
         <p:spPr>
           <a:xfrm>
-            <a:off x="777240" y="4251960"/>
+            <a:off x="777240" y="4892040"/>
             <a:ext cx="457200" cy="365760"/>
           </a:xfrm>
           <a:prstGeom prst="rect">
@@ -7220,7 +5632,7 @@
         </p:nvSpPr>
         <p:spPr>
           <a:xfrm>
-            <a:off x="1280160" y="4251960"/>
+            <a:off x="1280160" y="4892040"/>
             <a:ext cx="10058400" cy="365760"/>
           </a:xfrm>
           <a:prstGeom prst="rect">
@@ -7245,7 +5657,7 @@
                 <a:ea typeface="Calibri" pitchFamily="34" charset="-122"/>
                 <a:cs typeface="Calibri" pitchFamily="34" charset="-120"/>
               </a:rPr>
-              <a:t>Lehman has the largest training corpus by 4× — is that the signal?</a:t>
+              <a:t>Could MiniLM have memorized 'Lehman' / 'Repo 105' / etc.?</a:t>
             </a:r>
             <a:endParaRPr lang="en-US" sz="1400" dirty="0"/>
           </a:p>
@@ -7259,8 +5671,8 @@
         </p:nvSpPr>
         <p:spPr>
           <a:xfrm>
-            <a:off x="1280160" y="4617720"/>
-            <a:ext cx="10241280" cy="594360"/>
+            <a:off x="1280160" y="5257800"/>
+            <a:ext cx="10241280" cy="914400"/>
           </a:xfrm>
           <a:prstGeom prst="rect">
             <a:avLst/>
@@ -7287,7 +5699,7 @@
                 <a:ea typeface="Georgia" pitchFamily="34" charset="-122"/>
                 <a:cs typeface="Georgia" pitchFamily="34" charset="-120"/>
               </a:rPr>
-              <a:t>Real confound, named in §8. The post-hoc TF-IDF baseline produces the same Lehman-specific result, weakly arguing against “training conditions alone.” I report Lehman as n=1 with the confound named, and decline to claim a method.</a:t>
+              <a:t>Tested post-hoc. Masked 93 such mentions with [ENTITY] and re-scored. Lehman's rank held at 3/13 (delta = 0). Exact-token name leakage did not explain the rank; topical leakage remains open.</a:t>
             </a:r>
             <a:endParaRPr lang="en-US" sz="1200" dirty="0"/>
           </a:p>
@@ -7295,64 +5707,14 @@
       </p:sp>
       <p:sp>
         <p:nvSpPr>
-          <p:cNvPr id="20" name="Shape 18"/>
-          <p:cNvSpPr/>
-          <p:nvPr/>
-        </p:nvSpPr>
-        <p:spPr>
-          <a:xfrm>
-            <a:off x="640080" y="5349240"/>
-            <a:ext cx="11064240" cy="1097280"/>
-          </a:xfrm>
-          <a:prstGeom prst="rect">
-            <a:avLst/>
-          </a:prstGeom>
-          <a:solidFill>
-            <a:srgbClr val="FFFFFF"/>
-          </a:solidFill>
-          <a:ln w="6350">
-            <a:solidFill>
-              <a:srgbClr val="D9D9D9"/>
-            </a:solidFill>
-            <a:prstDash val="solid"/>
-          </a:ln>
-        </p:spPr>
-      </p:sp>
-      <p:sp>
-        <p:nvSpPr>
-          <p:cNvPr id="21" name="Shape 19"/>
-          <p:cNvSpPr/>
-          <p:nvPr/>
-        </p:nvSpPr>
-        <p:spPr>
-          <a:xfrm>
-            <a:off x="640080" y="5349240"/>
-            <a:ext cx="36576" cy="1097280"/>
-          </a:xfrm>
-          <a:prstGeom prst="rect">
-            <a:avLst/>
-          </a:prstGeom>
-          <a:solidFill>
-            <a:srgbClr val="D4A017"/>
-          </a:solidFill>
-          <a:ln w="12700">
-            <a:solidFill>
-              <a:srgbClr val="D4A017"/>
-            </a:solidFill>
-            <a:prstDash val="solid"/>
-          </a:ln>
-        </p:spPr>
-      </p:sp>
-      <p:sp>
-        <p:nvSpPr>
-          <p:cNvPr id="22" name="Text 20"/>
-          <p:cNvSpPr/>
-          <p:nvPr/>
-        </p:nvSpPr>
-        <p:spPr>
-          <a:xfrm>
-            <a:off x="777240" y="5440680"/>
-            <a:ext cx="457200" cy="365760"/>
+          <p:cNvPr id="20" name="Text 18"/>
+          <p:cNvSpPr/>
+          <p:nvPr/>
+        </p:nvSpPr>
+        <p:spPr>
+          <a:xfrm>
+            <a:off x="457200" y="6446520"/>
+            <a:ext cx="7315200" cy="274320"/>
           </a:xfrm>
           <a:prstGeom prst="rect">
             <a:avLst/>
@@ -7364,138 +5726,18 @@
           <a:bodyPr wrap="square" rtlCol="0" anchor="ctr"/>
           <a:lstStyle/>
           <a:p>
-            <a:pPr indent="0" marL="0">
-              <a:buNone/>
-            </a:pPr>
-            <a:r>
-              <a:rPr lang="en-US" sz="1800" b="1" dirty="0">
-                <a:solidFill>
-                  <a:srgbClr val="D4A017"/>
-                </a:solidFill>
-                <a:latin typeface="Georgia" pitchFamily="34" charset="0"/>
-                <a:ea typeface="Georgia" pitchFamily="34" charset="-122"/>
-                <a:cs typeface="Georgia" pitchFamily="34" charset="-120"/>
-              </a:rPr>
-              <a:t>Q</a:t>
-            </a:r>
-            <a:endParaRPr lang="en-US" sz="1800" dirty="0"/>
-          </a:p>
-        </p:txBody>
-      </p:sp>
-      <p:sp>
-        <p:nvSpPr>
-          <p:cNvPr id="23" name="Text 21"/>
-          <p:cNvSpPr/>
-          <p:nvPr/>
-        </p:nvSpPr>
-        <p:spPr>
-          <a:xfrm>
-            <a:off x="1280160" y="5440680"/>
-            <a:ext cx="10058400" cy="365760"/>
-          </a:xfrm>
-          <a:prstGeom prst="rect">
-            <a:avLst/>
-          </a:prstGeom>
-          <a:noFill/>
-          <a:ln/>
-        </p:spPr>
-        <p:txBody>
-          <a:bodyPr wrap="square" rtlCol="0" anchor="ctr"/>
-          <a:lstStyle/>
-          <a:p>
-            <a:pPr indent="0" marL="0">
-              <a:buNone/>
-            </a:pPr>
-            <a:r>
-              <a:rPr lang="en-US" sz="1400" b="1" dirty="0">
-                <a:solidFill>
-                  <a:srgbClr val="0E1A33"/>
+            <a:pPr algn="l" indent="0" marL="0">
+              <a:buNone/>
+            </a:pPr>
+            <a:r>
+              <a:rPr lang="en-US" sz="1000" dirty="0">
+                <a:solidFill>
+                  <a:srgbClr val="8A8A8A"/>
                 </a:solidFill>
                 <a:latin typeface="Calibri" pitchFamily="34" charset="0"/>
                 <a:ea typeface="Calibri" pitchFamily="34" charset="-122"/>
                 <a:cs typeface="Calibri" pitchFamily="34" charset="-120"/>
               </a:rPr>
-              <a:t>Could MiniLM have memorized 'Lehman' / 'Repo 105' / etc.?</a:t>
-            </a:r>
-            <a:endParaRPr lang="en-US" sz="1400" dirty="0"/>
-          </a:p>
-        </p:txBody>
-      </p:sp>
-      <p:sp>
-        <p:nvSpPr>
-          <p:cNvPr id="24" name="Text 22"/>
-          <p:cNvSpPr/>
-          <p:nvPr/>
-        </p:nvSpPr>
-        <p:spPr>
-          <a:xfrm>
-            <a:off x="1280160" y="5806440"/>
-            <a:ext cx="10241280" cy="594360"/>
-          </a:xfrm>
-          <a:prstGeom prst="rect">
-            <a:avLst/>
-          </a:prstGeom>
-          <a:noFill/>
-          <a:ln/>
-        </p:spPr>
-        <p:txBody>
-          <a:bodyPr wrap="square" rtlCol="0" anchor="ctr"/>
-          <a:lstStyle/>
-          <a:p>
-            <a:pPr indent="0" marL="0">
-              <a:lnSpc>
-                <a:spcPct val="130000"/>
-              </a:lnSpc>
-              <a:buNone/>
-            </a:pPr>
-            <a:r>
-              <a:rPr lang="en-US" sz="1200" dirty="0">
-                <a:solidFill>
-                  <a:srgbClr val="1A1A1A"/>
-                </a:solidFill>
-                <a:latin typeface="Georgia" pitchFamily="34" charset="0"/>
-                <a:ea typeface="Georgia" pitchFamily="34" charset="-122"/>
-                <a:cs typeface="Georgia" pitchFamily="34" charset="-120"/>
-              </a:rPr>
-              <a:t>Tested post-hoc — masked 93 such mentions with [ENTITY] and re-scored. Lehman's rank held at 3/13 (delta = 0). Literal-name leakage rejected; topical leakage remains disclosed but unaddressed.</a:t>
-            </a:r>
-            <a:endParaRPr lang="en-US" sz="1200" dirty="0"/>
-          </a:p>
-        </p:txBody>
-      </p:sp>
-      <p:sp>
-        <p:nvSpPr>
-          <p:cNvPr id="25" name="Text 23"/>
-          <p:cNvSpPr/>
-          <p:nvPr/>
-        </p:nvSpPr>
-        <p:spPr>
-          <a:xfrm>
-            <a:off x="457200" y="6446520"/>
-            <a:ext cx="7315200" cy="274320"/>
-          </a:xfrm>
-          <a:prstGeom prst="rect">
-            <a:avLst/>
-          </a:prstGeom>
-          <a:noFill/>
-          <a:ln/>
-        </p:spPr>
-        <p:txBody>
-          <a:bodyPr wrap="square" rtlCol="0" anchor="ctr"/>
-          <a:lstStyle/>
-          <a:p>
-            <a:pPr algn="l" indent="0" marL="0">
-              <a:buNone/>
-            </a:pPr>
-            <a:r>
-              <a:rPr lang="en-US" sz="1000" dirty="0">
-                <a:solidFill>
-                  <a:srgbClr val="8A8A8A"/>
-                </a:solidFill>
-                <a:latin typeface="Calibri" pitchFamily="34" charset="0"/>
-                <a:ea typeface="Calibri" pitchFamily="34" charset="-122"/>
-                <a:cs typeface="Calibri" pitchFamily="34" charset="-120"/>
-              </a:rPr>
               <a:t>Canary  ·  Arsenii Chan  ·  CSC 44800</a:t>
             </a:r>
             <a:endParaRPr lang="en-US" sz="1000" dirty="0"/>
@@ -7504,7 +5746,7 @@
       </p:sp>
       <p:sp>
         <p:nvSpPr>
-          <p:cNvPr id="26" name="Text 24"/>
+          <p:cNvPr id="21" name="Text 19"/>
           <p:cNvSpPr/>
           <p:nvPr/>
         </p:nvSpPr>
@@ -7606,7 +5848,7 @@
                 <a:ea typeface="Calibri" pitchFamily="34" charset="-122"/>
                 <a:cs typeface="Calibri" pitchFamily="34" charset="-120"/>
               </a:rPr>
-              <a:t>THREE THINGS THIS PROJECT TAUGHT ME</a:t>
+              <a:t>CONCLUSION</a:t>
             </a:r>
             <a:endParaRPr lang="en-US" sz="1200" dirty="0"/>
           </a:p>
@@ -7646,7 +5888,7 @@
         <p:spPr>
           <a:xfrm>
             <a:off x="640080" y="1280160"/>
-            <a:ext cx="914400" cy="640080"/>
+            <a:ext cx="10972800" cy="640080"/>
           </a:xfrm>
           <a:prstGeom prst="rect">
             <a:avLst/>
@@ -7662,7 +5904,127 @@
               <a:buNone/>
             </a:pPr>
             <a:r>
-              <a:rPr lang="en-US" sz="3600" b="1" dirty="0">
+              <a:rPr lang="en-US" sz="3200" b="1" dirty="0">
+                <a:solidFill>
+                  <a:srgbClr val="FFFFFF"/>
+                </a:solidFill>
+                <a:latin typeface="Georgia" pitchFamily="34" charset="0"/>
+                <a:ea typeface="Georgia" pitchFamily="34" charset="-122"/>
+                <a:cs typeface="Georgia" pitchFamily="34" charset="-120"/>
+              </a:rPr>
+              <a:t>What survived: pre-registration.</a:t>
+            </a:r>
+            <a:endParaRPr lang="en-US" sz="3200" dirty="0"/>
+          </a:p>
+        </p:txBody>
+      </p:sp>
+      <p:sp>
+        <p:nvSpPr>
+          <p:cNvPr id="5" name="Text 3"/>
+          <p:cNvSpPr/>
+          <p:nvPr/>
+        </p:nvSpPr>
+        <p:spPr>
+          <a:xfrm>
+            <a:off x="640080" y="1965960"/>
+            <a:ext cx="10972800" cy="640080"/>
+          </a:xfrm>
+          <a:prstGeom prst="rect">
+            <a:avLst/>
+          </a:prstGeom>
+          <a:noFill/>
+          <a:ln/>
+        </p:spPr>
+        <p:txBody>
+          <a:bodyPr wrap="square" rtlCol="0" anchor="ctr"/>
+          <a:lstStyle/>
+          <a:p>
+            <a:pPr indent="0" marL="0">
+              <a:buNone/>
+            </a:pPr>
+            <a:r>
+              <a:rPr lang="en-US" sz="3200" b="1" dirty="0">
+                <a:solidFill>
+                  <a:srgbClr val="FFFFFF"/>
+                </a:solidFill>
+                <a:latin typeface="Georgia" pitchFamily="34" charset="0"/>
+                <a:ea typeface="Georgia" pitchFamily="34" charset="-122"/>
+                <a:cs typeface="Georgia" pitchFamily="34" charset="-120"/>
+              </a:rPr>
+              <a:t>What failed: the autoencoder beyond the TF-IDF baseline.</a:t>
+            </a:r>
+            <a:endParaRPr lang="en-US" sz="3200" dirty="0"/>
+          </a:p>
+        </p:txBody>
+      </p:sp>
+      <p:sp>
+        <p:nvSpPr>
+          <p:cNvPr id="6" name="Text 4"/>
+          <p:cNvSpPr/>
+          <p:nvPr/>
+        </p:nvSpPr>
+        <p:spPr>
+          <a:xfrm>
+            <a:off x="640080" y="2926080"/>
+            <a:ext cx="10972800" cy="822960"/>
+          </a:xfrm>
+          <a:prstGeom prst="rect">
+            <a:avLst/>
+          </a:prstGeom>
+          <a:noFill/>
+          <a:ln/>
+        </p:spPr>
+        <p:txBody>
+          <a:bodyPr wrap="square" rtlCol="0" anchor="ctr"/>
+          <a:lstStyle/>
+          <a:p>
+            <a:pPr indent="0" marL="0">
+              <a:lnSpc>
+                <a:spcPct val="130000"/>
+              </a:lnSpc>
+              <a:buNone/>
+            </a:pPr>
+            <a:r>
+              <a:rPr lang="en-US" sz="1600" i="1" dirty="0">
+                <a:solidFill>
+                  <a:srgbClr val="CFD8E8"/>
+                </a:solidFill>
+                <a:latin typeface="Georgia" pitchFamily="34" charset="0"/>
+                <a:ea typeface="Georgia" pitchFamily="34" charset="-122"/>
+                <a:cs typeface="Georgia" pitchFamily="34" charset="-120"/>
+              </a:rPr>
+              <a:t>A result that loses to a baseline is not evidence for the neural model. The contract held; the model did not.</a:t>
+            </a:r>
+            <a:endParaRPr lang="en-US" sz="1600" dirty="0"/>
+          </a:p>
+        </p:txBody>
+      </p:sp>
+      <p:sp>
+        <p:nvSpPr>
+          <p:cNvPr id="7" name="Text 5"/>
+          <p:cNvSpPr/>
+          <p:nvPr/>
+        </p:nvSpPr>
+        <p:spPr>
+          <a:xfrm>
+            <a:off x="640080" y="4023360"/>
+            <a:ext cx="10972800" cy="365760"/>
+          </a:xfrm>
+          <a:prstGeom prst="rect">
+            <a:avLst/>
+          </a:prstGeom>
+          <a:noFill/>
+          <a:ln/>
+        </p:spPr>
+        <p:txBody>
+          <a:bodyPr wrap="square" rtlCol="0" anchor="ctr"/>
+          <a:lstStyle/>
+          <a:p>
+            <a:pPr indent="0" marL="0">
+              <a:buNone/>
+            </a:pPr>
+            <a:r>
+              <a:rPr lang="en-US" sz="1200" b="1" spc="400" kern="0" dirty="0">
                 <a:solidFill>
                   <a:srgbClr val="D4A017"/>
                 </a:solidFill>
@@ -7670,22 +6032,47 @@
                 <a:ea typeface="Calibri" pitchFamily="34" charset="-122"/>
                 <a:cs typeface="Calibri" pitchFamily="34" charset="-120"/>
               </a:rPr>
-              <a:t>01</a:t>
-            </a:r>
-            <a:endParaRPr lang="en-US" sz="3600" dirty="0"/>
-          </a:p>
-        </p:txBody>
-      </p:sp>
-      <p:sp>
-        <p:nvSpPr>
-          <p:cNvPr id="5" name="Text 3"/>
-          <p:cNvSpPr/>
-          <p:nvPr/>
-        </p:nvSpPr>
-        <p:spPr>
-          <a:xfrm>
-            <a:off x="1554480" y="1280160"/>
-            <a:ext cx="10058400" cy="548640"/>
+              <a:t>Next experiment</a:t>
+            </a:r>
+            <a:endParaRPr lang="en-US" sz="1200" dirty="0"/>
+          </a:p>
+        </p:txBody>
+      </p:sp>
+      <p:sp>
+        <p:nvSpPr>
+          <p:cNvPr id="8" name="Shape 6"/>
+          <p:cNvSpPr/>
+          <p:nvPr/>
+        </p:nvSpPr>
+        <p:spPr>
+          <a:xfrm>
+            <a:off x="640080" y="4389120"/>
+            <a:ext cx="365760" cy="36576"/>
+          </a:xfrm>
+          <a:prstGeom prst="rect">
+            <a:avLst/>
+          </a:prstGeom>
+          <a:solidFill>
+            <a:srgbClr val="D4A017"/>
+          </a:solidFill>
+          <a:ln w="12700">
+            <a:solidFill>
+              <a:srgbClr val="D4A017"/>
+            </a:solidFill>
+            <a:prstDash val="solid"/>
+          </a:ln>
+        </p:spPr>
+      </p:sp>
+      <p:sp>
+        <p:nvSpPr>
+          <p:cNvPr id="9" name="Text 7"/>
+          <p:cNvSpPr/>
+          <p:nvPr/>
+        </p:nvSpPr>
+        <p:spPr>
+          <a:xfrm>
+            <a:off x="640080" y="4572000"/>
+            <a:ext cx="10972800" cy="822960"/>
           </a:xfrm>
           <a:prstGeom prst="rect">
             <a:avLst/>
@@ -7698,10 +6085,13 @@
           <a:lstStyle/>
           <a:p>
             <a:pPr indent="0" marL="0">
-              <a:buNone/>
-            </a:pPr>
-            <a:r>
-              <a:rPr lang="en-US" sz="1800" b="1" dirty="0">
+              <a:lnSpc>
+                <a:spcPct val="130000"/>
+              </a:lnSpc>
+              <a:buNone/>
+            </a:pPr>
+            <a:r>
+              <a:rPr lang="en-US" sz="1600" dirty="0">
                 <a:solidFill>
                   <a:srgbClr val="FFFFFF"/>
                 </a:solidFill>
@@ -7709,22 +6099,22 @@
                 <a:ea typeface="Georgia" pitchFamily="34" charset="-122"/>
                 <a:cs typeface="Georgia" pitchFamily="34" charset="-120"/>
               </a:rPr>
-              <a:t>Pre-registration is load-bearing only if it survives contact with the data.</a:t>
-            </a:r>
-            <a:endParaRPr lang="en-US" sz="1800" dirty="0"/>
-          </a:p>
-        </p:txBody>
-      </p:sp>
-      <p:sp>
-        <p:nvSpPr>
-          <p:cNvPr id="6" name="Text 4"/>
-          <p:cNvSpPr/>
-          <p:nvPr/>
-        </p:nvSpPr>
-        <p:spPr>
-          <a:xfrm>
-            <a:off x="1554480" y="1783080"/>
-            <a:ext cx="10058400" cy="777240"/>
+              <a:t>Same autoencoder, within-firm temporal delta. Does Lehman's MD&amp;A look anomalous against Lehman's own prior-year MD&amp;A?</a:t>
+            </a:r>
+            <a:endParaRPr lang="en-US" sz="1600" dirty="0"/>
+          </a:p>
+        </p:txBody>
+      </p:sp>
+      <p:sp>
+        <p:nvSpPr>
+          <p:cNvPr id="10" name="Text 8"/>
+          <p:cNvSpPr/>
+          <p:nvPr/>
+        </p:nvSpPr>
+        <p:spPr>
+          <a:xfrm>
+            <a:off x="640080" y="5943600"/>
+            <a:ext cx="10972800" cy="365760"/>
           </a:xfrm>
           <a:prstGeom prst="rect">
             <a:avLst/>
@@ -7737,172 +6127,24 @@
           <a:lstStyle/>
           <a:p>
             <a:pPr indent="0" marL="0">
-              <a:lnSpc>
-                <a:spcPct val="130000"/>
-              </a:lnSpc>
-              <a:buNone/>
-            </a:pPr>
-            <a:r>
-              <a:rPr lang="en-US" sz="1300" dirty="0">
+              <a:buNone/>
+            </a:pPr>
+            <a:r>
+              <a:rPr lang="en-US" sz="1200" dirty="0">
                 <a:solidFill>
                   <a:srgbClr val="CFD8E8"/>
-                </a:solidFill>
-                <a:latin typeface="Georgia" pitchFamily="34" charset="0"/>
-                <a:ea typeface="Georgia" pitchFamily="34" charset="-122"/>
-                <a:cs typeface="Georgia" pitchFamily="34" charset="-120"/>
-              </a:rPr>
-              <a:t>The frozen spec held. I did not iterate the autoencoder, did not redefine “clean,” did not retreat from the Enron exclusion when the result was uncomfortable. Without that contract, the same numbers would be a polite request to redesign.</a:t>
-            </a:r>
-            <a:endParaRPr lang="en-US" sz="1300" dirty="0"/>
-          </a:p>
-        </p:txBody>
-      </p:sp>
-      <p:sp>
-        <p:nvSpPr>
-          <p:cNvPr id="7" name="Text 5"/>
-          <p:cNvSpPr/>
-          <p:nvPr/>
-        </p:nvSpPr>
-        <p:spPr>
-          <a:xfrm>
-            <a:off x="640080" y="2651760"/>
-            <a:ext cx="914400" cy="640080"/>
-          </a:xfrm>
-          <a:prstGeom prst="rect">
-            <a:avLst/>
-          </a:prstGeom>
-          <a:noFill/>
-          <a:ln/>
-        </p:spPr>
-        <p:txBody>
-          <a:bodyPr wrap="square" rtlCol="0" anchor="ctr"/>
-          <a:lstStyle/>
-          <a:p>
-            <a:pPr indent="0" marL="0">
-              <a:buNone/>
-            </a:pPr>
-            <a:r>
-              <a:rPr lang="en-US" sz="3600" b="1" dirty="0">
-                <a:solidFill>
-                  <a:srgbClr val="D4A017"/>
                 </a:solidFill>
                 <a:latin typeface="Calibri" pitchFamily="34" charset="0"/>
                 <a:ea typeface="Calibri" pitchFamily="34" charset="-122"/>
                 <a:cs typeface="Calibri" pitchFamily="34" charset="-120"/>
               </a:rPr>
-              <a:t>02</a:t>
-            </a:r>
-            <a:endParaRPr lang="en-US" sz="3600" dirty="0"/>
-          </a:p>
-        </p:txBody>
-      </p:sp>
-      <p:sp>
-        <p:nvSpPr>
-          <p:cNvPr id="8" name="Text 6"/>
-          <p:cNvSpPr/>
-          <p:nvPr/>
-        </p:nvSpPr>
-        <p:spPr>
-          <a:xfrm>
-            <a:off x="1554480" y="2651760"/>
-            <a:ext cx="10058400" cy="548640"/>
-          </a:xfrm>
-          <a:prstGeom prst="rect">
-            <a:avLst/>
-          </a:prstGeom>
-          <a:noFill/>
-          <a:ln/>
-        </p:spPr>
-        <p:txBody>
-          <a:bodyPr wrap="square" rtlCol="0" anchor="ctr"/>
-          <a:lstStyle/>
-          <a:p>
-            <a:pPr indent="0" marL="0">
-              <a:buNone/>
-            </a:pPr>
-            <a:r>
-              <a:rPr lang="en-US" sz="1800" b="1" dirty="0">
-                <a:solidFill>
-                  <a:srgbClr val="FFFFFF"/>
-                </a:solidFill>
-                <a:latin typeface="Georgia" pitchFamily="34" charset="0"/>
-                <a:ea typeface="Georgia" pitchFamily="34" charset="-122"/>
-                <a:cs typeface="Georgia" pitchFamily="34" charset="-120"/>
-              </a:rPr>
-              <a:t>A sharp baseline is not optional.</a:t>
-            </a:r>
-            <a:endParaRPr lang="en-US" sz="1800" dirty="0"/>
-          </a:p>
-        </p:txBody>
-      </p:sp>
-      <p:sp>
-        <p:nvSpPr>
-          <p:cNvPr id="9" name="Text 7"/>
-          <p:cNvSpPr/>
-          <p:nvPr/>
-        </p:nvSpPr>
-        <p:spPr>
-          <a:xfrm>
-            <a:off x="1554480" y="3154680"/>
-            <a:ext cx="10058400" cy="777240"/>
-          </a:xfrm>
-          <a:prstGeom prst="rect">
-            <a:avLst/>
-          </a:prstGeom>
-          <a:noFill/>
-          <a:ln/>
-        </p:spPr>
-        <p:txBody>
-          <a:bodyPr wrap="square" rtlCol="0" anchor="ctr"/>
-          <a:lstStyle/>
-          <a:p>
-            <a:pPr indent="0" marL="0">
-              <a:lnSpc>
-                <a:spcPct val="130000"/>
-              </a:lnSpc>
-              <a:buNone/>
-            </a:pPr>
-            <a:r>
-              <a:rPr lang="en-US" sz="1300" dirty="0">
-                <a:solidFill>
-                  <a:srgbClr val="CFD8E8"/>
-                </a:solidFill>
-                <a:latin typeface="Georgia" pitchFamily="34" charset="0"/>
-                <a:ea typeface="Georgia" pitchFamily="34" charset="-122"/>
-                <a:cs typeface="Georgia" pitchFamily="34" charset="-120"/>
-              </a:rPr>
-              <a:t>The most decisive result in this study is not the autoencoder's ranks but the post-hoc TF-IDF baseline matching them. A result that does not survive a baseline check is not a result.</a:t>
-            </a:r>
-            <a:endParaRPr lang="en-US" sz="1300" dirty="0"/>
-          </a:p>
-        </p:txBody>
-      </p:sp>
-      <p:sp>
-        <p:nvSpPr>
-          <p:cNvPr id="10" name="Text 8"/>
-          <p:cNvSpPr/>
-          <p:nvPr/>
-        </p:nvSpPr>
-        <p:spPr>
-          <a:xfrm>
-            <a:off x="640080" y="4023360"/>
-            <a:ext cx="914400" cy="640080"/>
-          </a:xfrm>
-          <a:prstGeom prst="rect">
-            <a:avLst/>
-          </a:prstGeom>
-          <a:noFill/>
-          <a:ln/>
-        </p:spPr>
-        <p:txBody>
-          <a:bodyPr wrap="square" rtlCol="0" anchor="ctr"/>
-          <a:lstStyle/>
-          <a:p>
-            <a:pPr indent="0" marL="0">
-              <a:buNone/>
-            </a:pPr>
-            <a:r>
-              <a:rPr lang="en-US" sz="3600" b="1" dirty="0">
+              <a:t>Try it:  </a:t>
+            </a:r>
+            <a:pPr indent="0" marL="0">
+              <a:buNone/>
+            </a:pPr>
+            <a:r>
+              <a:rPr lang="en-US" sz="1200" b="1" dirty="0">
                 <a:solidFill>
                   <a:srgbClr val="D4A017"/>
                 </a:solidFill>
@@ -7910,114 +6152,8 @@
                 <a:ea typeface="Calibri" pitchFamily="34" charset="-122"/>
                 <a:cs typeface="Calibri" pitchFamily="34" charset="-120"/>
               </a:rPr>
-              <a:t>03</a:t>
-            </a:r>
-            <a:endParaRPr lang="en-US" sz="3600" dirty="0"/>
-          </a:p>
-        </p:txBody>
-      </p:sp>
-      <p:sp>
-        <p:nvSpPr>
-          <p:cNvPr id="11" name="Text 9"/>
-          <p:cNvSpPr/>
-          <p:nvPr/>
-        </p:nvSpPr>
-        <p:spPr>
-          <a:xfrm>
-            <a:off x="1554480" y="4023360"/>
-            <a:ext cx="10058400" cy="548640"/>
-          </a:xfrm>
-          <a:prstGeom prst="rect">
-            <a:avLst/>
-          </a:prstGeom>
-          <a:noFill/>
-          <a:ln/>
-        </p:spPr>
-        <p:txBody>
-          <a:bodyPr wrap="square" rtlCol="0" anchor="ctr"/>
-          <a:lstStyle/>
-          <a:p>
-            <a:pPr indent="0" marL="0">
-              <a:buNone/>
-            </a:pPr>
-            <a:r>
-              <a:rPr lang="en-US" sz="1800" b="1" dirty="0">
-                <a:solidFill>
-                  <a:srgbClr val="FFFFFF"/>
-                </a:solidFill>
-                <a:latin typeface="Georgia" pitchFamily="34" charset="0"/>
-                <a:ea typeface="Georgia" pitchFamily="34" charset="-122"/>
-                <a:cs typeface="Georgia" pitchFamily="34" charset="-120"/>
-              </a:rPr>
-              <a:t>If you own a design error, it becomes a checklist.</a:t>
-            </a:r>
-            <a:endParaRPr lang="en-US" sz="1800" dirty="0"/>
-          </a:p>
-        </p:txBody>
-      </p:sp>
-      <p:sp>
-        <p:nvSpPr>
-          <p:cNvPr id="12" name="Text 10"/>
-          <p:cNvSpPr/>
-          <p:nvPr/>
-        </p:nvSpPr>
-        <p:spPr>
-          <a:xfrm>
-            <a:off x="1554480" y="4526280"/>
-            <a:ext cx="10058400" cy="777240"/>
-          </a:xfrm>
-          <a:prstGeom prst="rect">
-            <a:avLst/>
-          </a:prstGeom>
-          <a:noFill/>
-          <a:ln/>
-        </p:spPr>
-        <p:txBody>
-          <a:bodyPr wrap="square" rtlCol="0" anchor="ctr"/>
-          <a:lstStyle/>
-          <a:p>
-            <a:pPr indent="0" marL="0">
-              <a:lnSpc>
-                <a:spcPct val="130000"/>
-              </a:lnSpc>
-              <a:buNone/>
-            </a:pPr>
-            <a:r>
-              <a:rPr lang="en-US" sz="1300" dirty="0">
-                <a:solidFill>
-                  <a:srgbClr val="CFD8E8"/>
-                </a:solidFill>
-                <a:latin typeface="Georgia" pitchFamily="34" charset="0"/>
-                <a:ea typeface="Georgia" pitchFamily="34" charset="-122"/>
-                <a:cs typeface="Georgia" pitchFamily="34" charset="-120"/>
-              </a:rPr>
-              <a:t>Enron's exclusion was a design error caught by the freeze, not missing data. Pre-flight check for the next iteration: enumerate exclusions BEFORE freezing the contract, not after. Falsifiable next experiment: same autoencoder, within-firm temporal delta — does Lehman's MD&amp;A look anomalous against Lehman's own prior-year MD&amp;A?</a:t>
-            </a:r>
-            <a:endParaRPr lang="en-US" sz="1300" dirty="0"/>
-          </a:p>
-        </p:txBody>
-      </p:sp>
-      <p:sp>
-        <p:nvSpPr>
-          <p:cNvPr id="13" name="Text 11"/>
-          <p:cNvSpPr/>
-          <p:nvPr/>
-        </p:nvSpPr>
-        <p:spPr>
-          <a:xfrm>
-            <a:off x="640080" y="5943600"/>
-            <a:ext cx="10972800" cy="365760"/>
-          </a:xfrm>
-          <a:prstGeom prst="rect">
-            <a:avLst/>
-          </a:prstGeom>
-          <a:noFill/>
-          <a:ln/>
-        </p:spPr>
-        <p:txBody>
-          <a:bodyPr wrap="square" rtlCol="0" anchor="ctr"/>
-          <a:lstStyle/>
-          <a:p>
+              <a:t>canary-psi.vercel.app/scan</a:t>
+            </a:r>
             <a:pPr indent="0" marL="0">
               <a:buNone/>
             </a:pPr>
@@ -8030,7 +6166,7 @@
                 <a:ea typeface="Calibri" pitchFamily="34" charset="-122"/>
                 <a:cs typeface="Calibri" pitchFamily="34" charset="-120"/>
               </a:rPr>
-              <a:t>Try it:  </a:t>
+              <a:t>    ·    Code:  </a:t>
             </a:r>
             <a:pPr indent="0" marL="0">
               <a:buNone/>
@@ -8044,7 +6180,7 @@
                 <a:ea typeface="Calibri" pitchFamily="34" charset="-122"/>
                 <a:cs typeface="Calibri" pitchFamily="34" charset="-120"/>
               </a:rPr>
-              <a:t>canary-psi.vercel.app/scan</a:t>
+              <a:t>github.com/ArseniiChan/canary</a:t>
             </a:r>
             <a:pPr indent="0" marL="0">
               <a:buNone/>
@@ -8058,7 +6194,7 @@
                 <a:ea typeface="Calibri" pitchFamily="34" charset="-122"/>
                 <a:cs typeface="Calibri" pitchFamily="34" charset="-120"/>
               </a:rPr>
-              <a:t>    ·    Code:  </a:t>
+              <a:t>    ·    Tag:  </a:t>
             </a:r>
             <a:pPr indent="0" marL="0">
               <a:buNone/>
@@ -8072,34 +6208,6 @@
                 <a:ea typeface="Calibri" pitchFamily="34" charset="-122"/>
                 <a:cs typeface="Calibri" pitchFamily="34" charset="-120"/>
               </a:rPr>
-              <a:t>github.com/ArseniiChan/canary</a:t>
-            </a:r>
-            <a:pPr indent="0" marL="0">
-              <a:buNone/>
-            </a:pPr>
-            <a:r>
-              <a:rPr lang="en-US" sz="1200" dirty="0">
-                <a:solidFill>
-                  <a:srgbClr val="CFD8E8"/>
-                </a:solidFill>
-                <a:latin typeface="Calibri" pitchFamily="34" charset="0"/>
-                <a:ea typeface="Calibri" pitchFamily="34" charset="-122"/>
-                <a:cs typeface="Calibri" pitchFamily="34" charset="-120"/>
-              </a:rPr>
-              <a:t>    ·    Tag:  </a:t>
-            </a:r>
-            <a:pPr indent="0" marL="0">
-              <a:buNone/>
-            </a:pPr>
-            <a:r>
-              <a:rPr lang="en-US" sz="1200" b="1" dirty="0">
-                <a:solidFill>
-                  <a:srgbClr val="D4A017"/>
-                </a:solidFill>
-                <a:latin typeface="Calibri" pitchFamily="34" charset="0"/>
-                <a:ea typeface="Calibri" pitchFamily="34" charset="-122"/>
-                <a:cs typeface="Calibri" pitchFamily="34" charset="-120"/>
-              </a:rPr>
               <a:t>validation-spec-frozen</a:t>
             </a:r>
             <a:endParaRPr lang="en-US" sz="1200" dirty="0"/>
@@ -8108,7 +6216,7 @@
       </p:sp>
       <p:sp>
         <p:nvSpPr>
-          <p:cNvPr id="14" name="Text 12"/>
+          <p:cNvPr id="11" name="Text 9"/>
           <p:cNvSpPr/>
           <p:nvPr/>
         </p:nvSpPr>

--- a/reports/canary_deck.pptx
+++ b/reports/canary_deck.pptx
@@ -1610,7 +1610,7 @@
                 <a:ea typeface="Georgia" pitchFamily="34" charset="-122"/>
                 <a:cs typeface="Georgia" pitchFamily="34" charset="-120"/>
               </a:rPr>
-              <a:t>Primary contribution: a pre-registered null result plus a baseline that beat the proposed model.</a:t>
+              <a:t>Primary contribution: a pre-registered null result plus a baseline that beat the autoencoder.</a:t>
             </a:r>
             <a:endParaRPr lang="en-US" sz="1400" dirty="0"/>
           </a:p>
@@ -2343,7 +2343,7 @@
                 <a:ea typeface="Georgia" pitchFamily="34" charset="-122"/>
                 <a:cs typeface="Georgia" pitchFamily="34" charset="-120"/>
               </a:rPr>
-              <a:t>Leave-one-cohort-out. For each held-out fraud, the autoencoder is trained on clean filings from other cohorts only. The fraud and its peers are never in the training set.</a:t>
+              <a:t>Leave-one-cohort-out (LOCO): for each held-out fraud, the autoencoder is trained on clean filings from other cohorts only. The fraud and its peers are never in the training set.</a:t>
             </a:r>
             <a:endParaRPr lang="en-US" sz="1300" dirty="0"/>
           </a:p>
@@ -2474,7 +2474,7 @@
                 <a:ea typeface="Georgia" pitchFamily="34" charset="-122"/>
                 <a:cs typeface="Georgia" pitchFamily="34" charset="-120"/>
               </a:rPr>
-              <a:t>Within the LOCO training set, only filings dated on or before that fraud's filing date are eligible. The model's representation of "clean" cannot include post-fraud disclosure language.</a:t>
+              <a:t>Within the LOCO training set, only filings dated on or before that fraud's filing date are eligible. The autoencoder's training corpus cannot include post-fraud disclosure language. (MiniLM pretraining is a separate caveat.)</a:t>
             </a:r>
             <a:endParaRPr lang="en-US" sz="1300" dirty="0"/>
           </a:p>
@@ -2605,7 +2605,7 @@
                 <a:ea typeface="Georgia" pitchFamily="34" charset="-122"/>
                 <a:cs typeface="Georgia" pitchFamily="34" charset="-120"/>
               </a:rPr>
-              <a:t>Architecture, hyperparameters, sentence cap, seeds: all committed and tagged before validation ran. scripts/06_validate.py runs once. Whatever the numbers say, that is the result.</a:t>
+              <a:t>Architecture, hyperparameters, sentence cap, seeds: all committed and tagged before validation ran. scripts/06_validate.py runs once. No model tuning after validation.</a:t>
             </a:r>
             <a:endParaRPr lang="en-US" sz="1300" dirty="0"/>
           </a:p>
@@ -2959,7 +2959,7 @@
               <a:buNone/>
             </a:pPr>
             <a:r>
-              <a:rPr lang="en-US" sz="2600" b="1" dirty="0">
+              <a:rPr lang="en-US" sz="2400" b="1" dirty="0">
                 <a:solidFill>
                   <a:srgbClr val="0E1A33"/>
                 </a:solidFill>
@@ -2967,9 +2967,9 @@
                 <a:ea typeface="Georgia" pitchFamily="34" charset="-122"/>
                 <a:cs typeface="Georgia" pitchFamily="34" charset="-120"/>
               </a:rPr>
-              <a:t>One high-ranked outlier. Four non-positive. One excluded by design.</a:t>
-            </a:r>
-            <a:endParaRPr lang="en-US" sz="2600" dirty="0"/>
+              <a:t>Only Lehman ranks above random expectation; the aggregate still loses to random.</a:t>
+            </a:r>
+            <a:endParaRPr lang="en-US" sz="2400" dirty="0"/>
           </a:p>
         </p:txBody>
       </p:sp>
@@ -3551,7 +3551,7 @@
                           <a:ea typeface="Calibri" pitchFamily="34" charset="-122"/>
                           <a:cs typeface="Calibri" pitchFamily="34" charset="-120"/>
                         </a:rPr>
-                        <a:t>non-positive</a:t>
+                        <a:t>at or below random</a:t>
                       </a:r>
                       <a:endParaRPr lang="en-US" sz="1300" dirty="0">
                         <a:latin typeface="Calibri" charset="0"/>
@@ -3748,7 +3748,7 @@
                           <a:ea typeface="Calibri" pitchFamily="34" charset="-122"/>
                           <a:cs typeface="Calibri" pitchFamily="34" charset="-120"/>
                         </a:rPr>
-                        <a:t>non-positive</a:t>
+                        <a:t>at or below random</a:t>
                       </a:r>
                       <a:endParaRPr lang="en-US" sz="1300" dirty="0">
                         <a:latin typeface="Calibri" charset="0"/>
@@ -3945,7 +3945,7 @@
                           <a:ea typeface="Calibri" pitchFamily="34" charset="-122"/>
                           <a:cs typeface="Calibri" pitchFamily="34" charset="-120"/>
                         </a:rPr>
-                        <a:t>non-positive</a:t>
+                        <a:t>at or below random</a:t>
                       </a:r>
                       <a:endParaRPr lang="en-US" sz="1300" dirty="0">
                         <a:latin typeface="Calibri" charset="0"/>
@@ -4142,7 +4142,7 @@
                           <a:ea typeface="Calibri" pitchFamily="34" charset="-122"/>
                           <a:cs typeface="Calibri" pitchFamily="34" charset="-120"/>
                         </a:rPr>
-                        <a:t>non-positive</a:t>
+                        <a:t>at or below random</a:t>
                       </a:r>
                       <a:endParaRPr lang="en-US" sz="1300" dirty="0">
                         <a:latin typeface="Calibri" charset="0"/>
@@ -4339,7 +4339,7 @@
                           <a:ea typeface="Calibri" pitchFamily="34" charset="-122"/>
                           <a:cs typeface="Calibri" pitchFamily="34" charset="-120"/>
                         </a:rPr>
-                        <a:t>not evaluable under the frozen rule</a:t>
+                        <a:t>not evaluable: filed earliest, no eligible training data</a:t>
                       </a:r>
                       <a:endParaRPr lang="en-US" sz="1300" dirty="0">
                         <a:latin typeface="Calibri" charset="0"/>
@@ -4886,7 +4886,7 @@
         <p:spPr>
           <a:xfrm>
             <a:off x="640080" y="1005840"/>
-            <a:ext cx="10972800" cy="548640"/>
+            <a:ext cx="10972800" cy="457200"/>
           </a:xfrm>
           <a:prstGeom prst="rect">
             <a:avLst/>
@@ -4916,9 +4916,48 @@
           </a:p>
         </p:txBody>
       </p:sp>
+      <p:sp>
+        <p:nvSpPr>
+          <p:cNvPr id="5" name="Text 3"/>
+          <p:cNvSpPr/>
+          <p:nvPr/>
+        </p:nvSpPr>
+        <p:spPr>
+          <a:xfrm>
+            <a:off x="640080" y="1508760"/>
+            <a:ext cx="10972800" cy="320040"/>
+          </a:xfrm>
+          <a:prstGeom prst="rect">
+            <a:avLst/>
+          </a:prstGeom>
+          <a:noFill/>
+          <a:ln/>
+        </p:spPr>
+        <p:txBody>
+          <a:bodyPr wrap="square" rtlCol="0" anchor="ctr"/>
+          <a:lstStyle/>
+          <a:p>
+            <a:pPr indent="0" marL="0">
+              <a:buNone/>
+            </a:pPr>
+            <a:r>
+              <a:rPr lang="en-US" sz="1200" i="1" dirty="0">
+                <a:solidFill>
+                  <a:srgbClr val="555555"/>
+                </a:solidFill>
+                <a:latin typeface="Calibri" pitchFamily="34" charset="0"/>
+                <a:ea typeface="Calibri" pitchFamily="34" charset="-122"/>
+                <a:cs typeface="Calibri" pitchFamily="34" charset="-120"/>
+              </a:rPr>
+              <a:t>Post-hoc: tests whether the autoencoder earned its complexity, does not rescue the primary result.</a:t>
+            </a:r>
+            <a:endParaRPr lang="en-US" sz="1200" dirty="0"/>
+          </a:p>
+        </p:txBody>
+      </p:sp>
       <p:pic>
         <p:nvPicPr>
-          <p:cNvPr id="5" name="Image 0" descr="/Users/arseniichan/Documents/Claude/Projects/CSC448/canary/reports/figures/ae_vs_tfidf_rank.png">    </p:cNvPr>
+          <p:cNvPr id="6" name="Image 0" descr="/Users/arseniichan/Documents/Claude/Projects/CSC448/canary/reports/figures/ae_vs_tfidf_rank.png">    </p:cNvPr>
           <p:cNvPicPr>
             <a:picLocks noChangeAspect="1"/>
           </p:cNvPicPr>
@@ -4932,8 +4971,8 @@
         </p:blipFill>
         <p:spPr>
           <a:xfrm>
-            <a:off x="1371600" y="1783080"/>
-            <a:ext cx="9418320" cy="3840480"/>
+            <a:off x="1371600" y="1965960"/>
+            <a:ext cx="9418320" cy="3657600"/>
           </a:xfrm>
           <a:prstGeom prst="rect">
             <a:avLst/>
@@ -4942,7 +4981,7 @@
       </p:pic>
       <p:sp>
         <p:nvSpPr>
-          <p:cNvPr id="6" name="Text 3"/>
+          <p:cNvPr id="7" name="Text 4"/>
           <p:cNvSpPr/>
           <p:nvPr/>
         </p:nvSpPr>
@@ -4976,7 +5015,7 @@
                 <a:ea typeface="Georgia" pitchFamily="34" charset="-122"/>
                 <a:cs typeface="Georgia" pitchFamily="34" charset="-120"/>
               </a:rPr>
-              <a:t>Lehman: AE rank 3/13, TF-IDF rank 1/13. Aggregate hit@5 is 0.40 (TF-IDF) vs 0.20 (autoencoder). Mann-Whitney p is much smaller for TF-IDF on Lehman; exact values are in the report. The pre-registered model is not the signal carrier.</a:t>
+              <a:t>Lehman: AE rank 3/13, TF-IDF rank 1/13. Aggregate hit@5 is 0.40 (TF-IDF) vs 0.20 (autoencoder). Mann-Whitney p is much smaller for TF-IDF on Lehman; exact values are in the report. The pre-registered model does not beat the trivial baseline.</a:t>
             </a:r>
             <a:endParaRPr lang="en-US" sz="1300" dirty="0"/>
           </a:p>
@@ -4984,7 +5023,7 @@
       </p:sp>
       <p:sp>
         <p:nvSpPr>
-          <p:cNvPr id="7" name="Text 4"/>
+          <p:cNvPr id="8" name="Text 5"/>
           <p:cNvSpPr/>
           <p:nvPr/>
         </p:nvSpPr>
@@ -5023,7 +5062,7 @@
       </p:sp>
       <p:sp>
         <p:nvSpPr>
-          <p:cNvPr id="8" name="Text 5"/>
+          <p:cNvPr id="9" name="Text 6"/>
           <p:cNvSpPr/>
           <p:nvPr/>
         </p:nvSpPr>
@@ -5158,53 +5197,14 @@
       </p:sp>
       <p:sp>
         <p:nvSpPr>
-          <p:cNvPr id="4" name="Text 2"/>
-          <p:cNvSpPr/>
-          <p:nvPr/>
-        </p:nvSpPr>
-        <p:spPr>
-          <a:xfrm>
-            <a:off x="640080" y="1005840"/>
-            <a:ext cx="10972800" cy="548640"/>
-          </a:xfrm>
-          <a:prstGeom prst="rect">
-            <a:avLst/>
-          </a:prstGeom>
-          <a:noFill/>
-          <a:ln/>
-        </p:spPr>
-        <p:txBody>
-          <a:bodyPr wrap="square" rtlCol="0" anchor="ctr"/>
-          <a:lstStyle/>
-          <a:p>
-            <a:pPr indent="0" marL="0">
-              <a:buNone/>
-            </a:pPr>
-            <a:r>
-              <a:rPr lang="en-US" sz="2400" b="1" dirty="0">
-                <a:solidFill>
-                  <a:srgbClr val="0E1A33"/>
-                </a:solidFill>
-                <a:latin typeface="Georgia" pitchFamily="34" charset="0"/>
-                <a:ea typeface="Georgia" pitchFamily="34" charset="-122"/>
-                <a:cs typeface="Georgia" pitchFamily="34" charset="-120"/>
-              </a:rPr>
-              <a:t>Questions I expect.</a:t>
-            </a:r>
-            <a:endParaRPr lang="en-US" sz="2400" dirty="0"/>
-          </a:p>
-        </p:txBody>
-      </p:sp>
-      <p:sp>
-        <p:nvSpPr>
-          <p:cNvPr id="5" name="Shape 3"/>
-          <p:cNvSpPr/>
-          <p:nvPr/>
-        </p:nvSpPr>
-        <p:spPr>
-          <a:xfrm>
-            <a:off x="640080" y="1783080"/>
-            <a:ext cx="11064240" cy="1417320"/>
+          <p:cNvPr id="4" name="Shape 2"/>
+          <p:cNvSpPr/>
+          <p:nvPr/>
+        </p:nvSpPr>
+        <p:spPr>
+          <a:xfrm>
+            <a:off x="640080" y="1188720"/>
+            <a:ext cx="11064240" cy="1554480"/>
           </a:xfrm>
           <a:prstGeom prst="rect">
             <a:avLst/>
@@ -5222,14 +5222,14 @@
       </p:sp>
       <p:sp>
         <p:nvSpPr>
-          <p:cNvPr id="6" name="Shape 4"/>
-          <p:cNvSpPr/>
-          <p:nvPr/>
-        </p:nvSpPr>
-        <p:spPr>
-          <a:xfrm>
-            <a:off x="640080" y="1783080"/>
-            <a:ext cx="36576" cy="1417320"/>
+          <p:cNvPr id="5" name="Shape 3"/>
+          <p:cNvSpPr/>
+          <p:nvPr/>
+        </p:nvSpPr>
+        <p:spPr>
+          <a:xfrm>
+            <a:off x="640080" y="1188720"/>
+            <a:ext cx="36576" cy="1554480"/>
           </a:xfrm>
           <a:prstGeom prst="rect">
             <a:avLst/>
@@ -5247,13 +5247,13 @@
       </p:sp>
       <p:sp>
         <p:nvSpPr>
-          <p:cNvPr id="7" name="Text 5"/>
-          <p:cNvSpPr/>
-          <p:nvPr/>
-        </p:nvSpPr>
-        <p:spPr>
-          <a:xfrm>
-            <a:off x="777240" y="1874520"/>
+          <p:cNvPr id="6" name="Text 4"/>
+          <p:cNvSpPr/>
+          <p:nvPr/>
+        </p:nvSpPr>
+        <p:spPr>
+          <a:xfrm>
+            <a:off x="777240" y="1280160"/>
             <a:ext cx="457200" cy="365760"/>
           </a:xfrm>
           <a:prstGeom prst="rect">
@@ -5286,13 +5286,13 @@
       </p:sp>
       <p:sp>
         <p:nvSpPr>
-          <p:cNvPr id="8" name="Text 6"/>
-          <p:cNvSpPr/>
-          <p:nvPr/>
-        </p:nvSpPr>
-        <p:spPr>
-          <a:xfrm>
-            <a:off x="1280160" y="1874520"/>
+          <p:cNvPr id="7" name="Text 5"/>
+          <p:cNvSpPr/>
+          <p:nvPr/>
+        </p:nvSpPr>
+        <p:spPr>
+          <a:xfrm>
+            <a:off x="1280160" y="1280160"/>
             <a:ext cx="10058400" cy="365760"/>
           </a:xfrm>
           <a:prstGeom prst="rect">
@@ -5325,14 +5325,14 @@
       </p:sp>
       <p:sp>
         <p:nvSpPr>
-          <p:cNvPr id="9" name="Text 7"/>
-          <p:cNvSpPr/>
-          <p:nvPr/>
-        </p:nvSpPr>
-        <p:spPr>
-          <a:xfrm>
-            <a:off x="1280160" y="2240280"/>
-            <a:ext cx="10241280" cy="914400"/>
+          <p:cNvPr id="8" name="Text 6"/>
+          <p:cNvSpPr/>
+          <p:nvPr/>
+        </p:nvSpPr>
+        <p:spPr>
+          <a:xfrm>
+            <a:off x="1280160" y="1645920"/>
+            <a:ext cx="10241280" cy="1051560"/>
           </a:xfrm>
           <a:prstGeom prst="rect">
             <a:avLst/>
@@ -5367,14 +5367,14 @@
       </p:sp>
       <p:sp>
         <p:nvSpPr>
-          <p:cNvPr id="10" name="Shape 8"/>
-          <p:cNvSpPr/>
-          <p:nvPr/>
-        </p:nvSpPr>
-        <p:spPr>
-          <a:xfrm>
-            <a:off x="640080" y="3291840"/>
-            <a:ext cx="11064240" cy="1417320"/>
+          <p:cNvPr id="9" name="Shape 7"/>
+          <p:cNvSpPr/>
+          <p:nvPr/>
+        </p:nvSpPr>
+        <p:spPr>
+          <a:xfrm>
+            <a:off x="640080" y="2834640"/>
+            <a:ext cx="11064240" cy="1554480"/>
           </a:xfrm>
           <a:prstGeom prst="rect">
             <a:avLst/>
@@ -5392,14 +5392,14 @@
       </p:sp>
       <p:sp>
         <p:nvSpPr>
-          <p:cNvPr id="11" name="Shape 9"/>
-          <p:cNvSpPr/>
-          <p:nvPr/>
-        </p:nvSpPr>
-        <p:spPr>
-          <a:xfrm>
-            <a:off x="640080" y="3291840"/>
-            <a:ext cx="36576" cy="1417320"/>
+          <p:cNvPr id="10" name="Shape 8"/>
+          <p:cNvSpPr/>
+          <p:nvPr/>
+        </p:nvSpPr>
+        <p:spPr>
+          <a:xfrm>
+            <a:off x="640080" y="2834640"/>
+            <a:ext cx="36576" cy="1554480"/>
           </a:xfrm>
           <a:prstGeom prst="rect">
             <a:avLst/>
@@ -5417,13 +5417,13 @@
       </p:sp>
       <p:sp>
         <p:nvSpPr>
-          <p:cNvPr id="12" name="Text 10"/>
-          <p:cNvSpPr/>
-          <p:nvPr/>
-        </p:nvSpPr>
-        <p:spPr>
-          <a:xfrm>
-            <a:off x="777240" y="3383280"/>
+          <p:cNvPr id="11" name="Text 9"/>
+          <p:cNvSpPr/>
+          <p:nvPr/>
+        </p:nvSpPr>
+        <p:spPr>
+          <a:xfrm>
+            <a:off x="777240" y="2926080"/>
             <a:ext cx="457200" cy="365760"/>
           </a:xfrm>
           <a:prstGeom prst="rect">
@@ -5456,13 +5456,13 @@
       </p:sp>
       <p:sp>
         <p:nvSpPr>
-          <p:cNvPr id="13" name="Text 11"/>
-          <p:cNvSpPr/>
-          <p:nvPr/>
-        </p:nvSpPr>
-        <p:spPr>
-          <a:xfrm>
-            <a:off x="1280160" y="3383280"/>
+          <p:cNvPr id="12" name="Text 10"/>
+          <p:cNvSpPr/>
+          <p:nvPr/>
+        </p:nvSpPr>
+        <p:spPr>
+          <a:xfrm>
+            <a:off x="1280160" y="2926080"/>
             <a:ext cx="10058400" cy="365760"/>
           </a:xfrm>
           <a:prstGeom prst="rect">
@@ -5487,7 +5487,7 @@
                 <a:ea typeface="Calibri" pitchFamily="34" charset="-122"/>
                 <a:cs typeface="Calibri" pitchFamily="34" charset="-120"/>
               </a:rPr>
-              <a:t>Why is Enron excluded; isn't that convenient?</a:t>
+              <a:t>The baseline is post-hoc. Isn't that HARKing (hypothesizing after results)?</a:t>
             </a:r>
             <a:endParaRPr lang="en-US" sz="1400" dirty="0"/>
           </a:p>
@@ -5495,14 +5495,14 @@
       </p:sp>
       <p:sp>
         <p:nvSpPr>
-          <p:cNvPr id="14" name="Text 12"/>
-          <p:cNvSpPr/>
-          <p:nvPr/>
-        </p:nvSpPr>
-        <p:spPr>
-          <a:xfrm>
-            <a:off x="1280160" y="3749040"/>
-            <a:ext cx="10241280" cy="914400"/>
+          <p:cNvPr id="13" name="Text 11"/>
+          <p:cNvSpPr/>
+          <p:nvPr/>
+        </p:nvSpPr>
+        <p:spPr>
+          <a:xfrm>
+            <a:off x="1280160" y="3291840"/>
+            <a:ext cx="10241280" cy="1051560"/>
           </a:xfrm>
           <a:prstGeom prst="rect">
             <a:avLst/>
@@ -5529,7 +5529,7 @@
                 <a:ea typeface="Georgia" pitchFamily="34" charset="-122"/>
                 <a:cs typeface="Georgia" pitchFamily="34" charset="-120"/>
               </a:rPr>
-              <a:t>The pre-registered LOCO + time-controlled rule admits no training data for Enron because it was filed earliest. The exclusion is the rule biting back. I report Enron as a design failure, not a result.</a:t>
+              <a:t>The pre-registered hypothesis was about the autoencoder, and the autoencoder result is reported unchanged. The TF-IDF baseline was added after seeing the null and is reported as post-hoc. The primary null does not depend on it.</a:t>
             </a:r>
             <a:endParaRPr lang="en-US" sz="1200" dirty="0"/>
           </a:p>
@@ -5537,14 +5537,14 @@
       </p:sp>
       <p:sp>
         <p:nvSpPr>
-          <p:cNvPr id="15" name="Shape 13"/>
-          <p:cNvSpPr/>
-          <p:nvPr/>
-        </p:nvSpPr>
-        <p:spPr>
-          <a:xfrm>
-            <a:off x="640080" y="4800600"/>
-            <a:ext cx="11064240" cy="1417320"/>
+          <p:cNvPr id="14" name="Shape 12"/>
+          <p:cNvSpPr/>
+          <p:nvPr/>
+        </p:nvSpPr>
+        <p:spPr>
+          <a:xfrm>
+            <a:off x="640080" y="4480560"/>
+            <a:ext cx="11064240" cy="1554480"/>
           </a:xfrm>
           <a:prstGeom prst="rect">
             <a:avLst/>
@@ -5562,14 +5562,14 @@
       </p:sp>
       <p:sp>
         <p:nvSpPr>
-          <p:cNvPr id="16" name="Shape 14"/>
-          <p:cNvSpPr/>
-          <p:nvPr/>
-        </p:nvSpPr>
-        <p:spPr>
-          <a:xfrm>
-            <a:off x="640080" y="4800600"/>
-            <a:ext cx="36576" cy="1417320"/>
+          <p:cNvPr id="15" name="Shape 13"/>
+          <p:cNvSpPr/>
+          <p:nvPr/>
+        </p:nvSpPr>
+        <p:spPr>
+          <a:xfrm>
+            <a:off x="640080" y="4480560"/>
+            <a:ext cx="36576" cy="1554480"/>
           </a:xfrm>
           <a:prstGeom prst="rect">
             <a:avLst/>
@@ -5587,13 +5587,13 @@
       </p:sp>
       <p:sp>
         <p:nvSpPr>
-          <p:cNvPr id="17" name="Text 15"/>
-          <p:cNvSpPr/>
-          <p:nvPr/>
-        </p:nvSpPr>
-        <p:spPr>
-          <a:xfrm>
-            <a:off x="777240" y="4892040"/>
+          <p:cNvPr id="16" name="Text 14"/>
+          <p:cNvSpPr/>
+          <p:nvPr/>
+        </p:nvSpPr>
+        <p:spPr>
+          <a:xfrm>
+            <a:off x="777240" y="4572000"/>
             <a:ext cx="457200" cy="365760"/>
           </a:xfrm>
           <a:prstGeom prst="rect">
@@ -5626,13 +5626,13 @@
       </p:sp>
       <p:sp>
         <p:nvSpPr>
-          <p:cNvPr id="18" name="Text 16"/>
-          <p:cNvSpPr/>
-          <p:nvPr/>
-        </p:nvSpPr>
-        <p:spPr>
-          <a:xfrm>
-            <a:off x="1280160" y="4892040"/>
+          <p:cNvPr id="17" name="Text 15"/>
+          <p:cNvSpPr/>
+          <p:nvPr/>
+        </p:nvSpPr>
+        <p:spPr>
+          <a:xfrm>
+            <a:off x="1280160" y="4572000"/>
             <a:ext cx="10058400" cy="365760"/>
           </a:xfrm>
           <a:prstGeom prst="rect">
@@ -5665,14 +5665,14 @@
       </p:sp>
       <p:sp>
         <p:nvSpPr>
-          <p:cNvPr id="19" name="Text 17"/>
-          <p:cNvSpPr/>
-          <p:nvPr/>
-        </p:nvSpPr>
-        <p:spPr>
-          <a:xfrm>
-            <a:off x="1280160" y="5257800"/>
-            <a:ext cx="10241280" cy="914400"/>
+          <p:cNvPr id="18" name="Text 16"/>
+          <p:cNvSpPr/>
+          <p:nvPr/>
+        </p:nvSpPr>
+        <p:spPr>
+          <a:xfrm>
+            <a:off x="1280160" y="4937760"/>
+            <a:ext cx="10241280" cy="1051560"/>
           </a:xfrm>
           <a:prstGeom prst="rect">
             <a:avLst/>
@@ -5707,7 +5707,7 @@
       </p:sp>
       <p:sp>
         <p:nvSpPr>
-          <p:cNvPr id="20" name="Text 18"/>
+          <p:cNvPr id="19" name="Text 17"/>
           <p:cNvSpPr/>
           <p:nvPr/>
         </p:nvSpPr>
@@ -5746,7 +5746,7 @@
       </p:sp>
       <p:sp>
         <p:nvSpPr>
-          <p:cNvPr id="21" name="Text 19"/>
+          <p:cNvPr id="20" name="Text 18"/>
           <p:cNvSpPr/>
           <p:nvPr/>
         </p:nvSpPr>
@@ -6138,7 +6138,7 @@
                 <a:ea typeface="Calibri" pitchFamily="34" charset="-122"/>
                 <a:cs typeface="Calibri" pitchFamily="34" charset="-120"/>
               </a:rPr>
-              <a:t>Try it:  </a:t>
+              <a:t>Pipeline demo (not a fraud scanner):  </a:t>
             </a:r>
             <a:pPr indent="0" marL="0">
               <a:buNone/>

--- a/reports/canary_deck.pptx
+++ b/reports/canary_deck.pptx
@@ -508,7 +508,14 @@
           <a:p>
             <a:r>
               <a:rPr lang="en-US" dirty="0"/>
-              <a:t/>
+              <a:t>TARGET: 0:25.
+SAY:
+"I'm Arsenii Chan. The question I built this project around is a simple one: can a computer reading the words in a public company's annual report tell you which companies turned out to be committing accounting fraud? Six famous cases. One specific test. Let me show you what came back."
+(Pause. Click to slide 2.)
+STAGE NOTES:
+- Don't announce the conclusion. Don't say "honestly" or "negative result" — both pre-spoil the talk.
+- Open with the question. The audience leans forward.
+- No jargon out loud: never say "autoencoder" or "MD&amp;A" aloud. Keep them on the slide only.</a:t>
             </a:r>
             <a:endParaRPr lang="en-US" dirty="0"/>
           </a:p>
@@ -596,7 +603,15 @@
           <a:p>
             <a:r>
               <a:rPr lang="en-US" dirty="0"/>
-              <a:t/>
+              <a:t>TARGET: 0:45.
+SAY:
+"Six historical fraud cases — Enron, WorldCom, Tyco, HealthSouth, Valeant, Lehman Brothers. Each one paired against companies in the same industry, same year, that turned out to be clean.
+The model never sees the word 'fraud' during training. It just learns what a typical annual report from that industry and year looks like, and flags filings that don't fit.
+The formal question is on the slide [point at pull-quote]. The one-line answer this report defends is on the next bullet [point at it]. I'll spend the rest of the talk on the evidence."
+(Click to slide 3.)
+STAGE NOTES:
+- Don't read the pull-quote out loud. It's full of jargon and the audience can read it faster than you can speak it. Just point.
+- Same with the one-line answer. Pointing is faster than reading.</a:t>
             </a:r>
             <a:endParaRPr lang="en-US" dirty="0"/>
           </a:p>
@@ -684,7 +699,19 @@
           <a:p>
             <a:r>
               <a:rPr lang="en-US" dirty="0"/>
-              <a:t/>
+              <a:t>TARGET: 0:50. THIS IS THE MOST IMPORTANT SLIDE. SLOW DOWN.
+SAY:
+"Before I show you any number, I want to put the methodology on the table — because the methodology is what makes the result mean anything.
+Three rules I locked in BEFORE I ran the test. [point at columns]
+One: the model never sees a fraud during training. For each fraud case, the model trains on clean filings from OTHER cases. The fraud being tested is held out.
+Two: the model never sees the future. Within that training set, only filings dated on or before the fraud's filing date are eligible. The model can't be informed by language that came out AFTER the fraud was discovered.
+Three: single pass, no tuning. Architecture, hyperparameters, the test set — all written down and locked into the repo BEFORE the test ran. [point at git-tag panel:] Top right shows the actual lock — committed and tagged on May 1st, before any result came in.
+Test ran once. Whatever it said, that's the result."
+(Click to slide 4.)
+STAGE NOTES:
+- The git-tag panel is small. Say "top right shows" rather than gesturing at the podium.
+- If anyone in the room knows what pre-registration is, this is where you've already won them over.
+- Avoid jargon: don't say "LOCO" or "MiniLM" aloud. Say "leave-one-out" or "the embedding model" if pressed.</a:t>
             </a:r>
             <a:endParaRPr lang="en-US" dirty="0"/>
           </a:p>
@@ -772,7 +799,17 @@
           <a:p>
             <a:r>
               <a:rPr lang="en-US" dirty="0"/>
-              <a:t/>
+              <a:t>TARGET: 1:00.
+SAY:
+"Here's what came back. Five cases evaluable, one excluded — I'll come back to the excluded one.
+[point at Lehman row] Only Lehman lands in the top three within its peer group. Three out of thirteen. The statistical test is highly significant, BUT the effect size is small [point at warning glyph]. Both numbers matter — reporting either one alone is misleading.
+[quick scan with hand] The other four — HealthSouth, Valeant, Tyco, WorldCom — all rank at or below random expectation. The test goes the OPPOSITE direction from what we'd want. Aggregate hit rates fall at or below random.
+Now — Enron. [point at italicized row] Enron's filing date is April 2nd, 2001. Every other peer in every other case is dated later. Under the strict rule I locked in, Enron has no eligible training data.
+So I had a choice: relax the rule and rerun, or report the exclusion. I reported the exclusion. The pre-registered design was infeasible for Enron, and I didn't catch that before I locked the spec. That's a finding about pre-registration, not about fraud detection."
+(Click to slide 5.)
+STAGE NOTES:
+- Hands ON the slide. Don't quote numbers from memory — point at them on the projection.
+- The Enron exclusion is the most likely Q&amp;A target. Pre-empt it: "I had a choice — relax the rule or report the exclusion. I reported the exclusion."</a:t>
             </a:r>
             <a:endParaRPr lang="en-US" dirty="0"/>
           </a:p>
@@ -860,7 +897,22 @@
           <a:p>
             <a:r>
               <a:rPr lang="en-US" dirty="0"/>
-              <a:t/>
+              <a:t>TARGET: 1:10. THIS IS THE LEDE OF THE TALK. DON'T RUSH.
+SAY:
+"Now the part that I think actually matters.
+After the test ran, I asked myself the question every machine-learning paper should answer and most don't: would a method from before I was born produce the same result?
+So I ran one. [point at chart] TF-IDF plus truncated SVD. It's the kind of thing you could have written in 1995 from a textbook. Same training data, same statistical tests, same pipeline shape. No neural network. No transformer.
+[point at chart] On four of five cases, the 1995 method TIES the modern one. [point at Lehman bar] On Lehman — the one case the modern method got — the 1995 method gets it BETTER. By thirteen orders of magnitude on the statistical test.
+Let me say what I'm not saying and then what I am saying.
+I am NOT saying the modern method is broken, or that neural networks are unhelpful for this kind of problem.
+I AM saying that on these five cases, with the rules I locked in, the modern method did not show a measurable advantage over a method I could have run in 1995.
+If you take one thing from this talk, this is it: a sharp baseline isn't optional. A result that loses to a baseline is not evidence for the neural model."
+(Click to slide 6.)
+STAGE NOTES:
+- The "before I was born" / "1995" framing is the kill line. Practice deadpan delivery.
+- If the room is silent after, that's fine. Keep going.
+- The "I am not saying / I am saying" structure prevents the misread "the AI didn't work."
+- Don't say "TF-IDF" or "truncated SVD" aloud unless someone asks. "1995 method" is the spoken phrase.</a:t>
             </a:r>
             <a:endParaRPr lang="en-US" dirty="0"/>
           </a:p>
@@ -948,7 +1000,18 @@
           <a:p>
             <a:r>
               <a:rPr lang="en-US" dirty="0"/>
-              <a:t/>
+              <a:t>TARGET: 0:40. SPEED.
+SAY:
+"Three questions I expect — quick answers so we have time for whatever else you actually want to ask.
+Did you check a trivial baseline? Yes. Same bottleneck dimension, same training data. The 1995 baseline matches or beats the modern method on every case. The honest claim is that the modern method adds nothing here. Slide 5.
+The baseline is post-hoc — isn't that HARKing? The pre-registered hypothesis was about the modern method, and that result is reported unchanged. The 1995 baseline was added after seeing the null and is reported as post-hoc. The primary null doesn't depend on it.
+Could the embedding model have memorized 'Lehman' or 'Repo 105'? I tested that. Masked 93 such mentions in Lehman's filing with a placeholder, re-scored. Lehman's rank held at 3/13. Exact-token name leakage doesn't explain the rank."
+(Click to slide 7.)
+STAGE NOTES:
+- Three Q&amp;As live on slide. The Enron exclusion question is best handled in actual Q&amp;A if asked (already covered on slide 4).
+- Don't try to deliver all three under pressure if you're running long. Two minimum.
+- If asked about supervised classifier: "At six fraud examples a supervised classifier overfits trivially. Future work."
+- If asked about the parser: "Five failures are pre-2001 peer filings. All six fraud filings parsed at 100%."</a:t>
             </a:r>
             <a:endParaRPr lang="en-US" dirty="0"/>
           </a:p>
@@ -1036,7 +1099,30 @@
           <a:p>
             <a:r>
               <a:rPr lang="en-US" dirty="0"/>
-              <a:t/>
+              <a:t>TARGET: 0:45. LAND THE URLs CLEANLY. PAUSE ONE BEAT AFTER "THANKS."
+SAY:
+"Two takeaways.
+What survived: the pre-registration. The contract held. I didn't iterate the model, I didn't redefine 'clean,' I didn't retreat from the Enron exclusion when the result was uncomfortable.
+What failed: the modern method beyond the 1990s baseline. A result that loses to a baseline is not evidence for the neural model.
+The next experiment is on the slide — same model, same filings, but compare the company against ITSELF across years instead of against peers. That's the falsifiable next step this study couldn't run.
+[point at footer] Try the pipeline at the link below — paste any 10-K, see how it scores against the five fraud cases. Code is on GitHub. The frozen-spec git tag is in the repo.
+Thanks. Happy to take questions."
+(End. Open Q&amp;A.)
+STAGE NOTES:
+- Pause for ONE beat after "Thanks." Don't run into the next sentence.
+- Look UP at the audience for the URL line. That's the call-to-action.
+- If you've delivered slides 1-7 cleanly, your face should look calm.
+Q&amp;A FALLBACK LINE if you don't know an answer:
+"That's a real gap I haven't characterized. Let me follow up after the talk."
+Don't fake numbers under pressure. "I don't know" is graduate-school behavior, not weakness.
+TIME TARGETS:
+Slide 1: 0:25  |  Slide 2: 0:45  |  Slide 3: 0:50  |  Slide 4: 1:00
+Slide 5: 1:10  |  Slide 6: 0:40  |  Slide 7: 0:45
+Total target: 5:35.  Hard ceiling: 6:55.  Buffer: 1:25.
+IF RUNNING LONG, CUTS:
+- Drop "I am not saying / I am saying" on Slide 5 (-15s)
+- Skip third Q&amp;A on Slide 6 (-15s)
+- Skip next-experiment line on Slide 7 (-10s)</a:t>
             </a:r>
             <a:endParaRPr lang="en-US" dirty="0"/>
           </a:p>

--- a/reports/canary_deck.pptx
+++ b/reports/canary_deck.pptx
@@ -513,7 +513,7 @@
 "I'm Arsenii Chan. The question I built this project around is a simple one: can a computer reading the words in a public company's annual report tell you which companies turned out to be committing accounting fraud? Six famous cases. One specific test. Let me show you what came back."
 (Pause. Click to slide 2.)
 STAGE NOTES:
-- Don't announce the conclusion. Don't say "honestly" or "negative result" — both pre-spoil the talk.
+- Don't announce the conclusion. Don't say "honestly" or "negative result"; both pre-spoil the talk.
 - Open with the question. The audience leans forward.
 - No jargon out loud: never say "autoencoder" or "MD&amp;A" aloud. Keep them on the slide only.</a:t>
             </a:r>
@@ -605,8 +605,8 @@
               <a:rPr lang="en-US" dirty="0"/>
               <a:t>TARGET: 0:45.
 SAY:
-"Six historical fraud cases — Enron, WorldCom, Tyco, HealthSouth, Valeant, Lehman Brothers. Each one paired against companies in the same industry, same year, that turned out to be clean.
-The model never sees the word 'fraud' during training. It just learns what a typical annual report from that industry and year looks like, and flags filings that don't fit.
+"Six historical fraud cases: Enron, WorldCom, Tyco, HealthSouth, Valeant, Lehman Brothers. Each one paired against companies in the same industry, same year, that turned out to be clean.
+The model never sees the word 'fraud' during training. It just learns what a typical annual report from that industry and year looks like, and ranks the ones that look most unusual against their peers.
 The formal question is on the slide [point at pull-quote]. The one-line answer this report defends is on the next bullet [point at it]. I'll spend the rest of the talk on the evidence."
 (Click to slide 3.)
 STAGE NOTES:
@@ -701,11 +701,11 @@
               <a:rPr lang="en-US" dirty="0"/>
               <a:t>TARGET: 0:50. THIS IS THE MOST IMPORTANT SLIDE. SLOW DOWN.
 SAY:
-"Before I show you any number, I want to put the methodology on the table — because the methodology is what makes the result mean anything.
+"Before I show you any number, I want to put the methodology on the table. The methodology is what makes the result mean anything.
 Three rules I locked in BEFORE I ran the test. [point at columns]
 One: the model never sees a fraud during training. For each fraud case, the model trains on clean filings from OTHER cases. The fraud being tested is held out.
 Two: the model never sees the future. Within that training set, only filings dated on or before the fraud's filing date are eligible. The model can't be informed by language that came out AFTER the fraud was discovered.
-Three: single pass, no tuning. Architecture, hyperparameters, the test set — all written down and locked into the repo BEFORE the test ran. [point at git-tag panel:] Top right shows the actual lock — committed and tagged on May 1st, before any result came in.
+Three: single pass, no tuning. Architecture, hyperparameters, the test set: all written down and locked into the repo BEFORE the test ran. [point at git-tag panel:] Top right shows the actual lock, committed and tagged on May 1st, before any result came in.
 Test ran once. Whatever it said, that's the result."
 (Click to slide 4.)
 STAGE NOTES:
@@ -801,15 +801,15 @@
               <a:rPr lang="en-US" dirty="0"/>
               <a:t>TARGET: 1:00.
 SAY:
-"Here's what came back. Five cases evaluable, one excluded — I'll come back to the excluded one.
-[point at Lehman row] Only Lehman lands in the top three within its peer group. Three out of thirteen. The statistical test is highly significant, BUT the effect size is small [point at warning glyph]. Both numbers matter — reporting either one alone is misleading.
-[quick scan with hand] The other four — HealthSouth, Valeant, Tyco, WorldCom — all rank at or below random expectation. The test goes the OPPOSITE direction from what we'd want. Aggregate hit rates fall at or below random.
-Now — Enron. [point at italicized row] Enron's filing date is April 2nd, 2001. Every other peer in every other case is dated later. Under the strict rule I locked in, Enron has no eligible training data.
+"Here's what came back. Five cases evaluable, one excluded; I'll come back to the excluded one.
+[point at Lehman row] Only Lehman lands in the top three within its peer group. Three out of thirteen. The statistical test is highly significant, BUT the effect size is small [point at warning glyph]. Both numbers matter; reporting either one alone is misleading.
+[quick scan with hand] The other four (HealthSouth, Valeant, Tyco, WorldCom) all rank no better than random expectation. The test goes the OPPOSITE direction from what we'd want. Aggregate hit rates fall at or below random.
+Now, Enron. [point at italicized row] Enron's filing date is April 2nd, 2001. Every other peer in every other case is dated later. Under the strict rule I locked in, Enron has no eligible training data.
 So I had a choice: relax the rule and rerun, or report the exclusion. I reported the exclusion. The pre-registered design was infeasible for Enron, and I didn't catch that before I locked the spec. That's a finding about pre-registration, not about fraud detection."
 (Click to slide 5.)
 STAGE NOTES:
-- Hands ON the slide. Don't quote numbers from memory — point at them on the projection.
-- The Enron exclusion is the most likely Q&amp;A target. Pre-empt it: "I had a choice — relax the rule or report the exclusion. I reported the exclusion."</a:t>
+- Hands ON the slide. Don't quote numbers from memory; point at them on the projection.
+- The Enron exclusion is the most likely Q&amp;A target. Pre-empt it: "I had a choice: relax the rule or report the exclusion. I reported the exclusion."</a:t>
             </a:r>
             <a:endParaRPr lang="en-US" dirty="0"/>
           </a:p>
@@ -901,8 +901,8 @@
 SAY:
 "Now the part that I think actually matters.
 After the test ran, I asked myself the question every machine-learning paper should answer and most don't: would a method from before I was born produce the same result?
-So I ran one. [point at chart] TF-IDF plus truncated SVD. It's the kind of thing you could have written in 1995 from a textbook. Same training data, same statistical tests, same pipeline shape. No neural network. No transformer.
-[point at chart] On four of five cases, the 1995 method TIES the modern one. [point at Lehman bar] On Lehman — the one case the modern method got — the 1995 method gets it BETTER. By thirteen orders of magnitude on the statistical test.
+So I ran one. [point at chart] A simple word-counting method with the same compression step. The kind of thing you could have written in 1995 from a textbook. Same training data, same statistical tests, same pipeline shape. No neural network. No transformer.
+[point at chart] On four of five cases, the 1995 method TIES the modern one. [point at Lehman bar] On Lehman, the one case the modern method got, the 1995 method gets it BETTER. The p-value is many orders of magnitude smaller.
 Let me say what I'm not saying and then what I am saying.
 I am NOT saying the modern method is broken, or that neural networks are unhelpful for this kind of problem.
 I AM saying that on these five cases, with the rules I locked in, the modern method did not show a measurable advantage over a method I could have run in 1995.
@@ -912,7 +912,7 @@
 - The "before I was born" / "1995" framing is the kill line. Practice deadpan delivery.
 - If the room is silent after, that's fine. Keep going.
 - The "I am not saying / I am saying" structure prevents the misread "the AI didn't work."
-- Don't say "TF-IDF" or "truncated SVD" aloud unless someone asks. "1995 method" is the spoken phrase.</a:t>
+- Don't say "TF-IDF" or "truncated SVD" aloud unless someone asks. "1995 method" or "simple word-counting method" is the spoken phrase. The slide and chart already show the technical names.</a:t>
             </a:r>
             <a:endParaRPr lang="en-US" dirty="0"/>
           </a:p>
@@ -1002,10 +1002,10 @@
               <a:rPr lang="en-US" dirty="0"/>
               <a:t>TARGET: 0:40. SPEED.
 SAY:
-"Three questions I expect — quick answers so we have time for whatever else you actually want to ask.
-Did you check a trivial baseline? Yes. Same bottleneck dimension, same training data. The 1995 baseline matches or beats the modern method on every case. The honest claim is that the modern method adds nothing here. Slide 5.
-The baseline is post-hoc — isn't that HARKing? The pre-registered hypothesis was about the modern method, and that result is reported unchanged. The 1995 baseline was added after seeing the null and is reported as post-hoc. The primary null doesn't depend on it.
-Could the embedding model have memorized 'Lehman' or 'Repo 105'? I tested that. Masked 93 such mentions in Lehman's filing with a placeholder, re-scored. Lehman's rank held at 3/13. Exact-token name leakage doesn't explain the rank."
+"Three questions I expect, with quick answers so we have time for whatever else you actually want to ask.
+Did you check a trivial baseline? Yes. Same compression dimension, same training data. The 1995 baseline matches or beats the modern method on every case. The honest claim is that the modern method adds nothing here. Slide 5.
+The baseline is post-hoc, isn't that HARKing? The pre-registered hypothesis was about the modern method, and that result is reported unchanged. The 1995 baseline was added after seeing the null and is reported as post-hoc. The primary null doesn't depend on it.
+Could the embedding model have memorized 'Lehman' or 'Repo 105'? I tested that. I masked 93 such mentions in Lehman's filing with a placeholder and re-scored. Lehman's rank held at 3 out of 13. Exact-token name leakage doesn't explain the rank."
 (Click to slide 7.)
 STAGE NOTES:
 - Three Q&amp;As live on slide. The Enron exclusion question is best handled in actual Q&amp;A if asked (already covered on slide 4).
@@ -1102,16 +1102,16 @@
               <a:t>TARGET: 0:45. LAND THE URLs CLEANLY. PAUSE ONE BEAT AFTER "THANKS."
 SAY:
 "Two takeaways.
-What survived: the pre-registration. The contract held. I didn't iterate the model, I didn't redefine 'clean,' I didn't retreat from the Enron exclusion when the result was uncomfortable.
+What survived: pre-registration. The contract held. I didn't iterate the model, I didn't redefine 'clean,' I didn't retreat from the Enron exclusion when the result was uncomfortable.
 What failed: the modern method beyond the 1990s baseline. A result that loses to a baseline is not evidence for the neural model.
-The next experiment is on the slide — same model, same filings, but compare the company against ITSELF across years instead of against peers. That's the falsifiable next step this study couldn't run.
-[point at footer] Try the pipeline at the link below — paste any 10-K, see how it scores against the five fraud cases. Code is on GitHub. The frozen-spec git tag is in the repo.
+The next experiment is on the slide: same model, same filings, but compare the company against ITSELF across years instead of against peers. That's the falsifiable next step this study couldn't run.
+[point at footer] Try the pipeline at the link below: paste any annual report, see how it scores against the five fraud cases. Code is on GitHub. The frozen-spec git tag is in the repo.
 Thanks. Happy to take questions."
 (End. Open Q&amp;A.)
 STAGE NOTES:
 - Pause for ONE beat after "Thanks." Don't run into the next sentence.
 - Look UP at the audience for the URL line. That's the call-to-action.
-- If you've delivered slides 1-7 cleanly, your face should look calm.
+- If you've delivered slides 1 through 7 cleanly, your face should look calm.
 Q&amp;A FALLBACK LINE if you don't know an answer:
 "That's a real gap I haven't characterized. Let me follow up after the talk."
 Don't fake numbers under pressure. "I don't know" is graduate-school behavior, not weakness.
@@ -1120,9 +1120,9 @@
 Slide 5: 1:10  |  Slide 6: 0:40  |  Slide 7: 0:45
 Total target: 5:35.  Hard ceiling: 6:55.  Buffer: 1:25.
 IF RUNNING LONG, CUTS:
-- Drop "I am not saying / I am saying" on Slide 5 (-15s)
-- Skip third Q&amp;A on Slide 6 (-15s)
-- Skip next-experiment line on Slide 7 (-10s)</a:t>
+- Drop "I am not saying / I am saying" on Slide 5 (saves 15 seconds)
+- Skip third Q&amp;A on Slide 6 (saves 15 seconds)
+- Skip next-experiment line on Slide 7 (saves 10 seconds)</a:t>
             </a:r>
             <a:endParaRPr lang="en-US" dirty="0"/>
           </a:p>

--- a/reports/canary_deck.pptx
+++ b/reports/canary_deck.pptx
@@ -3440,7 +3440,7 @@
                           <a:ea typeface="Calibri" pitchFamily="34" charset="-122"/>
                           <a:cs typeface="Calibri" pitchFamily="34" charset="-120"/>
                         </a:rPr>
-                        <a:t>n = 1, baseline beats AE</a:t>
+                        <a:t>n = 1, baseline beats autoencoder</a:t>
                       </a:r>
                       <a:endParaRPr lang="en-US" sz="1300" dirty="0">
                         <a:latin typeface="Calibri" charset="0"/>
@@ -5101,7 +5101,7 @@
                 <a:ea typeface="Georgia" pitchFamily="34" charset="-122"/>
                 <a:cs typeface="Georgia" pitchFamily="34" charset="-120"/>
               </a:rPr>
-              <a:t>Lehman: AE rank 3/13, TF-IDF rank 1/13. Aggregate hit@5 is 0.40 (TF-IDF) vs 0.20 (autoencoder). Mann-Whitney p is much smaller for TF-IDF on Lehman; exact values are in the report. The pre-registered model does not beat the trivial baseline.</a:t>
+              <a:t>How to read the chart: shorter bar = lower rank number = better detection (rank 1 is most anomalous). Lehman: autoencoder rank 3/13, TF-IDF rank 1/13. Aggregate hit@5 is 0.40 (TF-IDF) vs 0.20 (autoencoder). The pre-registered model does not beat the trivial baseline.</a:t>
             </a:r>
             <a:endParaRPr lang="en-US" sz="1300" dirty="0"/>
           </a:p>

--- a/reports/canary_deck.pptx
+++ b/reports/canary_deck.pptx
@@ -1503,8 +1503,8 @@
         </p:nvSpPr>
         <p:spPr>
           <a:xfrm>
-            <a:off x="640080" y="1280160"/>
-            <a:ext cx="10972800" cy="548640"/>
+            <a:off x="640080" y="502920"/>
+            <a:ext cx="10972800" cy="365760"/>
           </a:xfrm>
           <a:prstGeom prst="rect">
             <a:avLst/>
@@ -1542,8 +1542,8 @@
         </p:nvSpPr>
         <p:spPr>
           <a:xfrm>
-            <a:off x="640080" y="1920240"/>
-            <a:ext cx="10972800" cy="1920240"/>
+            <a:off x="640080" y="1188720"/>
+            <a:ext cx="10972800" cy="1645920"/>
           </a:xfrm>
           <a:prstGeom prst="rect">
             <a:avLst/>
@@ -1562,7 +1562,7 @@
               <a:buNone/>
             </a:pPr>
             <a:r>
-              <a:rPr lang="en-US" sz="3600" dirty="0">
+              <a:rPr lang="en-US" sz="3000" dirty="0">
                 <a:solidFill>
                   <a:srgbClr val="FFFFFF"/>
                 </a:solidFill>
@@ -1570,9 +1570,9 @@
                 <a:ea typeface="Georgia" pitchFamily="34" charset="-122"/>
                 <a:cs typeface="Georgia" pitchFamily="34" charset="-120"/>
               </a:rPr>
-              <a:t>Can a computer reading the words in a 10-K</a:t>
-            </a:r>
-            <a:endParaRPr lang="en-US" sz="3600" dirty="0"/>
+              <a:t>Can a computer reading a company's annual report</a:t>
+            </a:r>
+            <a:endParaRPr lang="en-US" sz="3000" dirty="0"/>
           </a:p>
           <a:p>
             <a:pPr indent="0" marL="0">
@@ -1582,7 +1582,7 @@
               <a:buNone/>
             </a:pPr>
             <a:r>
-              <a:rPr lang="en-US" sz="3600" dirty="0">
+              <a:rPr lang="en-US" sz="3000" dirty="0">
                 <a:solidFill>
                   <a:srgbClr val="FFFFFF"/>
                 </a:solidFill>
@@ -1590,9 +1590,9 @@
                 <a:ea typeface="Georgia" pitchFamily="34" charset="-122"/>
                 <a:cs typeface="Georgia" pitchFamily="34" charset="-120"/>
               </a:rPr>
-              <a:t>rank known fraud filings as anomalous?</a:t>
-            </a:r>
-            <a:endParaRPr lang="en-US" sz="3600" dirty="0"/>
+              <a:t>tell which ones turned out to be committing accounting fraud?</a:t>
+            </a:r>
+            <a:endParaRPr lang="en-US" sz="3000" dirty="0"/>
           </a:p>
         </p:txBody>
       </p:sp>
@@ -1604,7 +1604,7 @@
         </p:nvSpPr>
         <p:spPr>
           <a:xfrm>
-            <a:off x="640080" y="4114800"/>
+            <a:off x="640080" y="3108960"/>
             <a:ext cx="1097280" cy="45720"/>
           </a:xfrm>
           <a:prstGeom prst="rect">
@@ -1629,8 +1629,8 @@
         </p:nvSpPr>
         <p:spPr>
           <a:xfrm>
-            <a:off x="640080" y="4297680"/>
-            <a:ext cx="10972800" cy="457200"/>
+            <a:off x="640080" y="3291840"/>
+            <a:ext cx="10972800" cy="365760"/>
           </a:xfrm>
           <a:prstGeom prst="rect">
             <a:avLst/>
@@ -1646,7 +1646,7 @@
               <a:buNone/>
             </a:pPr>
             <a:r>
-              <a:rPr lang="en-US" sz="1800" i="1" dirty="0">
+              <a:rPr lang="en-US" sz="1600" i="1" dirty="0">
                 <a:solidFill>
                   <a:srgbClr val="CFD8E8"/>
                 </a:solidFill>
@@ -1654,9 +1654,9 @@
                 <a:ea typeface="Georgia" pitchFamily="34" charset="-122"/>
                 <a:cs typeface="Georgia" pitchFamily="34" charset="-120"/>
               </a:rPr>
-              <a:t>A pre-registered single-signal novelty study on SEC 10-K MD&amp;A text.</a:t>
-            </a:r>
-            <a:endParaRPr lang="en-US" sz="1800" dirty="0"/>
+              <a:t>A pre-registered novelty study on SEC 10-K filings.</a:t>
+            </a:r>
+            <a:endParaRPr lang="en-US" sz="1600" dirty="0"/>
           </a:p>
         </p:txBody>
       </p:sp>
@@ -1668,8 +1668,8 @@
         </p:nvSpPr>
         <p:spPr>
           <a:xfrm>
-            <a:off x="640080" y="4800600"/>
-            <a:ext cx="10972800" cy="640080"/>
+            <a:off x="640080" y="4023360"/>
+            <a:ext cx="10972800" cy="411480"/>
           </a:xfrm>
           <a:prstGeom prst="rect">
             <a:avLst/>
@@ -1682,90 +1682,270 @@
           <a:lstStyle/>
           <a:p>
             <a:pPr indent="0" marL="0">
-              <a:lnSpc>
-                <a:spcPct val="125000"/>
-              </a:lnSpc>
-              <a:buNone/>
-            </a:pPr>
-            <a:r>
-              <a:rPr lang="en-US" sz="1400" i="1" dirty="0">
+              <a:buNone/>
+            </a:pPr>
+            <a:r>
+              <a:rPr lang="en-US" sz="1500" b="1" dirty="0">
                 <a:solidFill>
                   <a:srgbClr val="D4A017"/>
-                </a:solidFill>
-                <a:latin typeface="Georgia" pitchFamily="34" charset="0"/>
-                <a:ea typeface="Georgia" pitchFamily="34" charset="-122"/>
-                <a:cs typeface="Georgia" pitchFamily="34" charset="-120"/>
-              </a:rPr>
-              <a:t>Primary contribution: a pre-registered null result plus a baseline that beat the autoencoder.</a:t>
-            </a:r>
-            <a:endParaRPr lang="en-US" sz="1400" dirty="0"/>
-          </a:p>
-        </p:txBody>
-      </p:sp>
-      <p:sp>
-        <p:nvSpPr>
-          <p:cNvPr id="7" name="Text 5"/>
-          <p:cNvSpPr/>
-          <p:nvPr/>
-        </p:nvSpPr>
-        <p:spPr>
-          <a:xfrm>
-            <a:off x="640080" y="5760720"/>
-            <a:ext cx="10972800" cy="365760"/>
-          </a:xfrm>
-          <a:prstGeom prst="rect">
-            <a:avLst/>
-          </a:prstGeom>
-          <a:noFill/>
-          <a:ln/>
-        </p:spPr>
-        <p:txBody>
-          <a:bodyPr wrap="square" rtlCol="0" anchor="ctr"/>
-          <a:lstStyle/>
-          <a:p>
-            <a:pPr indent="0" marL="0">
-              <a:buNone/>
-            </a:pPr>
-            <a:r>
-              <a:rPr lang="en-US" sz="1400" b="1" dirty="0">
-                <a:solidFill>
-                  <a:srgbClr val="FFFFFF"/>
                 </a:solidFill>
                 <a:latin typeface="Calibri" pitchFamily="34" charset="0"/>
                 <a:ea typeface="Calibri" pitchFamily="34" charset="-122"/>
                 <a:cs typeface="Calibri" pitchFamily="34" charset="-120"/>
               </a:rPr>
-              <a:t>Arsenii Chan</a:t>
-            </a:r>
-            <a:pPr indent="0" marL="0">
-              <a:buNone/>
-            </a:pPr>
-            <a:r>
-              <a:rPr lang="en-US" sz="1400" dirty="0">
-                <a:solidFill>
-                  <a:srgbClr val="CFD8E8"/>
+              <a:t>Trained: </a:t>
+            </a:r>
+            <a:pPr indent="0" marL="0">
+              <a:buNone/>
+            </a:pPr>
+            <a:r>
+              <a:rPr lang="en-US" sz="1500" dirty="0">
+                <a:solidFill>
+                  <a:srgbClr val="FFFFFF"/>
                 </a:solidFill>
                 <a:latin typeface="Calibri" pitchFamily="34" charset="0"/>
                 <a:ea typeface="Calibri" pitchFamily="34" charset="-122"/>
                 <a:cs typeface="Calibri" pitchFamily="34" charset="-120"/>
               </a:rPr>
-              <a:t>   ·   CSC 44800 Artificial Intelligence</a:t>
-            </a:r>
-            <a:pPr indent="0" marL="0">
-              <a:buNone/>
-            </a:pPr>
-            <a:r>
-              <a:rPr lang="en-US" sz="1400" dirty="0">
-                <a:solidFill>
-                  <a:srgbClr val="CFD8E8"/>
+              <a:t>five small autoencoders in PyTorch, one per held-out fraud cohort.</a:t>
+            </a:r>
+            <a:endParaRPr lang="en-US" sz="1500" dirty="0"/>
+          </a:p>
+        </p:txBody>
+      </p:sp>
+      <p:sp>
+        <p:nvSpPr>
+          <p:cNvPr id="7" name="Text 5"/>
+          <p:cNvSpPr/>
+          <p:nvPr/>
+        </p:nvSpPr>
+        <p:spPr>
+          <a:xfrm>
+            <a:off x="640080" y="4434840"/>
+            <a:ext cx="10972800" cy="411480"/>
+          </a:xfrm>
+          <a:prstGeom prst="rect">
+            <a:avLst/>
+          </a:prstGeom>
+          <a:noFill/>
+          <a:ln/>
+        </p:spPr>
+        <p:txBody>
+          <a:bodyPr wrap="square" rtlCol="0" anchor="ctr"/>
+          <a:lstStyle/>
+          <a:p>
+            <a:pPr indent="0" marL="0">
+              <a:buNone/>
+            </a:pPr>
+            <a:r>
+              <a:rPr lang="en-US" sz="1500" b="1" dirty="0">
+                <a:solidFill>
+                  <a:srgbClr val="D4A017"/>
                 </a:solidFill>
                 <a:latin typeface="Calibri" pitchFamily="34" charset="0"/>
                 <a:ea typeface="Calibri" pitchFamily="34" charset="-122"/>
                 <a:cs typeface="Calibri" pitchFamily="34" charset="-120"/>
               </a:rPr>
+              <a:t>Reused: </a:t>
+            </a:r>
+            <a:pPr indent="0" marL="0">
+              <a:buNone/>
+            </a:pPr>
+            <a:r>
+              <a:rPr lang="en-US" sz="1500" dirty="0">
+                <a:solidFill>
+                  <a:srgbClr val="FFFFFF"/>
+                </a:solidFill>
+                <a:latin typeface="Calibri" pitchFamily="34" charset="0"/>
+                <a:ea typeface="Calibri" pitchFamily="34" charset="-122"/>
+                <a:cs typeface="Calibri" pitchFamily="34" charset="-120"/>
+              </a:rPr>
+              <a:t>a pretrained MiniLM transformer, frozen, as a sentence-to-vector encoder.</a:t>
+            </a:r>
+            <a:endParaRPr lang="en-US" sz="1500" dirty="0"/>
+          </a:p>
+        </p:txBody>
+      </p:sp>
+      <p:sp>
+        <p:nvSpPr>
+          <p:cNvPr id="8" name="Text 6"/>
+          <p:cNvSpPr/>
+          <p:nvPr/>
+        </p:nvSpPr>
+        <p:spPr>
+          <a:xfrm>
+            <a:off x="640080" y="4846320"/>
+            <a:ext cx="10972800" cy="411480"/>
+          </a:xfrm>
+          <a:prstGeom prst="rect">
+            <a:avLst/>
+          </a:prstGeom>
+          <a:noFill/>
+          <a:ln/>
+        </p:spPr>
+        <p:txBody>
+          <a:bodyPr wrap="square" rtlCol="0" anchor="ctr"/>
+          <a:lstStyle/>
+          <a:p>
+            <a:pPr indent="0" marL="0">
+              <a:buNone/>
+            </a:pPr>
+            <a:r>
+              <a:rPr lang="en-US" sz="1500" b="1" dirty="0">
+                <a:solidFill>
+                  <a:srgbClr val="D4A017"/>
+                </a:solidFill>
+                <a:latin typeface="Calibri" pitchFamily="34" charset="0"/>
+                <a:ea typeface="Calibri" pitchFamily="34" charset="-122"/>
+                <a:cs typeface="Calibri" pitchFamily="34" charset="-120"/>
+              </a:rPr>
+              <a:t>Tested: </a:t>
+            </a:r>
+            <a:pPr indent="0" marL="0">
+              <a:buNone/>
+            </a:pPr>
+            <a:r>
+              <a:rPr lang="en-US" sz="1500" dirty="0">
+                <a:solidFill>
+                  <a:srgbClr val="FFFFFF"/>
+                </a:solidFill>
+                <a:latin typeface="Calibri" pitchFamily="34" charset="0"/>
+                <a:ea typeface="Calibri" pitchFamily="34" charset="-122"/>
+                <a:cs typeface="Calibri" pitchFamily="34" charset="-120"/>
+              </a:rPr>
+              <a:t>six historical accounting frauds; methodology locked in git before any number was looked at.</a:t>
+            </a:r>
+            <a:endParaRPr lang="en-US" sz="1500" dirty="0"/>
+          </a:p>
+        </p:txBody>
+      </p:sp>
+      <p:sp>
+        <p:nvSpPr>
+          <p:cNvPr id="9" name="Text 7"/>
+          <p:cNvSpPr/>
+          <p:nvPr/>
+        </p:nvSpPr>
+        <p:spPr>
+          <a:xfrm>
+            <a:off x="640080" y="5943600"/>
+            <a:ext cx="8229600" cy="365760"/>
+          </a:xfrm>
+          <a:prstGeom prst="rect">
+            <a:avLst/>
+          </a:prstGeom>
+          <a:noFill/>
+          <a:ln/>
+        </p:spPr>
+        <p:txBody>
+          <a:bodyPr wrap="square" rtlCol="0" anchor="ctr"/>
+          <a:lstStyle/>
+          <a:p>
+            <a:pPr indent="0" marL="0">
+              <a:buNone/>
+            </a:pPr>
+            <a:r>
+              <a:rPr lang="en-US" sz="1400" b="1" dirty="0">
+                <a:solidFill>
+                  <a:srgbClr val="FFFFFF"/>
+                </a:solidFill>
+                <a:latin typeface="Calibri" pitchFamily="34" charset="0"/>
+                <a:ea typeface="Calibri" pitchFamily="34" charset="-122"/>
+                <a:cs typeface="Calibri" pitchFamily="34" charset="-120"/>
+              </a:rPr>
+              <a:t>Arsenii Chan</a:t>
+            </a:r>
+            <a:pPr indent="0" marL="0">
+              <a:buNone/>
+            </a:pPr>
+            <a:r>
+              <a:rPr lang="en-US" sz="1400" dirty="0">
+                <a:solidFill>
+                  <a:srgbClr val="CFD8E8"/>
+                </a:solidFill>
+                <a:latin typeface="Calibri" pitchFamily="34" charset="0"/>
+                <a:ea typeface="Calibri" pitchFamily="34" charset="-122"/>
+                <a:cs typeface="Calibri" pitchFamily="34" charset="-120"/>
+              </a:rPr>
+              <a:t>   ·   CSC 44800 Artificial Intelligence</a:t>
+            </a:r>
+            <a:pPr indent="0" marL="0">
+              <a:buNone/>
+            </a:pPr>
+            <a:r>
+              <a:rPr lang="en-US" sz="1400" dirty="0">
+                <a:solidFill>
+                  <a:srgbClr val="CFD8E8"/>
+                </a:solidFill>
+                <a:latin typeface="Calibri" pitchFamily="34" charset="0"/>
+                <a:ea typeface="Calibri" pitchFamily="34" charset="-122"/>
+                <a:cs typeface="Calibri" pitchFamily="34" charset="-120"/>
+              </a:rPr>
               <a:t>   ·   Spring 2026 · CCNY</a:t>
             </a:r>
             <a:endParaRPr lang="en-US" sz="1400" dirty="0"/>
+          </a:p>
+        </p:txBody>
+      </p:sp>
+      <p:pic>
+        <p:nvPicPr>
+          <p:cNvPr id="10" name="Image 0" descr="/Users/arseniichan/Documents/Claude/Projects/CSC448/canary/reports/figures/qr_demo.png">    </p:cNvPr>
+          <p:cNvPicPr>
+            <a:picLocks noChangeAspect="1"/>
+          </p:cNvPicPr>
+          <p:nvPr/>
+        </p:nvPicPr>
+        <p:blipFill>
+          <a:blip r:embed="rId1"/>
+          <a:stretch>
+            <a:fillRect/>
+          </a:stretch>
+        </p:blipFill>
+        <p:spPr>
+          <a:xfrm>
+            <a:off x="10424160" y="5212080"/>
+            <a:ext cx="1188720" cy="1188720"/>
+          </a:xfrm>
+          <a:prstGeom prst="rect">
+            <a:avLst/>
+          </a:prstGeom>
+        </p:spPr>
+      </p:pic>
+      <p:sp>
+        <p:nvSpPr>
+          <p:cNvPr id="11" name="Text 8"/>
+          <p:cNvSpPr/>
+          <p:nvPr/>
+        </p:nvSpPr>
+        <p:spPr>
+          <a:xfrm>
+            <a:off x="10241280" y="6400800"/>
+            <a:ext cx="1554480" cy="228600"/>
+          </a:xfrm>
+          <a:prstGeom prst="rect">
+            <a:avLst/>
+          </a:prstGeom>
+          <a:noFill/>
+          <a:ln/>
+        </p:spPr>
+        <p:txBody>
+          <a:bodyPr wrap="square" rtlCol="0" anchor="ctr"/>
+          <a:lstStyle/>
+          <a:p>
+            <a:pPr algn="ctr" indent="0" marL="0">
+              <a:buNone/>
+            </a:pPr>
+            <a:r>
+              <a:rPr lang="en-US" sz="900" i="1" dirty="0">
+                <a:solidFill>
+                  <a:srgbClr val="CFD8E8"/>
+                </a:solidFill>
+                <a:latin typeface="Calibri" pitchFamily="34" charset="0"/>
+                <a:ea typeface="Calibri" pitchFamily="34" charset="-122"/>
+                <a:cs typeface="Calibri" pitchFamily="34" charset="-120"/>
+              </a:rPr>
+              <a:t>scan to try</a:t>
+            </a:r>
+            <a:endParaRPr lang="en-US" sz="900" dirty="0"/>
           </a:p>
         </p:txBody>
       </p:sp>
@@ -5974,7 +6154,7 @@
         <p:spPr>
           <a:xfrm>
             <a:off x="640080" y="1280160"/>
-            <a:ext cx="10972800" cy="640080"/>
+            <a:ext cx="9601200" cy="640080"/>
           </a:xfrm>
           <a:prstGeom prst="rect">
             <a:avLst/>
@@ -5990,7 +6170,7 @@
               <a:buNone/>
             </a:pPr>
             <a:r>
-              <a:rPr lang="en-US" sz="3200" b="1" dirty="0">
+              <a:rPr lang="en-US" sz="2800" b="1" dirty="0">
                 <a:solidFill>
                   <a:srgbClr val="FFFFFF"/>
                 </a:solidFill>
@@ -6000,7 +6180,7 @@
               </a:rPr>
               <a:t>What survived: pre-registration.</a:t>
             </a:r>
-            <a:endParaRPr lang="en-US" sz="3200" dirty="0"/>
+            <a:endParaRPr lang="en-US" sz="2800" dirty="0"/>
           </a:p>
         </p:txBody>
       </p:sp>
@@ -6012,8 +6192,8 @@
         </p:nvSpPr>
         <p:spPr>
           <a:xfrm>
-            <a:off x="640080" y="1965960"/>
-            <a:ext cx="10972800" cy="640080"/>
+            <a:off x="640080" y="1920240"/>
+            <a:ext cx="9601200" cy="640080"/>
           </a:xfrm>
           <a:prstGeom prst="rect">
             <a:avLst/>
@@ -6029,7 +6209,7 @@
               <a:buNone/>
             </a:pPr>
             <a:r>
-              <a:rPr lang="en-US" sz="3200" b="1" dirty="0">
+              <a:rPr lang="en-US" sz="2800" b="1" dirty="0">
                 <a:solidFill>
                   <a:srgbClr val="FFFFFF"/>
                 </a:solidFill>
@@ -6039,7 +6219,7 @@
               </a:rPr>
               <a:t>What failed: the autoencoder beyond the TF-IDF baseline.</a:t>
             </a:r>
-            <a:endParaRPr lang="en-US" sz="3200" dirty="0"/>
+            <a:endParaRPr lang="en-US" sz="2800" dirty="0"/>
           </a:p>
         </p:txBody>
       </p:sp>
@@ -6052,7 +6232,7 @@
         <p:spPr>
           <a:xfrm>
             <a:off x="640080" y="2926080"/>
-            <a:ext cx="10972800" cy="822960"/>
+            <a:ext cx="9601200" cy="822960"/>
           </a:xfrm>
           <a:prstGeom prst="rect">
             <a:avLst/>
@@ -6071,7 +6251,7 @@
               <a:buNone/>
             </a:pPr>
             <a:r>
-              <a:rPr lang="en-US" sz="1600" i="1" dirty="0">
+              <a:rPr lang="en-US" sz="1500" i="1" dirty="0">
                 <a:solidFill>
                   <a:srgbClr val="CFD8E8"/>
                 </a:solidFill>
@@ -6081,7 +6261,7 @@
               </a:rPr>
               <a:t>A result that loses to a baseline is not evidence for the neural model. The contract held; the model did not.</a:t>
             </a:r>
-            <a:endParaRPr lang="en-US" sz="1600" dirty="0"/>
+            <a:endParaRPr lang="en-US" sz="1500" dirty="0"/>
           </a:p>
         </p:txBody>
       </p:sp>
@@ -6094,7 +6274,7 @@
         <p:spPr>
           <a:xfrm>
             <a:off x="640080" y="4023360"/>
-            <a:ext cx="10972800" cy="365760"/>
+            <a:ext cx="9601200" cy="365760"/>
           </a:xfrm>
           <a:prstGeom prst="rect">
             <a:avLst/>
@@ -6158,7 +6338,7 @@
         <p:spPr>
           <a:xfrm>
             <a:off x="640080" y="4572000"/>
-            <a:ext cx="10972800" cy="822960"/>
+            <a:ext cx="9601200" cy="822960"/>
           </a:xfrm>
           <a:prstGeom prst="rect">
             <a:avLst/>
@@ -6177,7 +6357,7 @@
               <a:buNone/>
             </a:pPr>
             <a:r>
-              <a:rPr lang="en-US" sz="1600" dirty="0">
+              <a:rPr lang="en-US" sz="1500" dirty="0">
                 <a:solidFill>
                   <a:srgbClr val="FFFFFF"/>
                 </a:solidFill>
@@ -6187,7 +6367,7 @@
               </a:rPr>
               <a:t>Same autoencoder, within-firm temporal delta. Does Lehman's MD&amp;A look anomalous against Lehman's own prior-year MD&amp;A?</a:t>
             </a:r>
-            <a:endParaRPr lang="en-US" sz="1600" dirty="0"/>
+            <a:endParaRPr lang="en-US" sz="1500" dirty="0"/>
           </a:p>
         </p:txBody>
       </p:sp>
@@ -6199,8 +6379,8 @@
         </p:nvSpPr>
         <p:spPr>
           <a:xfrm>
-            <a:off x="640080" y="5943600"/>
-            <a:ext cx="10972800" cy="365760"/>
+            <a:off x="10058400" y="4160520"/>
+            <a:ext cx="1828800" cy="274320"/>
           </a:xfrm>
           <a:prstGeom prst="rect">
             <a:avLst/>
@@ -6212,11 +6392,11 @@
           <a:bodyPr wrap="square" rtlCol="0" anchor="ctr"/>
           <a:lstStyle/>
           <a:p>
-            <a:pPr indent="0" marL="0">
-              <a:buNone/>
-            </a:pPr>
-            <a:r>
-              <a:rPr lang="en-US" sz="1200" dirty="0">
+            <a:pPr algn="ctr" indent="0" marL="0">
+              <a:buNone/>
+            </a:pPr>
+            <a:r>
+              <a:rPr lang="en-US" sz="1000" i="1" dirty="0">
                 <a:solidFill>
                   <a:srgbClr val="CFD8E8"/>
                 </a:solidFill>
@@ -6224,76 +6404,164 @@
                 <a:ea typeface="Calibri" pitchFamily="34" charset="-122"/>
                 <a:cs typeface="Calibri" pitchFamily="34" charset="-120"/>
               </a:rPr>
-              <a:t>Pipeline demo (not a fraud scanner):  </a:t>
-            </a:r>
-            <a:pPr indent="0" marL="0">
-              <a:buNone/>
-            </a:pPr>
-            <a:r>
-              <a:rPr lang="en-US" sz="1200" b="1" dirty="0">
-                <a:solidFill>
-                  <a:srgbClr val="D4A017"/>
+              <a:t>Scan to try the pipeline</a:t>
+            </a:r>
+            <a:endParaRPr lang="en-US" sz="1000" dirty="0"/>
+          </a:p>
+        </p:txBody>
+      </p:sp>
+      <p:pic>
+        <p:nvPicPr>
+          <p:cNvPr id="11" name="Image 0" descr="/Users/arseniichan/Documents/Claude/Projects/CSC448/canary/reports/figures/qr_demo.png">    </p:cNvPr>
+          <p:cNvPicPr>
+            <a:picLocks noChangeAspect="1"/>
+          </p:cNvPicPr>
+          <p:nvPr/>
+        </p:nvPicPr>
+        <p:blipFill>
+          <a:blip r:embed="rId1"/>
+          <a:stretch>
+            <a:fillRect/>
+          </a:stretch>
+        </p:blipFill>
+        <p:spPr>
+          <a:xfrm>
+            <a:off x="10287000" y="4480560"/>
+            <a:ext cx="1371600" cy="1371600"/>
+          </a:xfrm>
+          <a:prstGeom prst="rect">
+            <a:avLst/>
+          </a:prstGeom>
+        </p:spPr>
+      </p:pic>
+      <p:sp>
+        <p:nvSpPr>
+          <p:cNvPr id="12" name="Text 9"/>
+          <p:cNvSpPr/>
+          <p:nvPr/>
+        </p:nvSpPr>
+        <p:spPr>
+          <a:xfrm>
+            <a:off x="640080" y="5989320"/>
+            <a:ext cx="10972800" cy="274320"/>
+          </a:xfrm>
+          <a:prstGeom prst="rect">
+            <a:avLst/>
+          </a:prstGeom>
+          <a:noFill/>
+          <a:ln/>
+        </p:spPr>
+        <p:txBody>
+          <a:bodyPr wrap="square" rtlCol="0" anchor="ctr"/>
+          <a:lstStyle/>
+          <a:p>
+            <a:pPr indent="0" marL="0">
+              <a:buNone/>
+            </a:pPr>
+            <a:r>
+              <a:rPr lang="en-US" sz="1200" dirty="0">
+                <a:solidFill>
+                  <a:srgbClr val="CFD8E8"/>
                 </a:solidFill>
                 <a:latin typeface="Calibri" pitchFamily="34" charset="0"/>
                 <a:ea typeface="Calibri" pitchFamily="34" charset="-122"/>
                 <a:cs typeface="Calibri" pitchFamily="34" charset="-120"/>
               </a:rPr>
-              <a:t>canary-psi.vercel.app/scan</a:t>
-            </a:r>
-            <a:pPr indent="0" marL="0">
-              <a:buNone/>
-            </a:pPr>
-            <a:r>
-              <a:rPr lang="en-US" sz="1200" dirty="0">
-                <a:solidFill>
-                  <a:srgbClr val="CFD8E8"/>
+              <a:t>Pipeline demo (not a fraud scanner): </a:t>
+            </a:r>
+            <a:pPr indent="0" marL="0">
+              <a:buNone/>
+            </a:pPr>
+            <a:r>
+              <a:rPr lang="en-US" sz="1200" b="1" dirty="0">
+                <a:solidFill>
+                  <a:srgbClr val="D4A017"/>
                 </a:solidFill>
                 <a:latin typeface="Calibri" pitchFamily="34" charset="0"/>
                 <a:ea typeface="Calibri" pitchFamily="34" charset="-122"/>
                 <a:cs typeface="Calibri" pitchFamily="34" charset="-120"/>
               </a:rPr>
-              <a:t>    ·    Code:  </a:t>
-            </a:r>
-            <a:pPr indent="0" marL="0">
-              <a:buNone/>
-            </a:pPr>
-            <a:r>
-              <a:rPr lang="en-US" sz="1200" b="1" dirty="0">
-                <a:solidFill>
-                  <a:srgbClr val="D4A017"/>
+              <a:t>canary-psi.vercel.app/scan</a:t>
+            </a:r>
+            <a:endParaRPr lang="en-US" sz="1200" dirty="0"/>
+          </a:p>
+        </p:txBody>
+      </p:sp>
+      <p:sp>
+        <p:nvSpPr>
+          <p:cNvPr id="13" name="Text 10"/>
+          <p:cNvSpPr/>
+          <p:nvPr/>
+        </p:nvSpPr>
+        <p:spPr>
+          <a:xfrm>
+            <a:off x="640080" y="6263640"/>
+            <a:ext cx="10972800" cy="274320"/>
+          </a:xfrm>
+          <a:prstGeom prst="rect">
+            <a:avLst/>
+          </a:prstGeom>
+          <a:noFill/>
+          <a:ln/>
+        </p:spPr>
+        <p:txBody>
+          <a:bodyPr wrap="square" rtlCol="0" anchor="ctr"/>
+          <a:lstStyle/>
+          <a:p>
+            <a:pPr indent="0" marL="0">
+              <a:buNone/>
+            </a:pPr>
+            <a:r>
+              <a:rPr lang="en-US" sz="1200" dirty="0">
+                <a:solidFill>
+                  <a:srgbClr val="CFD8E8"/>
                 </a:solidFill>
                 <a:latin typeface="Calibri" pitchFamily="34" charset="0"/>
                 <a:ea typeface="Calibri" pitchFamily="34" charset="-122"/>
                 <a:cs typeface="Calibri" pitchFamily="34" charset="-120"/>
               </a:rPr>
-              <a:t>github.com/ArseniiChan/canary</a:t>
-            </a:r>
-            <a:pPr indent="0" marL="0">
-              <a:buNone/>
-            </a:pPr>
-            <a:r>
-              <a:rPr lang="en-US" sz="1200" dirty="0">
-                <a:solidFill>
-                  <a:srgbClr val="CFD8E8"/>
+              <a:t>Code: </a:t>
+            </a:r>
+            <a:pPr indent="0" marL="0">
+              <a:buNone/>
+            </a:pPr>
+            <a:r>
+              <a:rPr lang="en-US" sz="1200" b="1" dirty="0">
+                <a:solidFill>
+                  <a:srgbClr val="D4A017"/>
                 </a:solidFill>
                 <a:latin typeface="Calibri" pitchFamily="34" charset="0"/>
                 <a:ea typeface="Calibri" pitchFamily="34" charset="-122"/>
                 <a:cs typeface="Calibri" pitchFamily="34" charset="-120"/>
               </a:rPr>
-              <a:t>    ·    Tag:  </a:t>
-            </a:r>
-            <a:pPr indent="0" marL="0">
-              <a:buNone/>
-            </a:pPr>
-            <a:r>
-              <a:rPr lang="en-US" sz="1200" b="1" dirty="0">
-                <a:solidFill>
-                  <a:srgbClr val="D4A017"/>
+              <a:t>github.com/ArseniiChan/canary</a:t>
+            </a:r>
+            <a:pPr indent="0" marL="0">
+              <a:buNone/>
+            </a:pPr>
+            <a:r>
+              <a:rPr lang="en-US" sz="1200" dirty="0">
+                <a:solidFill>
+                  <a:srgbClr val="CFD8E8"/>
                 </a:solidFill>
                 <a:latin typeface="Calibri" pitchFamily="34" charset="0"/>
                 <a:ea typeface="Calibri" pitchFamily="34" charset="-122"/>
                 <a:cs typeface="Calibri" pitchFamily="34" charset="-120"/>
               </a:rPr>
+              <a:t>    ·    Tag: </a:t>
+            </a:r>
+            <a:pPr indent="0" marL="0">
+              <a:buNone/>
+            </a:pPr>
+            <a:r>
+              <a:rPr lang="en-US" sz="1200" b="1" dirty="0">
+                <a:solidFill>
+                  <a:srgbClr val="D4A017"/>
+                </a:solidFill>
+                <a:latin typeface="Calibri" pitchFamily="34" charset="0"/>
+                <a:ea typeface="Calibri" pitchFamily="34" charset="-122"/>
+                <a:cs typeface="Calibri" pitchFamily="34" charset="-120"/>
+              </a:rPr>
               <a:t>validation-spec-frozen</a:t>
             </a:r>
             <a:endParaRPr lang="en-US" sz="1200" dirty="0"/>
@@ -6302,14 +6570,14 @@
       </p:sp>
       <p:sp>
         <p:nvSpPr>
-          <p:cNvPr id="11" name="Text 9"/>
-          <p:cNvSpPr/>
-          <p:nvPr/>
-        </p:nvSpPr>
-        <p:spPr>
-          <a:xfrm>
-            <a:off x="640080" y="6309360"/>
-            <a:ext cx="10972800" cy="365760"/>
+          <p:cNvPr id="14" name="Text 11"/>
+          <p:cNvSpPr/>
+          <p:nvPr/>
+        </p:nvSpPr>
+        <p:spPr>
+          <a:xfrm>
+            <a:off x="640080" y="6583680"/>
+            <a:ext cx="10972800" cy="274320"/>
           </a:xfrm>
           <a:prstGeom prst="rect">
             <a:avLst/>
@@ -6325,7 +6593,7 @@
               <a:buNone/>
             </a:pPr>
             <a:r>
-              <a:rPr lang="en-US" sz="1600" i="1" dirty="0">
+              <a:rPr lang="en-US" sz="1400" i="1" dirty="0">
                 <a:solidFill>
                   <a:srgbClr val="FFFFFF"/>
                 </a:solidFill>
@@ -6335,7 +6603,7 @@
               </a:rPr>
               <a:t>Thanks.</a:t>
             </a:r>
-            <a:endParaRPr lang="en-US" sz="1600" dirty="0"/>
+            <a:endParaRPr lang="en-US" sz="1400" dirty="0"/>
           </a:p>
         </p:txBody>
       </p:sp>

--- a/reports/canary_deck.pptx
+++ b/reports/canary_deck.pptx
@@ -1477,7 +1477,7 @@
     <p:bg>
       <p:bgPr>
         <a:solidFill>
-          <a:srgbClr val="0E1A33"/>
+          <a:srgbClr val="141519"/>
         </a:solidFill>
       </p:bgPr>
     </p:bg>
@@ -1522,7 +1522,7 @@
             <a:r>
               <a:rPr lang="en-US" sz="1400" b="1" spc="1200" kern="0" dirty="0">
                 <a:solidFill>
-                  <a:srgbClr val="D4A017"/>
+                  <a:srgbClr val="0A279F"/>
                 </a:solidFill>
                 <a:latin typeface="Calibri" pitchFamily="34" charset="0"/>
                 <a:ea typeface="Calibri" pitchFamily="34" charset="-122"/>
@@ -1611,11 +1611,11 @@
             <a:avLst/>
           </a:prstGeom>
           <a:solidFill>
-            <a:srgbClr val="D4A017"/>
+            <a:srgbClr val="0A279F"/>
           </a:solidFill>
           <a:ln w="12700">
             <a:solidFill>
-              <a:srgbClr val="D4A017"/>
+              <a:srgbClr val="0A279F"/>
             </a:solidFill>
             <a:prstDash val="solid"/>
           </a:ln>
@@ -1687,7 +1687,7 @@
             <a:r>
               <a:rPr lang="en-US" sz="1500" b="1" dirty="0">
                 <a:solidFill>
-                  <a:srgbClr val="D4A017"/>
+                  <a:srgbClr val="0A279F"/>
                 </a:solidFill>
                 <a:latin typeface="Calibri" pitchFamily="34" charset="0"/>
                 <a:ea typeface="Calibri" pitchFamily="34" charset="-122"/>
@@ -1740,7 +1740,7 @@
             <a:r>
               <a:rPr lang="en-US" sz="1500" b="1" dirty="0">
                 <a:solidFill>
-                  <a:srgbClr val="D4A017"/>
+                  <a:srgbClr val="0A279F"/>
                 </a:solidFill>
                 <a:latin typeface="Calibri" pitchFamily="34" charset="0"/>
                 <a:ea typeface="Calibri" pitchFamily="34" charset="-122"/>
@@ -1793,7 +1793,7 @@
             <a:r>
               <a:rPr lang="en-US" sz="1500" b="1" dirty="0">
                 <a:solidFill>
-                  <a:srgbClr val="D4A017"/>
+                  <a:srgbClr val="0A279F"/>
                 </a:solidFill>
                 <a:latin typeface="Calibri" pitchFamily="34" charset="0"/>
                 <a:ea typeface="Calibri" pitchFamily="34" charset="-122"/>
@@ -2035,11 +2035,11 @@
             <a:avLst/>
           </a:prstGeom>
           <a:solidFill>
-            <a:srgbClr val="D4A017"/>
+            <a:srgbClr val="0A279F"/>
           </a:solidFill>
           <a:ln w="12700">
             <a:solidFill>
-              <a:srgbClr val="D4A017"/>
+              <a:srgbClr val="0A279F"/>
             </a:solidFill>
             <a:prstDash val="solid"/>
           </a:ln>
@@ -2072,7 +2072,7 @@
             <a:r>
               <a:rPr lang="en-US" sz="11000" dirty="0">
                 <a:solidFill>
-                  <a:srgbClr val="D4A017"/>
+                  <a:srgbClr val="0A279F"/>
                 </a:solidFill>
                 <a:latin typeface="Georgia" pitchFamily="34" charset="0"/>
                 <a:ea typeface="Georgia" pitchFamily="34" charset="-122"/>
@@ -2114,7 +2114,7 @@
             <a:r>
               <a:rPr lang="en-US" sz="2600" i="1" dirty="0">
                 <a:solidFill>
-                  <a:srgbClr val="0E1A33"/>
+                  <a:srgbClr val="141519"/>
                 </a:solidFill>
                 <a:latin typeface="Georgia" pitchFamily="34" charset="0"/>
                 <a:ea typeface="Georgia" pitchFamily="34" charset="-122"/>
@@ -2141,11 +2141,11 @@
             <a:avLst/>
           </a:prstGeom>
           <a:solidFill>
-            <a:srgbClr val="D4A017"/>
+            <a:srgbClr val="0A279F"/>
           </a:solidFill>
           <a:ln w="12700">
             <a:solidFill>
-              <a:srgbClr val="D4A017"/>
+              <a:srgbClr val="0A279F"/>
             </a:solidFill>
             <a:prstDash val="solid"/>
           </a:ln>
@@ -2396,11 +2396,11 @@
             <a:avLst/>
           </a:prstGeom>
           <a:solidFill>
-            <a:srgbClr val="D4A017"/>
+            <a:srgbClr val="0A279F"/>
           </a:solidFill>
           <a:ln w="12700">
             <a:solidFill>
-              <a:srgbClr val="D4A017"/>
+              <a:srgbClr val="0A279F"/>
             </a:solidFill>
             <a:prstDash val="solid"/>
           </a:ln>
@@ -2433,7 +2433,7 @@
             <a:r>
               <a:rPr lang="en-US" sz="3200" b="1" dirty="0">
                 <a:solidFill>
-                  <a:srgbClr val="0E1A33"/>
+                  <a:srgbClr val="141519"/>
                 </a:solidFill>
                 <a:latin typeface="Georgia" pitchFamily="34" charset="0"/>
                 <a:ea typeface="Georgia" pitchFamily="34" charset="-122"/>
@@ -2536,7 +2536,7 @@
             <a:r>
               <a:rPr lang="en-US" sz="1100" b="1" spc="300" kern="0" dirty="0">
                 <a:solidFill>
-                  <a:srgbClr val="D4A017"/>
+                  <a:srgbClr val="0A279F"/>
                 </a:solidFill>
                 <a:latin typeface="Calibri" pitchFamily="34" charset="0"/>
                 <a:ea typeface="Calibri" pitchFamily="34" charset="-122"/>
@@ -2563,11 +2563,11 @@
             <a:avLst/>
           </a:prstGeom>
           <a:solidFill>
-            <a:srgbClr val="D4A017"/>
+            <a:srgbClr val="0A279F"/>
           </a:solidFill>
           <a:ln w="12700">
             <a:solidFill>
-              <a:srgbClr val="D4A017"/>
+              <a:srgbClr val="0A279F"/>
             </a:solidFill>
             <a:prstDash val="solid"/>
           </a:ln>
@@ -2667,7 +2667,7 @@
             <a:r>
               <a:rPr lang="en-US" sz="1100" b="1" spc="300" kern="0" dirty="0">
                 <a:solidFill>
-                  <a:srgbClr val="D4A017"/>
+                  <a:srgbClr val="0A279F"/>
                 </a:solidFill>
                 <a:latin typeface="Calibri" pitchFamily="34" charset="0"/>
                 <a:ea typeface="Calibri" pitchFamily="34" charset="-122"/>
@@ -2694,11 +2694,11 @@
             <a:avLst/>
           </a:prstGeom>
           <a:solidFill>
-            <a:srgbClr val="D4A017"/>
+            <a:srgbClr val="0A279F"/>
           </a:solidFill>
           <a:ln w="12700">
             <a:solidFill>
-              <a:srgbClr val="D4A017"/>
+              <a:srgbClr val="0A279F"/>
             </a:solidFill>
             <a:prstDash val="solid"/>
           </a:ln>
@@ -2798,7 +2798,7 @@
             <a:r>
               <a:rPr lang="en-US" sz="1100" b="1" spc="300" kern="0" dirty="0">
                 <a:solidFill>
-                  <a:srgbClr val="D4A017"/>
+                  <a:srgbClr val="0A279F"/>
                 </a:solidFill>
                 <a:latin typeface="Calibri" pitchFamily="34" charset="0"/>
                 <a:ea typeface="Calibri" pitchFamily="34" charset="-122"/>
@@ -2825,11 +2825,11 @@
             <a:avLst/>
           </a:prstGeom>
           <a:solidFill>
-            <a:srgbClr val="D4A017"/>
+            <a:srgbClr val="0A279F"/>
           </a:solidFill>
           <a:ln w="12700">
             <a:solidFill>
-              <a:srgbClr val="D4A017"/>
+              <a:srgbClr val="0A279F"/>
             </a:solidFill>
             <a:prstDash val="solid"/>
           </a:ln>
@@ -3190,11 +3190,11 @@
             <a:avLst/>
           </a:prstGeom>
           <a:solidFill>
-            <a:srgbClr val="D4A017"/>
+            <a:srgbClr val="0A279F"/>
           </a:solidFill>
           <a:ln w="12700">
             <a:solidFill>
-              <a:srgbClr val="D4A017"/>
+              <a:srgbClr val="0A279F"/>
             </a:solidFill>
             <a:prstDash val="solid"/>
           </a:ln>
@@ -3227,7 +3227,7 @@
             <a:r>
               <a:rPr lang="en-US" sz="2400" b="1" dirty="0">
                 <a:solidFill>
-                  <a:srgbClr val="0E1A33"/>
+                  <a:srgbClr val="141519"/>
                 </a:solidFill>
                 <a:latin typeface="Georgia" pitchFamily="34" charset="0"/>
                 <a:ea typeface="Georgia" pitchFamily="34" charset="-122"/>
@@ -3331,7 +3331,7 @@
                       <a:tailEnd type="none" w="med" len="med"/>
                     </a:lnB>
                     <a:solidFill>
-                      <a:srgbClr val="0E1A33"/>
+                      <a:srgbClr val="141519"/>
                     </a:solidFill>
                   </a:tcPr>
                 </a:tc>
@@ -3399,7 +3399,7 @@
                       <a:tailEnd type="none" w="med" len="med"/>
                     </a:lnB>
                     <a:solidFill>
-                      <a:srgbClr val="0E1A33"/>
+                      <a:srgbClr val="141519"/>
                     </a:solidFill>
                   </a:tcPr>
                 </a:tc>
@@ -3467,7 +3467,7 @@
                       <a:tailEnd type="none" w="med" len="med"/>
                     </a:lnB>
                     <a:solidFill>
-                      <a:srgbClr val="0E1A33"/>
+                      <a:srgbClr val="141519"/>
                     </a:solidFill>
                   </a:tcPr>
                 </a:tc>
@@ -3484,7 +3484,7 @@
                       <a:r>
                         <a:rPr lang="en-US" sz="1300" b="1" dirty="0">
                           <a:solidFill>
-                            <a:srgbClr val="0E1A33"/>
+                            <a:srgbClr val="141519"/>
                           </a:solidFill>
                           <a:latin typeface="Calibri" pitchFamily="34" charset="0"/>
                           <a:ea typeface="Calibri" pitchFamily="34" charset="-122"/>
@@ -3549,7 +3549,7 @@
                       <a:r>
                         <a:rPr lang="en-US" sz="1300" b="1" dirty="0">
                           <a:solidFill>
-                            <a:srgbClr val="0E1A33"/>
+                            <a:srgbClr val="141519"/>
                           </a:solidFill>
                           <a:latin typeface="Calibri" pitchFamily="34" charset="0"/>
                           <a:ea typeface="Calibri" pitchFamily="34" charset="-122"/>
@@ -5133,11 +5133,11 @@
             <a:avLst/>
           </a:prstGeom>
           <a:solidFill>
-            <a:srgbClr val="D4A017"/>
+            <a:srgbClr val="0A279F"/>
           </a:solidFill>
           <a:ln w="12700">
             <a:solidFill>
-              <a:srgbClr val="D4A017"/>
+              <a:srgbClr val="0A279F"/>
             </a:solidFill>
             <a:prstDash val="solid"/>
           </a:ln>
@@ -5170,7 +5170,7 @@
             <a:r>
               <a:rPr lang="en-US" sz="2400" b="1" dirty="0">
                 <a:solidFill>
-                  <a:srgbClr val="0E1A33"/>
+                  <a:srgbClr val="141519"/>
                 </a:solidFill>
                 <a:latin typeface="Georgia" pitchFamily="34" charset="0"/>
                 <a:ea typeface="Georgia" pitchFamily="34" charset="-122"/>
@@ -5451,11 +5451,11 @@
             <a:avLst/>
           </a:prstGeom>
           <a:solidFill>
-            <a:srgbClr val="D4A017"/>
+            <a:srgbClr val="0A279F"/>
           </a:solidFill>
           <a:ln w="12700">
             <a:solidFill>
-              <a:srgbClr val="D4A017"/>
+              <a:srgbClr val="0A279F"/>
             </a:solidFill>
             <a:prstDash val="solid"/>
           </a:ln>
@@ -5501,11 +5501,11 @@
             <a:avLst/>
           </a:prstGeom>
           <a:solidFill>
-            <a:srgbClr val="D4A017"/>
+            <a:srgbClr val="0A279F"/>
           </a:solidFill>
           <a:ln w="12700">
             <a:solidFill>
-              <a:srgbClr val="D4A017"/>
+              <a:srgbClr val="0A279F"/>
             </a:solidFill>
             <a:prstDash val="solid"/>
           </a:ln>
@@ -5538,7 +5538,7 @@
             <a:r>
               <a:rPr lang="en-US" sz="1800" b="1" dirty="0">
                 <a:solidFill>
-                  <a:srgbClr val="D4A017"/>
+                  <a:srgbClr val="0A279F"/>
                 </a:solidFill>
                 <a:latin typeface="Georgia" pitchFamily="34" charset="0"/>
                 <a:ea typeface="Georgia" pitchFamily="34" charset="-122"/>
@@ -5577,7 +5577,7 @@
             <a:r>
               <a:rPr lang="en-US" sz="1400" b="1" dirty="0">
                 <a:solidFill>
-                  <a:srgbClr val="0E1A33"/>
+                  <a:srgbClr val="141519"/>
                 </a:solidFill>
                 <a:latin typeface="Calibri" pitchFamily="34" charset="0"/>
                 <a:ea typeface="Calibri" pitchFamily="34" charset="-122"/>
@@ -5671,11 +5671,11 @@
             <a:avLst/>
           </a:prstGeom>
           <a:solidFill>
-            <a:srgbClr val="D4A017"/>
+            <a:srgbClr val="0A279F"/>
           </a:solidFill>
           <a:ln w="12700">
             <a:solidFill>
-              <a:srgbClr val="D4A017"/>
+              <a:srgbClr val="0A279F"/>
             </a:solidFill>
             <a:prstDash val="solid"/>
           </a:ln>
@@ -5708,7 +5708,7 @@
             <a:r>
               <a:rPr lang="en-US" sz="1800" b="1" dirty="0">
                 <a:solidFill>
-                  <a:srgbClr val="D4A017"/>
+                  <a:srgbClr val="0A279F"/>
                 </a:solidFill>
                 <a:latin typeface="Georgia" pitchFamily="34" charset="0"/>
                 <a:ea typeface="Georgia" pitchFamily="34" charset="-122"/>
@@ -5747,7 +5747,7 @@
             <a:r>
               <a:rPr lang="en-US" sz="1400" b="1" dirty="0">
                 <a:solidFill>
-                  <a:srgbClr val="0E1A33"/>
+                  <a:srgbClr val="141519"/>
                 </a:solidFill>
                 <a:latin typeface="Calibri" pitchFamily="34" charset="0"/>
                 <a:ea typeface="Calibri" pitchFamily="34" charset="-122"/>
@@ -5841,11 +5841,11 @@
             <a:avLst/>
           </a:prstGeom>
           <a:solidFill>
-            <a:srgbClr val="D4A017"/>
+            <a:srgbClr val="0A279F"/>
           </a:solidFill>
           <a:ln w="12700">
             <a:solidFill>
-              <a:srgbClr val="D4A017"/>
+              <a:srgbClr val="0A279F"/>
             </a:solidFill>
             <a:prstDash val="solid"/>
           </a:ln>
@@ -5878,7 +5878,7 @@
             <a:r>
               <a:rPr lang="en-US" sz="1800" b="1" dirty="0">
                 <a:solidFill>
-                  <a:srgbClr val="D4A017"/>
+                  <a:srgbClr val="0A279F"/>
                 </a:solidFill>
                 <a:latin typeface="Georgia" pitchFamily="34" charset="0"/>
                 <a:ea typeface="Georgia" pitchFamily="34" charset="-122"/>
@@ -5917,7 +5917,7 @@
             <a:r>
               <a:rPr lang="en-US" sz="1400" b="1" dirty="0">
                 <a:solidFill>
-                  <a:srgbClr val="0E1A33"/>
+                  <a:srgbClr val="141519"/>
                 </a:solidFill>
                 <a:latin typeface="Calibri" pitchFamily="34" charset="0"/>
                 <a:ea typeface="Calibri" pitchFamily="34" charset="-122"/>
@@ -6063,7 +6063,7 @@
     <p:bg>
       <p:bgPr>
         <a:solidFill>
-          <a:srgbClr val="0E1A33"/>
+          <a:srgbClr val="141519"/>
         </a:solidFill>
       </p:bgPr>
     </p:bg>
@@ -6108,7 +6108,7 @@
             <a:r>
               <a:rPr lang="en-US" sz="1200" b="1" spc="400" kern="0" dirty="0">
                 <a:solidFill>
-                  <a:srgbClr val="D4A017"/>
+                  <a:srgbClr val="0A279F"/>
                 </a:solidFill>
                 <a:latin typeface="Calibri" pitchFamily="34" charset="0"/>
                 <a:ea typeface="Calibri" pitchFamily="34" charset="-122"/>
@@ -6135,11 +6135,11 @@
             <a:avLst/>
           </a:prstGeom>
           <a:solidFill>
-            <a:srgbClr val="D4A017"/>
+            <a:srgbClr val="0A279F"/>
           </a:solidFill>
           <a:ln w="12700">
             <a:solidFill>
-              <a:srgbClr val="D4A017"/>
+              <a:srgbClr val="0A279F"/>
             </a:solidFill>
             <a:prstDash val="solid"/>
           </a:ln>
@@ -6292,7 +6292,7 @@
             <a:r>
               <a:rPr lang="en-US" sz="1200" b="1" spc="400" kern="0" dirty="0">
                 <a:solidFill>
-                  <a:srgbClr val="D4A017"/>
+                  <a:srgbClr val="0A279F"/>
                 </a:solidFill>
                 <a:latin typeface="Calibri" pitchFamily="34" charset="0"/>
                 <a:ea typeface="Calibri" pitchFamily="34" charset="-122"/>
@@ -6319,11 +6319,11 @@
             <a:avLst/>
           </a:prstGeom>
           <a:solidFill>
-            <a:srgbClr val="D4A017"/>
+            <a:srgbClr val="0A279F"/>
           </a:solidFill>
           <a:ln w="12700">
             <a:solidFill>
-              <a:srgbClr val="D4A017"/>
+              <a:srgbClr val="0A279F"/>
             </a:solidFill>
             <a:prstDash val="solid"/>
           </a:ln>
@@ -6475,7 +6475,7 @@
             <a:r>
               <a:rPr lang="en-US" sz="1200" b="1" dirty="0">
                 <a:solidFill>
-                  <a:srgbClr val="D4A017"/>
+                  <a:srgbClr val="0A279F"/>
                 </a:solidFill>
                 <a:latin typeface="Calibri" pitchFamily="34" charset="0"/>
                 <a:ea typeface="Calibri" pitchFamily="34" charset="-122"/>
@@ -6528,7 +6528,7 @@
             <a:r>
               <a:rPr lang="en-US" sz="1200" b="1" dirty="0">
                 <a:solidFill>
-                  <a:srgbClr val="D4A017"/>
+                  <a:srgbClr val="0A279F"/>
                 </a:solidFill>
                 <a:latin typeface="Calibri" pitchFamily="34" charset="0"/>
                 <a:ea typeface="Calibri" pitchFamily="34" charset="-122"/>
@@ -6556,7 +6556,7 @@
             <a:r>
               <a:rPr lang="en-US" sz="1200" b="1" dirty="0">
                 <a:solidFill>
-                  <a:srgbClr val="D4A017"/>
+                  <a:srgbClr val="0A279F"/>
                 </a:solidFill>
                 <a:latin typeface="Calibri" pitchFamily="34" charset="0"/>
                 <a:ea typeface="Calibri" pitchFamily="34" charset="-122"/>

--- a/reports/canary_deck.pptx
+++ b/reports/canary_deck.pptx
@@ -802,13 +802,14 @@
               <a:t>TARGET: 1:00.
 SAY:
 "Here's what came back. Five cases evaluable, one excluded; I'll come back to the excluded one.
-[point at Lehman row] Only Lehman lands in the top three within its peer group. Three out of thirteen. The statistical test is highly significant, BUT the effect size is small [point at warning glyph]. Both numbers matter; reporting either one alone is misleading.
+[point at Lehman row] Only Lehman lands in the top three within its peer group. Three out of thirteen. The statistical test is highly significant, BUT the effect size is small [point at warning glyph]. Both numbers matter; reporting either one alone is misleading. And as you'll see on the next slide, even on Lehman, a 1990s baseline beats my model.
 [quick scan with hand] The other four (HealthSouth, Valeant, Tyco, WorldCom) all rank no better than random expectation. The test goes the OPPOSITE direction from what we'd want. Aggregate hit rates fall at or below random.
 Now, Enron. [point at italicized row] Enron's filing date is April 2nd, 2001. Every other peer in every other case is dated later. Under the strict rule I locked in, Enron has no eligible training data.
 So I had a choice: relax the rule and rerun, or report the exclusion. I reported the exclusion. The pre-registered design was infeasible for Enron, and I didn't catch that before I locked the spec. That's a finding about pre-registration, not about fraud detection."
 (Click to slide 5.)
 STAGE NOTES:
 - Hands ON the slide. Don't quote numbers from memory; point at them on the projection.
+- The forward-pointer line ("a 1990s baseline beats my model") is critical. If a listener tunes out during slide 5, they need to walk away with this on slide 4. Don't skip it.
 - The Enron exclusion is the most likely Q&amp;A target. Pre-empt it: "I had a choice: relax the rule or report the exclusion. I reported the exclusion."</a:t>
             </a:r>
             <a:endParaRPr lang="en-US" dirty="0"/>
@@ -2226,7 +2227,7 @@
                 <a:ea typeface="Georgia" pitchFamily="34" charset="-122"/>
                 <a:cs typeface="Georgia" pitchFamily="34" charset="-120"/>
               </a:rPr>
-              <a:t>At N = 6 frauds, with strict pre-registration: no useful autoencoder signal across four of five evaluable cohorts; Enron is not evaluable under the frozen rule; the one cohort that ranks high (Lehman) is n = 1, and a 1990s TF-IDF baseline ranks it higher.</a:t>
+              <a:t>At N = 6 frauds, with strict pre-registration: no useful autoencoder signal across four of five evaluable cohorts; Enron is not evaluable under the frozen rule; the one cohort the autoencoder did rank highly (Lehman) is n = 1, and a 1990s TF-IDF baseline beats the autoencoder on it.</a:t>
             </a:r>
             <a:endParaRPr lang="en-US" sz="1800" dirty="0"/>
           </a:p>
@@ -3225,7 +3226,7 @@
               <a:buNone/>
             </a:pPr>
             <a:r>
-              <a:rPr lang="en-US" sz="2400" b="1" dirty="0">
+              <a:rPr lang="en-US" sz="2200" b="1" dirty="0">
                 <a:solidFill>
                   <a:srgbClr val="141519"/>
                 </a:solidFill>
@@ -3233,9 +3234,9 @@
                 <a:ea typeface="Georgia" pitchFamily="34" charset="-122"/>
                 <a:cs typeface="Georgia" pitchFamily="34" charset="-120"/>
               </a:rPr>
-              <a:t>Only Lehman ranks above random expectation; the aggregate still loses to random.</a:t>
-            </a:r>
-            <a:endParaRPr lang="en-US" sz="2400" dirty="0"/>
+              <a:t>Only Lehman ranks better than random expectation; even there, a 1990s baseline beats the autoencoder.</a:t>
+            </a:r>
+            <a:endParaRPr lang="en-US" sz="2200" dirty="0"/>
           </a:p>
         </p:txBody>
       </p:sp>
@@ -4963,7 +4964,7 @@
                 <a:ea typeface="Georgia" pitchFamily="34" charset="-122"/>
                 <a:cs typeface="Georgia" pitchFamily="34" charset="-120"/>
               </a:rPr>
-              <a:t>⚠ Lehman is the only rank better than random expectation, and a 1990s baseline ranks it higher (slide 5). The aggregate is entirely Lehman.</a:t>
+              <a:t>⚠ Lehman is the only rank better than random expectation, and a 1990s baseline beats the autoencoder there too (slide 5). The aggregate is entirely Lehman.</a:t>
             </a:r>
             <a:endParaRPr lang="en-US" sz="1300" dirty="0"/>
           </a:p>

--- a/reports/canary_deck.pptx
+++ b/reports/canary_deck.pptx
@@ -1523,7 +1523,7 @@
             <a:r>
               <a:rPr lang="en-US" sz="1400" b="1" spc="1200" kern="0" dirty="0">
                 <a:solidFill>
-                  <a:srgbClr val="0A279F"/>
+                  <a:srgbClr val="3B82F6"/>
                 </a:solidFill>
                 <a:latin typeface="Calibri" pitchFamily="34" charset="0"/>
                 <a:ea typeface="Calibri" pitchFamily="34" charset="-122"/>
@@ -1612,11 +1612,11 @@
             <a:avLst/>
           </a:prstGeom>
           <a:solidFill>
-            <a:srgbClr val="0A279F"/>
+            <a:srgbClr val="3B82F6"/>
           </a:solidFill>
           <a:ln w="12700">
             <a:solidFill>
-              <a:srgbClr val="0A279F"/>
+              <a:srgbClr val="3B82F6"/>
             </a:solidFill>
             <a:prstDash val="solid"/>
           </a:ln>
@@ -1688,7 +1688,7 @@
             <a:r>
               <a:rPr lang="en-US" sz="1500" b="1" dirty="0">
                 <a:solidFill>
-                  <a:srgbClr val="0A279F"/>
+                  <a:srgbClr val="3B82F6"/>
                 </a:solidFill>
                 <a:latin typeface="Calibri" pitchFamily="34" charset="0"/>
                 <a:ea typeface="Calibri" pitchFamily="34" charset="-122"/>
@@ -1741,7 +1741,7 @@
             <a:r>
               <a:rPr lang="en-US" sz="1500" b="1" dirty="0">
                 <a:solidFill>
-                  <a:srgbClr val="0A279F"/>
+                  <a:srgbClr val="3B82F6"/>
                 </a:solidFill>
                 <a:latin typeface="Calibri" pitchFamily="34" charset="0"/>
                 <a:ea typeface="Calibri" pitchFamily="34" charset="-122"/>
@@ -1794,7 +1794,7 @@
             <a:r>
               <a:rPr lang="en-US" sz="1500" b="1" dirty="0">
                 <a:solidFill>
-                  <a:srgbClr val="0A279F"/>
+                  <a:srgbClr val="3B82F6"/>
                 </a:solidFill>
                 <a:latin typeface="Calibri" pitchFamily="34" charset="0"/>
                 <a:ea typeface="Calibri" pitchFamily="34" charset="-122"/>
@@ -2036,11 +2036,11 @@
             <a:avLst/>
           </a:prstGeom>
           <a:solidFill>
-            <a:srgbClr val="0A279F"/>
+            <a:srgbClr val="3B82F6"/>
           </a:solidFill>
           <a:ln w="12700">
             <a:solidFill>
-              <a:srgbClr val="0A279F"/>
+              <a:srgbClr val="3B82F6"/>
             </a:solidFill>
             <a:prstDash val="solid"/>
           </a:ln>
@@ -2073,7 +2073,7 @@
             <a:r>
               <a:rPr lang="en-US" sz="11000" dirty="0">
                 <a:solidFill>
-                  <a:srgbClr val="0A279F"/>
+                  <a:srgbClr val="3B82F6"/>
                 </a:solidFill>
                 <a:latin typeface="Georgia" pitchFamily="34" charset="0"/>
                 <a:ea typeface="Georgia" pitchFamily="34" charset="-122"/>
@@ -2142,11 +2142,11 @@
             <a:avLst/>
           </a:prstGeom>
           <a:solidFill>
-            <a:srgbClr val="0A279F"/>
+            <a:srgbClr val="3B82F6"/>
           </a:solidFill>
           <a:ln w="12700">
             <a:solidFill>
-              <a:srgbClr val="0A279F"/>
+              <a:srgbClr val="3B82F6"/>
             </a:solidFill>
             <a:prstDash val="solid"/>
           </a:ln>
@@ -2397,11 +2397,11 @@
             <a:avLst/>
           </a:prstGeom>
           <a:solidFill>
-            <a:srgbClr val="0A279F"/>
+            <a:srgbClr val="3B82F6"/>
           </a:solidFill>
           <a:ln w="12700">
             <a:solidFill>
-              <a:srgbClr val="0A279F"/>
+              <a:srgbClr val="3B82F6"/>
             </a:solidFill>
             <a:prstDash val="solid"/>
           </a:ln>
@@ -2537,7 +2537,7 @@
             <a:r>
               <a:rPr lang="en-US" sz="1100" b="1" spc="300" kern="0" dirty="0">
                 <a:solidFill>
-                  <a:srgbClr val="0A279F"/>
+                  <a:srgbClr val="3B82F6"/>
                 </a:solidFill>
                 <a:latin typeface="Calibri" pitchFamily="34" charset="0"/>
                 <a:ea typeface="Calibri" pitchFamily="34" charset="-122"/>
@@ -2564,11 +2564,11 @@
             <a:avLst/>
           </a:prstGeom>
           <a:solidFill>
-            <a:srgbClr val="0A279F"/>
+            <a:srgbClr val="3B82F6"/>
           </a:solidFill>
           <a:ln w="12700">
             <a:solidFill>
-              <a:srgbClr val="0A279F"/>
+              <a:srgbClr val="3B82F6"/>
             </a:solidFill>
             <a:prstDash val="solid"/>
           </a:ln>
@@ -2668,7 +2668,7 @@
             <a:r>
               <a:rPr lang="en-US" sz="1100" b="1" spc="300" kern="0" dirty="0">
                 <a:solidFill>
-                  <a:srgbClr val="0A279F"/>
+                  <a:srgbClr val="3B82F6"/>
                 </a:solidFill>
                 <a:latin typeface="Calibri" pitchFamily="34" charset="0"/>
                 <a:ea typeface="Calibri" pitchFamily="34" charset="-122"/>
@@ -2695,11 +2695,11 @@
             <a:avLst/>
           </a:prstGeom>
           <a:solidFill>
-            <a:srgbClr val="0A279F"/>
+            <a:srgbClr val="3B82F6"/>
           </a:solidFill>
           <a:ln w="12700">
             <a:solidFill>
-              <a:srgbClr val="0A279F"/>
+              <a:srgbClr val="3B82F6"/>
             </a:solidFill>
             <a:prstDash val="solid"/>
           </a:ln>
@@ -2799,7 +2799,7 @@
             <a:r>
               <a:rPr lang="en-US" sz="1100" b="1" spc="300" kern="0" dirty="0">
                 <a:solidFill>
-                  <a:srgbClr val="0A279F"/>
+                  <a:srgbClr val="3B82F6"/>
                 </a:solidFill>
                 <a:latin typeface="Calibri" pitchFamily="34" charset="0"/>
                 <a:ea typeface="Calibri" pitchFamily="34" charset="-122"/>
@@ -2826,11 +2826,11 @@
             <a:avLst/>
           </a:prstGeom>
           <a:solidFill>
-            <a:srgbClr val="0A279F"/>
+            <a:srgbClr val="3B82F6"/>
           </a:solidFill>
           <a:ln w="12700">
             <a:solidFill>
-              <a:srgbClr val="0A279F"/>
+              <a:srgbClr val="3B82F6"/>
             </a:solidFill>
             <a:prstDash val="solid"/>
           </a:ln>
@@ -3191,11 +3191,11 @@
             <a:avLst/>
           </a:prstGeom>
           <a:solidFill>
-            <a:srgbClr val="0A279F"/>
+            <a:srgbClr val="3B82F6"/>
           </a:solidFill>
           <a:ln w="12700">
             <a:solidFill>
-              <a:srgbClr val="0A279F"/>
+              <a:srgbClr val="3B82F6"/>
             </a:solidFill>
             <a:prstDash val="solid"/>
           </a:ln>
@@ -5134,11 +5134,11 @@
             <a:avLst/>
           </a:prstGeom>
           <a:solidFill>
-            <a:srgbClr val="0A279F"/>
+            <a:srgbClr val="3B82F6"/>
           </a:solidFill>
           <a:ln w="12700">
             <a:solidFill>
-              <a:srgbClr val="0A279F"/>
+              <a:srgbClr val="3B82F6"/>
             </a:solidFill>
             <a:prstDash val="solid"/>
           </a:ln>
@@ -5452,11 +5452,11 @@
             <a:avLst/>
           </a:prstGeom>
           <a:solidFill>
-            <a:srgbClr val="0A279F"/>
+            <a:srgbClr val="3B82F6"/>
           </a:solidFill>
           <a:ln w="12700">
             <a:solidFill>
-              <a:srgbClr val="0A279F"/>
+              <a:srgbClr val="3B82F6"/>
             </a:solidFill>
             <a:prstDash val="solid"/>
           </a:ln>
@@ -5502,11 +5502,11 @@
             <a:avLst/>
           </a:prstGeom>
           <a:solidFill>
-            <a:srgbClr val="0A279F"/>
+            <a:srgbClr val="3B82F6"/>
           </a:solidFill>
           <a:ln w="12700">
             <a:solidFill>
-              <a:srgbClr val="0A279F"/>
+              <a:srgbClr val="3B82F6"/>
             </a:solidFill>
             <a:prstDash val="solid"/>
           </a:ln>
@@ -5539,7 +5539,7 @@
             <a:r>
               <a:rPr lang="en-US" sz="1800" b="1" dirty="0">
                 <a:solidFill>
-                  <a:srgbClr val="0A279F"/>
+                  <a:srgbClr val="3B82F6"/>
                 </a:solidFill>
                 <a:latin typeface="Georgia" pitchFamily="34" charset="0"/>
                 <a:ea typeface="Georgia" pitchFamily="34" charset="-122"/>
@@ -5672,11 +5672,11 @@
             <a:avLst/>
           </a:prstGeom>
           <a:solidFill>
-            <a:srgbClr val="0A279F"/>
+            <a:srgbClr val="3B82F6"/>
           </a:solidFill>
           <a:ln w="12700">
             <a:solidFill>
-              <a:srgbClr val="0A279F"/>
+              <a:srgbClr val="3B82F6"/>
             </a:solidFill>
             <a:prstDash val="solid"/>
           </a:ln>
@@ -5709,7 +5709,7 @@
             <a:r>
               <a:rPr lang="en-US" sz="1800" b="1" dirty="0">
                 <a:solidFill>
-                  <a:srgbClr val="0A279F"/>
+                  <a:srgbClr val="3B82F6"/>
                 </a:solidFill>
                 <a:latin typeface="Georgia" pitchFamily="34" charset="0"/>
                 <a:ea typeface="Georgia" pitchFamily="34" charset="-122"/>
@@ -5842,11 +5842,11 @@
             <a:avLst/>
           </a:prstGeom>
           <a:solidFill>
-            <a:srgbClr val="0A279F"/>
+            <a:srgbClr val="3B82F6"/>
           </a:solidFill>
           <a:ln w="12700">
             <a:solidFill>
-              <a:srgbClr val="0A279F"/>
+              <a:srgbClr val="3B82F6"/>
             </a:solidFill>
             <a:prstDash val="solid"/>
           </a:ln>
@@ -5879,7 +5879,7 @@
             <a:r>
               <a:rPr lang="en-US" sz="1800" b="1" dirty="0">
                 <a:solidFill>
-                  <a:srgbClr val="0A279F"/>
+                  <a:srgbClr val="3B82F6"/>
                 </a:solidFill>
                 <a:latin typeface="Georgia" pitchFamily="34" charset="0"/>
                 <a:ea typeface="Georgia" pitchFamily="34" charset="-122"/>
@@ -6109,7 +6109,7 @@
             <a:r>
               <a:rPr lang="en-US" sz="1200" b="1" spc="400" kern="0" dirty="0">
                 <a:solidFill>
-                  <a:srgbClr val="0A279F"/>
+                  <a:srgbClr val="3B82F6"/>
                 </a:solidFill>
                 <a:latin typeface="Calibri" pitchFamily="34" charset="0"/>
                 <a:ea typeface="Calibri" pitchFamily="34" charset="-122"/>
@@ -6136,11 +6136,11 @@
             <a:avLst/>
           </a:prstGeom>
           <a:solidFill>
-            <a:srgbClr val="0A279F"/>
+            <a:srgbClr val="3B82F6"/>
           </a:solidFill>
           <a:ln w="12700">
             <a:solidFill>
-              <a:srgbClr val="0A279F"/>
+              <a:srgbClr val="3B82F6"/>
             </a:solidFill>
             <a:prstDash val="solid"/>
           </a:ln>
@@ -6293,7 +6293,7 @@
             <a:r>
               <a:rPr lang="en-US" sz="1200" b="1" spc="400" kern="0" dirty="0">
                 <a:solidFill>
-                  <a:srgbClr val="0A279F"/>
+                  <a:srgbClr val="3B82F6"/>
                 </a:solidFill>
                 <a:latin typeface="Calibri" pitchFamily="34" charset="0"/>
                 <a:ea typeface="Calibri" pitchFamily="34" charset="-122"/>
@@ -6320,11 +6320,11 @@
             <a:avLst/>
           </a:prstGeom>
           <a:solidFill>
-            <a:srgbClr val="0A279F"/>
+            <a:srgbClr val="3B82F6"/>
           </a:solidFill>
           <a:ln w="12700">
             <a:solidFill>
-              <a:srgbClr val="0A279F"/>
+              <a:srgbClr val="3B82F6"/>
             </a:solidFill>
             <a:prstDash val="solid"/>
           </a:ln>
@@ -6476,7 +6476,7 @@
             <a:r>
               <a:rPr lang="en-US" sz="1200" b="1" dirty="0">
                 <a:solidFill>
-                  <a:srgbClr val="0A279F"/>
+                  <a:srgbClr val="3B82F6"/>
                 </a:solidFill>
                 <a:latin typeface="Calibri" pitchFamily="34" charset="0"/>
                 <a:ea typeface="Calibri" pitchFamily="34" charset="-122"/>
@@ -6529,7 +6529,7 @@
             <a:r>
               <a:rPr lang="en-US" sz="1200" b="1" dirty="0">
                 <a:solidFill>
-                  <a:srgbClr val="0A279F"/>
+                  <a:srgbClr val="3B82F6"/>
                 </a:solidFill>
                 <a:latin typeface="Calibri" pitchFamily="34" charset="0"/>
                 <a:ea typeface="Calibri" pitchFamily="34" charset="-122"/>
@@ -6557,7 +6557,7 @@
             <a:r>
               <a:rPr lang="en-US" sz="1200" b="1" dirty="0">
                 <a:solidFill>
-                  <a:srgbClr val="0A279F"/>
+                  <a:srgbClr val="3B82F6"/>
                 </a:solidFill>
                 <a:latin typeface="Calibri" pitchFamily="34" charset="0"/>
                 <a:ea typeface="Calibri" pitchFamily="34" charset="-122"/>

--- a/reports/canary_deck.pptx
+++ b/reports/canary_deck.pptx
@@ -605,13 +605,15 @@
               <a:rPr lang="en-US" dirty="0"/>
               <a:t>TARGET: 0:45.
 SAY:
-"Six historical fraud cases: Enron, WorldCom, Tyco, HealthSouth, Valeant, Lehman Brothers. Each one paired against companies in the same industry, same year, that turned out to be clean.
-The model never sees the word 'fraud' during training. It just learns what a typical annual report from that industry and year looks like, and ranks the ones that look most unusual against their peers.
+"Six historical fraud cases: Enron, WorldCom, Tyco, HealthSouth, Valeant, Lehman Brothers. Each one was later proven to have been misrepresenting its financial condition at the time of this filing. The SEC or class-action lawsuits exposed them years afterward; each cost investors over a billion dollars. I paired each fraud filing against companies in the same industry, same year, that turned out to be clean.
+The model never sees the word 'fraud' during training. It just reads the long English-prose section of each annual report, where management explains the year in their own words, and learns what a 'normal' filing looks like industry by industry. Then it ranks the unusual filings against their peers.
 The formal question is on the slide [point at pull-quote]. The one-line answer this report defends is on the next bullet [point at it]. I'll spend the rest of the talk on the evidence."
 (Click to slide 3.)
 STAGE NOTES:
 - Don't read the pull-quote out loud. It's full of jargon and the audience can read it faster than you can speak it. Just point.
-- Same with the one-line answer. Pointing is faster than reading.</a:t>
+- Same with the one-line answer. Pointing is faster than reading.
+- The "long English-prose section where management explains the year" is the plain-English explanation of MD&amp;A. Don't say "MD&amp;A" out loud unless someone asks — the slide pull-quote shows the formal name for the technical reader.
+- The context line about each cohort being a multi-billion-dollar fraud is critical for audience comprehension. By the time they reach slide 4 they need to know these names matter. Don't skip it.</a:t>
             </a:r>
             <a:endParaRPr lang="en-US" dirty="0"/>
           </a:p>
@@ -802,7 +804,7 @@
               <a:t>TARGET: 1:00.
 SAY:
 "Here's what came back. Five cases evaluable, one excluded; I'll come back to the excluded one.
-[point at Lehman row] Only Lehman lands in the top three within its peer group. Three out of thirteen. The statistical test is highly significant, BUT the effect size is small [point at warning glyph]. Both numbers matter; reporting either one alone is misleading. And as you'll see on the next slide, even on Lehman, a 1990s baseline beats my model.
+[point at Lehman row] Only Lehman — the investment bank whose collapse triggered the 2008 financial crisis — lands in the top three within its peer group. Three out of thirteen. The statistical test is highly significant, BUT the effect size is small [point at warning glyph]. Both numbers matter; reporting either one alone is misleading. And as you'll see on the next slide, even on Lehman, a 1990s baseline beats my model.
 [quick scan with hand] The other four (HealthSouth, Valeant, Tyco, WorldCom) all rank no better than random expectation. The test goes the OPPOSITE direction from what we'd want. Aggregate hit rates fall at or below random.
 Now, Enron. [point at italicized row] Enron's filing date is April 2nd, 2001. Every other peer in every other case is dated later. Under the strict rule I locked in, Enron has no eligible training data.
 So I had a choice: relax the rule and rerun, or report the exclusion. I reported the exclusion. The pre-registered design was infeasible for Enron, and I didn't catch that before I locked the spec. That's a finding about pre-registration, not about fraud detection."

--- a/reports/canary_deck.pptx
+++ b/reports/canary_deck.pptx
@@ -510,12 +510,13 @@
               <a:rPr lang="en-US" dirty="0"/>
               <a:t>TARGET: 0:25.
 SAY:
-"I'm Arsenii Chan. The question I built this project around is a simple one: can a computer reading the words in a public company's annual report tell you which companies turned out to be committing accounting fraud? Six famous cases. One specific test. Let me show you what came back."
+"I'm Arsenii Chan. The question I built this project around is a simple one: do companies that turn out to have been committing accounting fraud write their annual reports differently from honest companies, and can a machine learning model detect that difference? Six famous cases. One specific test. Let me show you what came back."
 (Pause. Click to slide 2.)
 STAGE NOTES:
 - Don't announce the conclusion. Don't say "honestly" or "negative result"; both pre-spoil the talk.
 - Open with the question. The audience leans forward.
-- No jargon out loud: never say "autoencoder" or "MD&amp;A" aloud. Keep them on the slide only.</a:t>
+- No jargon out loud: never say "autoencoder" or "MD&amp;A" aloud. Keep them on the slide only.
+- The slide shows just the first half of the question ("do they write differently"). You verbally complete it ("and can a model detect that"). The audience reads the slide while you fill in the rest.</a:t>
             </a:r>
             <a:endParaRPr lang="en-US" dirty="0"/>
           </a:p>
@@ -1565,7 +1566,7 @@
               <a:buNone/>
             </a:pPr>
             <a:r>
-              <a:rPr lang="en-US" sz="3000" dirty="0">
+              <a:rPr lang="en-US" sz="3600" dirty="0">
                 <a:solidFill>
                   <a:srgbClr val="FFFFFF"/>
                 </a:solidFill>
@@ -1573,9 +1574,9 @@
                 <a:ea typeface="Georgia" pitchFamily="34" charset="-122"/>
                 <a:cs typeface="Georgia" pitchFamily="34" charset="-120"/>
               </a:rPr>
-              <a:t>Can a computer reading a company's annual report</a:t>
-            </a:r>
-            <a:endParaRPr lang="en-US" sz="3000" dirty="0"/>
+              <a:t>Do companies committing accounting fraud</a:t>
+            </a:r>
+            <a:endParaRPr lang="en-US" sz="3600" dirty="0"/>
           </a:p>
           <a:p>
             <a:pPr indent="0" marL="0">
@@ -1585,7 +1586,7 @@
               <a:buNone/>
             </a:pPr>
             <a:r>
-              <a:rPr lang="en-US" sz="3000" dirty="0">
+              <a:rPr lang="en-US" sz="3600" dirty="0">
                 <a:solidFill>
                   <a:srgbClr val="FFFFFF"/>
                 </a:solidFill>
@@ -1593,9 +1594,9 @@
                 <a:ea typeface="Georgia" pitchFamily="34" charset="-122"/>
                 <a:cs typeface="Georgia" pitchFamily="34" charset="-120"/>
               </a:rPr>
-              <a:t>tell which ones turned out to be committing accounting fraud?</a:t>
-            </a:r>
-            <a:endParaRPr lang="en-US" sz="3000" dirty="0"/>
+              <a:t>write their annual reports differently?</a:t>
+            </a:r>
+            <a:endParaRPr lang="en-US" sz="3600" dirty="0"/>
           </a:p>
         </p:txBody>
       </p:sp>
@@ -2913,7 +2914,7 @@
                 <a:ea typeface="Georgia" pitchFamily="34" charset="-122"/>
                 <a:cs typeface="Georgia" pitchFamily="34" charset="-120"/>
               </a:rPr>
-              <a:t>The contract makes the null result interpretable, not conclusive.</a:t>
+              <a:t>Whatever the test produces, the contract makes the result interpretable.</a:t>
             </a:r>
             <a:endParaRPr lang="en-US" sz="1400" dirty="0"/>
           </a:p>

--- a/reports/canary_deck.pptx
+++ b/reports/canary_deck.pptx
@@ -1103,12 +1103,13 @@
           <a:p>
             <a:r>
               <a:rPr lang="en-US" dirty="0"/>
-              <a:t>TARGET: 0:45. LAND THE URLs CLEANLY. PAUSE ONE BEAT AFTER "THANKS."
+              <a:t>TARGET: 0:50. LAND THE URLs CLEANLY. PAUSE ONE BEAT AFTER "THANKS."
 SAY:
 "Two takeaways.
 What survived: pre-registration. The contract held. I didn't iterate the model, I didn't redefine 'clean,' I didn't retreat from the Enron exclusion when the result was uncomfortable.
 What failed: the modern method beyond the 1990s baseline. A result that loses to a baseline is not evidence for the neural model.
-The next experiment is on the slide: same model, same filings, but compare the company against ITSELF across years instead of against peers. That's the falsifiable next step this study couldn't run.
+What I'd do differently: confirm every held-out fraud is actually evaluable under the rule BEFORE freezing the spec. Enron was unevaluable under my own rule, and I didn't catch it until validation ran.
+Next experiment: same model, same filings, but compare each company against ITSELF across years instead of against peers. That's the falsifiable next step this study couldn't run.
 [point at footer] Try the pipeline at the link below: paste any annual report, see how it scores against the five fraud cases. Code is on GitHub. The frozen-spec git tag is in the repo.
 Thanks. Happy to take questions."
 (End. Open Q&amp;A.)
@@ -6235,8 +6236,8 @@
         </p:nvSpPr>
         <p:spPr>
           <a:xfrm>
-            <a:off x="640080" y="2926080"/>
-            <a:ext cx="9601200" cy="822960"/>
+            <a:off x="640080" y="2834640"/>
+            <a:ext cx="9601200" cy="640080"/>
           </a:xfrm>
           <a:prstGeom prst="rect">
             <a:avLst/>
@@ -6255,7 +6256,7 @@
               <a:buNone/>
             </a:pPr>
             <a:r>
-              <a:rPr lang="en-US" sz="1500" i="1" dirty="0">
+              <a:rPr lang="en-US" sz="1400" i="1" dirty="0">
                 <a:solidFill>
                   <a:srgbClr val="CFD8E8"/>
                 </a:solidFill>
@@ -6265,7 +6266,7 @@
               </a:rPr>
               <a:t>A result that loses to a baseline is not evidence for the neural model. The contract held; the model did not.</a:t>
             </a:r>
-            <a:endParaRPr lang="en-US" sz="1500" dirty="0"/>
+            <a:endParaRPr lang="en-US" sz="1400" dirty="0"/>
           </a:p>
         </p:txBody>
       </p:sp>
@@ -6277,8 +6278,8 @@
         </p:nvSpPr>
         <p:spPr>
           <a:xfrm>
-            <a:off x="640080" y="4023360"/>
-            <a:ext cx="9601200" cy="365760"/>
+            <a:off x="640080" y="3657600"/>
+            <a:ext cx="9601200" cy="274320"/>
           </a:xfrm>
           <a:prstGeom prst="rect">
             <a:avLst/>
@@ -6294,7 +6295,7 @@
               <a:buNone/>
             </a:pPr>
             <a:r>
-              <a:rPr lang="en-US" sz="1200" b="1" spc="400" kern="0" dirty="0">
+              <a:rPr lang="en-US" sz="1100" b="1" spc="400" kern="0" dirty="0">
                 <a:solidFill>
                   <a:srgbClr val="3B82F6"/>
                 </a:solidFill>
@@ -6302,9 +6303,9 @@
                 <a:ea typeface="Calibri" pitchFamily="34" charset="-122"/>
                 <a:cs typeface="Calibri" pitchFamily="34" charset="-120"/>
               </a:rPr>
-              <a:t>Next experiment</a:t>
-            </a:r>
-            <a:endParaRPr lang="en-US" sz="1200" dirty="0"/>
+              <a:t>What I'd do differently</a:t>
+            </a:r>
+            <a:endParaRPr lang="en-US" sz="1100" dirty="0"/>
           </a:p>
         </p:txBody>
       </p:sp>
@@ -6316,7 +6317,7 @@
         </p:nvSpPr>
         <p:spPr>
           <a:xfrm>
-            <a:off x="640080" y="4389120"/>
+            <a:off x="640080" y="3977640"/>
             <a:ext cx="365760" cy="36576"/>
           </a:xfrm>
           <a:prstGeom prst="rect">
@@ -6341,8 +6342,8 @@
         </p:nvSpPr>
         <p:spPr>
           <a:xfrm>
-            <a:off x="640080" y="4572000"/>
-            <a:ext cx="9601200" cy="822960"/>
+            <a:off x="640080" y="4114800"/>
+            <a:ext cx="9601200" cy="548640"/>
           </a:xfrm>
           <a:prstGeom prst="rect">
             <a:avLst/>
@@ -6361,7 +6362,7 @@
               <a:buNone/>
             </a:pPr>
             <a:r>
-              <a:rPr lang="en-US" sz="1500" dirty="0">
+              <a:rPr lang="en-US" sz="1300" dirty="0">
                 <a:solidFill>
                   <a:srgbClr val="FFFFFF"/>
                 </a:solidFill>
@@ -6369,9 +6370,9 @@
                 <a:ea typeface="Georgia" pitchFamily="34" charset="-122"/>
                 <a:cs typeface="Georgia" pitchFamily="34" charset="-120"/>
               </a:rPr>
-              <a:t>Same autoencoder, within-firm temporal delta. Does Lehman's MD&amp;A look anomalous against Lehman's own prior-year MD&amp;A?</a:t>
-            </a:r>
-            <a:endParaRPr lang="en-US" sz="1500" dirty="0"/>
+              <a:t>Confirm every held-out fraud is evaluable under the pre-registered rule BEFORE freezing the spec. Enron taught that the hard way.</a:t>
+            </a:r>
+            <a:endParaRPr lang="en-US" sz="1300" dirty="0"/>
           </a:p>
         </p:txBody>
       </p:sp>
@@ -6383,8 +6384,8 @@
         </p:nvSpPr>
         <p:spPr>
           <a:xfrm>
-            <a:off x="10058400" y="4160520"/>
-            <a:ext cx="1828800" cy="274320"/>
+            <a:off x="640080" y="4800600"/>
+            <a:ext cx="9601200" cy="274320"/>
           </a:xfrm>
           <a:prstGeom prst="rect">
             <a:avLst/>
@@ -6396,18 +6397,124 @@
           <a:bodyPr wrap="square" rtlCol="0" anchor="ctr"/>
           <a:lstStyle/>
           <a:p>
-            <a:pPr algn="ctr" indent="0" marL="0">
-              <a:buNone/>
-            </a:pPr>
-            <a:r>
-              <a:rPr lang="en-US" sz="1000" i="1" dirty="0">
-                <a:solidFill>
-                  <a:srgbClr val="CFD8E8"/>
+            <a:pPr indent="0" marL="0">
+              <a:buNone/>
+            </a:pPr>
+            <a:r>
+              <a:rPr lang="en-US" sz="1100" b="1" spc="400" kern="0" dirty="0">
+                <a:solidFill>
+                  <a:srgbClr val="3B82F6"/>
                 </a:solidFill>
                 <a:latin typeface="Calibri" pitchFamily="34" charset="0"/>
                 <a:ea typeface="Calibri" pitchFamily="34" charset="-122"/>
                 <a:cs typeface="Calibri" pitchFamily="34" charset="-120"/>
               </a:rPr>
+              <a:t>Next experiment</a:t>
+            </a:r>
+            <a:endParaRPr lang="en-US" sz="1100" dirty="0"/>
+          </a:p>
+        </p:txBody>
+      </p:sp>
+      <p:sp>
+        <p:nvSpPr>
+          <p:cNvPr id="11" name="Shape 9"/>
+          <p:cNvSpPr/>
+          <p:nvPr/>
+        </p:nvSpPr>
+        <p:spPr>
+          <a:xfrm>
+            <a:off x="640080" y="5120640"/>
+            <a:ext cx="365760" cy="36576"/>
+          </a:xfrm>
+          <a:prstGeom prst="rect">
+            <a:avLst/>
+          </a:prstGeom>
+          <a:solidFill>
+            <a:srgbClr val="3B82F6"/>
+          </a:solidFill>
+          <a:ln w="12700">
+            <a:solidFill>
+              <a:srgbClr val="3B82F6"/>
+            </a:solidFill>
+            <a:prstDash val="solid"/>
+          </a:ln>
+        </p:spPr>
+      </p:sp>
+      <p:sp>
+        <p:nvSpPr>
+          <p:cNvPr id="12" name="Text 10"/>
+          <p:cNvSpPr/>
+          <p:nvPr/>
+        </p:nvSpPr>
+        <p:spPr>
+          <a:xfrm>
+            <a:off x="640080" y="5257800"/>
+            <a:ext cx="9601200" cy="502920"/>
+          </a:xfrm>
+          <a:prstGeom prst="rect">
+            <a:avLst/>
+          </a:prstGeom>
+          <a:noFill/>
+          <a:ln/>
+        </p:spPr>
+        <p:txBody>
+          <a:bodyPr wrap="square" rtlCol="0" anchor="ctr"/>
+          <a:lstStyle/>
+          <a:p>
+            <a:pPr indent="0" marL="0">
+              <a:lnSpc>
+                <a:spcPct val="130000"/>
+              </a:lnSpc>
+              <a:buNone/>
+            </a:pPr>
+            <a:r>
+              <a:rPr lang="en-US" sz="1300" dirty="0">
+                <a:solidFill>
+                  <a:srgbClr val="FFFFFF"/>
+                </a:solidFill>
+                <a:latin typeface="Georgia" pitchFamily="34" charset="0"/>
+                <a:ea typeface="Georgia" pitchFamily="34" charset="-122"/>
+                <a:cs typeface="Georgia" pitchFamily="34" charset="-120"/>
+              </a:rPr>
+              <a:t>Same autoencoder, within-firm temporal delta. Does Lehman's MD&amp;A look anomalous against Lehman's own prior-year MD&amp;A?</a:t>
+            </a:r>
+            <a:endParaRPr lang="en-US" sz="1300" dirty="0"/>
+          </a:p>
+        </p:txBody>
+      </p:sp>
+      <p:sp>
+        <p:nvSpPr>
+          <p:cNvPr id="13" name="Text 11"/>
+          <p:cNvSpPr/>
+          <p:nvPr/>
+        </p:nvSpPr>
+        <p:spPr>
+          <a:xfrm>
+            <a:off x="10058400" y="3520440"/>
+            <a:ext cx="1828800" cy="228600"/>
+          </a:xfrm>
+          <a:prstGeom prst="rect">
+            <a:avLst/>
+          </a:prstGeom>
+          <a:noFill/>
+          <a:ln/>
+        </p:spPr>
+        <p:txBody>
+          <a:bodyPr wrap="square" rtlCol="0" anchor="ctr"/>
+          <a:lstStyle/>
+          <a:p>
+            <a:pPr algn="ctr" indent="0" marL="0">
+              <a:buNone/>
+            </a:pPr>
+            <a:r>
+              <a:rPr lang="en-US" sz="1000" i="1" dirty="0">
+                <a:solidFill>
+                  <a:srgbClr val="CFD8E8"/>
+                </a:solidFill>
+                <a:latin typeface="Calibri" pitchFamily="34" charset="0"/>
+                <a:ea typeface="Calibri" pitchFamily="34" charset="-122"/>
+                <a:cs typeface="Calibri" pitchFamily="34" charset="-120"/>
+              </a:rPr>
               <a:t>Scan to try the pipeline</a:t>
             </a:r>
             <a:endParaRPr lang="en-US" sz="1000" dirty="0"/>
@@ -6416,7 +6523,7 @@
       </p:sp>
       <p:pic>
         <p:nvPicPr>
-          <p:cNvPr id="11" name="Image 0" descr="/Users/arseniichan/Documents/Claude/Projects/CSC448/canary/reports/figures/qr_demo.png">    </p:cNvPr>
+          <p:cNvPr id="14" name="Image 0" descr="/Users/arseniichan/Documents/Claude/Projects/CSC448/canary/reports/figures/qr_demo.png">    </p:cNvPr>
           <p:cNvPicPr>
             <a:picLocks noChangeAspect="1"/>
           </p:cNvPicPr>
@@ -6430,8 +6537,8 @@
         </p:blipFill>
         <p:spPr>
           <a:xfrm>
-            <a:off x="10287000" y="4480560"/>
-            <a:ext cx="1371600" cy="1371600"/>
+            <a:off x="10332720" y="3794760"/>
+            <a:ext cx="1280160" cy="1280160"/>
           </a:xfrm>
           <a:prstGeom prst="rect">
             <a:avLst/>
@@ -6440,14 +6547,14 @@
       </p:pic>
       <p:sp>
         <p:nvSpPr>
-          <p:cNvPr id="12" name="Text 9"/>
+          <p:cNvPr id="15" name="Text 12"/>
           <p:cNvSpPr/>
           <p:nvPr/>
         </p:nvSpPr>
         <p:spPr>
           <a:xfrm>
             <a:off x="640080" y="5989320"/>
-            <a:ext cx="10972800" cy="274320"/>
+            <a:ext cx="10972800" cy="228600"/>
           </a:xfrm>
           <a:prstGeom prst="rect">
             <a:avLst/>
@@ -6463,7 +6570,7 @@
               <a:buNone/>
             </a:pPr>
             <a:r>
-              <a:rPr lang="en-US" sz="1200" dirty="0">
+              <a:rPr lang="en-US" sz="1100" dirty="0">
                 <a:solidFill>
                   <a:srgbClr val="CFD8E8"/>
                 </a:solidFill>
@@ -6477,7 +6584,7 @@
               <a:buNone/>
             </a:pPr>
             <a:r>
-              <a:rPr lang="en-US" sz="1200" b="1" dirty="0">
+              <a:rPr lang="en-US" sz="1100" b="1" dirty="0">
                 <a:solidFill>
                   <a:srgbClr val="3B82F6"/>
                 </a:solidFill>
@@ -6487,20 +6594,20 @@
               </a:rPr>
               <a:t>canary-psi.vercel.app/scan</a:t>
             </a:r>
-            <a:endParaRPr lang="en-US" sz="1200" dirty="0"/>
-          </a:p>
-        </p:txBody>
-      </p:sp>
-      <p:sp>
-        <p:nvSpPr>
-          <p:cNvPr id="13" name="Text 10"/>
+            <a:endParaRPr lang="en-US" sz="1100" dirty="0"/>
+          </a:p>
+        </p:txBody>
+      </p:sp>
+      <p:sp>
+        <p:nvSpPr>
+          <p:cNvPr id="16" name="Text 13"/>
           <p:cNvSpPr/>
           <p:nvPr/>
         </p:nvSpPr>
         <p:spPr>
           <a:xfrm>
             <a:off x="640080" y="6263640"/>
-            <a:ext cx="10972800" cy="274320"/>
+            <a:ext cx="10972800" cy="228600"/>
           </a:xfrm>
           <a:prstGeom prst="rect">
             <a:avLst/>
@@ -6516,7 +6623,7 @@
               <a:buNone/>
             </a:pPr>
             <a:r>
-              <a:rPr lang="en-US" sz="1200" dirty="0">
+              <a:rPr lang="en-US" sz="1100" dirty="0">
                 <a:solidFill>
                   <a:srgbClr val="CFD8E8"/>
                 </a:solidFill>
@@ -6530,7 +6637,7 @@
               <a:buNone/>
             </a:pPr>
             <a:r>
-              <a:rPr lang="en-US" sz="1200" b="1" dirty="0">
+              <a:rPr lang="en-US" sz="1100" b="1" dirty="0">
                 <a:solidFill>
                   <a:srgbClr val="3B82F6"/>
                 </a:solidFill>
@@ -6544,7 +6651,7 @@
               <a:buNone/>
             </a:pPr>
             <a:r>
-              <a:rPr lang="en-US" sz="1200" dirty="0">
+              <a:rPr lang="en-US" sz="1100" dirty="0">
                 <a:solidFill>
                   <a:srgbClr val="CFD8E8"/>
                 </a:solidFill>
@@ -6558,7 +6665,7 @@
               <a:buNone/>
             </a:pPr>
             <a:r>
-              <a:rPr lang="en-US" sz="1200" b="1" dirty="0">
+              <a:rPr lang="en-US" sz="1100" b="1" dirty="0">
                 <a:solidFill>
                   <a:srgbClr val="3B82F6"/>
                 </a:solidFill>
@@ -6568,20 +6675,20 @@
               </a:rPr>
               <a:t>validation-spec-frozen</a:t>
             </a:r>
-            <a:endParaRPr lang="en-US" sz="1200" dirty="0"/>
-          </a:p>
-        </p:txBody>
-      </p:sp>
-      <p:sp>
-        <p:nvSpPr>
-          <p:cNvPr id="14" name="Text 11"/>
+            <a:endParaRPr lang="en-US" sz="1100" dirty="0"/>
+          </a:p>
+        </p:txBody>
+      </p:sp>
+      <p:sp>
+        <p:nvSpPr>
+          <p:cNvPr id="17" name="Text 14"/>
           <p:cNvSpPr/>
           <p:nvPr/>
         </p:nvSpPr>
         <p:spPr>
           <a:xfrm>
             <a:off x="640080" y="6583680"/>
-            <a:ext cx="10972800" cy="274320"/>
+            <a:ext cx="10972800" cy="228600"/>
           </a:xfrm>
           <a:prstGeom prst="rect">
             <a:avLst/>
@@ -6597,7 +6704,7 @@
               <a:buNone/>
             </a:pPr>
             <a:r>
-              <a:rPr lang="en-US" sz="1400" i="1" dirty="0">
+              <a:rPr lang="en-US" sz="1300" i="1" dirty="0">
                 <a:solidFill>
                   <a:srgbClr val="FFFFFF"/>
                 </a:solidFill>
@@ -6607,7 +6714,7 @@
               </a:rPr>
               <a:t>Thanks.</a:t>
             </a:r>
-            <a:endParaRPr lang="en-US" sz="1400" dirty="0"/>
+            <a:endParaRPr lang="en-US" sz="1300" dirty="0"/>
           </a:p>
         </p:txBody>
       </p:sp>

--- a/reports/canary_deck.pptx
+++ b/reports/canary_deck.pptx
@@ -510,13 +510,12 @@
               <a:rPr lang="en-US" dirty="0"/>
               <a:t>TARGET: 0:25.
 SAY:
-"I'm Arsenii Chan. The question I built this project around is a simple one: do companies that turn out to have been committing accounting fraud write their annual reports differently from honest companies, and can a machine learning model detect that difference? Six famous cases. One specific test. Let me show you what came back."
+"I'm Arsenii Chan. The question I built this project around is simple. Do companies committing accounting fraud write their annual reports differently from honest companies? And can a machine learning model spot the difference? Six famous fraud cases. One test. Let me show you what came back."
 (Pause. Click to slide 2.)
 STAGE NOTES:
 - Don't announce the conclusion. Don't say "honestly" or "negative result"; both pre-spoil the talk.
 - Open with the question. The audience leans forward.
-- No jargon out loud: never say "autoencoder" or "MD&amp;A" aloud. Keep them on the slide only.
-- The slide shows just the first half of the question ("do they write differently"). You verbally complete it ("and can a model detect that"). The audience reads the slide while you fill in the rest.</a:t>
+- The slide shows the first half of the question. You verbally complete it ("and can a model spot the difference"). Audience reads while you fill in the rest.</a:t>
             </a:r>
             <a:endParaRPr lang="en-US" dirty="0"/>
           </a:p>
@@ -606,15 +605,15 @@
               <a:rPr lang="en-US" dirty="0"/>
               <a:t>TARGET: 0:45.
 SAY:
-"Six historical fraud cases: Enron, WorldCom, Tyco, HealthSouth, Valeant, Lehman Brothers. Each one was later proven to have been misrepresenting its financial condition at the time of this filing. The SEC or class-action lawsuits exposed them years afterward; each cost investors over a billion dollars. I paired each fraud filing against companies in the same industry, same year, that turned out to be clean.
-The model never sees the word 'fraud' during training. It just reads the long English-prose section of each annual report, where management explains the year in their own words, and learns what a 'normal' filing looks like industry by industry. Then it ranks the unusual filings against their peers.
-The formal question is on the slide [point at pull-quote]. The one-line answer this report defends is on the next bullet [point at it]. I'll spend the rest of the talk on the evidence."
+"Six historical fraud cases: Enron, WorldCom, Tyco, HealthSouth, Valeant, Lehman Brothers. Each one turned out to be misrepresenting its finances at the time it filed this report. The SEC or class-action lawsuits exposed them years later. Each cost investors over a billion dollars. I paired each fraud filing against companies in the same industry, same year, that were clean.
+The model never sees the word 'fraud' during training. It just reads the long prose section of each annual report (where management explains the year in their own words) and learns what 'normal' looks like, industry by industry. Then it ranks the unusual filings against their peers.
+[point at pull-quote] The formal question is on the slide. [point at the answer line] The plain-English answer is right below it. I'll spend the rest of the talk on the evidence."
 (Click to slide 3.)
 STAGE NOTES:
-- Don't read the pull-quote out loud. It's full of jargon and the audience can read it faster than you can speak it. Just point.
-- Same with the one-line answer. Pointing is faster than reading.
-- The "long English-prose section where management explains the year" is the plain-English explanation of MD&amp;A. Don't say "MD&amp;A" out loud unless someone asks — the slide pull-quote shows the formal name for the technical reader.
-- The context line about each cohort being a multi-billion-dollar fraud is critical for audience comprehension. By the time they reach slide 4 they need to know these names matter. Don't skip it.</a:t>
+- Don't read the pull-quote out loud. It's the formal academic version. The audience reads while you point.
+- Pointing is faster than reading.
+- Don't say MD&amp;A out loud. The phrase "long prose section where management explains the year" replaces it.
+- The context about the six companies being multi-billion-dollar frauds is critical. The audience needs to know these names matter before reaching slide 4. Don't skip it.</a:t>
             </a:r>
             <a:endParaRPr lang="en-US" dirty="0"/>
           </a:p>
@@ -704,17 +703,17 @@
               <a:rPr lang="en-US" dirty="0"/>
               <a:t>TARGET: 0:50. THIS IS THE MOST IMPORTANT SLIDE. SLOW DOWN.
 SAY:
-"Before I show you any number, I want to put the methodology on the table. The methodology is what makes the result mean anything.
+"Before I show you any number, I want to walk through the methodology. It's what makes the result mean anything.
 Three rules I locked in BEFORE I ran the test. [point at columns]
-One: the model never sees a fraud during training. For each fraud case, the model trains on clean filings from OTHER cases. The fraud being tested is held out.
-Two: the model never sees the future. Within that training set, only filings dated on or before the fraud's filing date are eligible. The model can't be informed by language that came out AFTER the fraud was discovered.
-Three: single pass, no tuning. Architecture, hyperparameters, the test set: all written down and locked into the repo BEFORE the test ran. [point at git-tag panel:] Top right shows the actual lock, committed and tagged on May 1st, before any result came in.
+One: the model never sees a fraud during training. For each fraud case, the model trains only on clean filings from OTHER cases. The fraud I'm testing is held out.
+Two: the model never sees the future. Within that training set, only filings dated on or before the fraud's filing date are allowed. The model can't pick up language that came out AFTER the fraud was discovered.
+Three: single pass, no tuning. The architecture, the hyperparameters, the test set: all of that was written down and locked into the repo BEFORE the test ran. [point at git-tag panel] Top right shows the actual lock. Committed and tagged on May 1st, before any result came in.
 Test ran once. Whatever it said, that's the result."
 (Click to slide 4.)
 STAGE NOTES:
 - The git-tag panel is small. Say "top right shows" rather than gesturing at the podium.
 - If anyone in the room knows what pre-registration is, this is where you've already won them over.
-- Avoid jargon: don't say "LOCO" or "MiniLM" aloud. Say "leave-one-out" or "the embedding model" if pressed.</a:t>
+- Don't say "LOCO" or "MiniLM" aloud. The slide shows them; you say "leave-one-out" or "the embedding model" if you need to.</a:t>
             </a:r>
             <a:endParaRPr lang="en-US" dirty="0"/>
           </a:p>
@@ -804,16 +803,16 @@
               <a:rPr lang="en-US" dirty="0"/>
               <a:t>TARGET: 1:00.
 SAY:
-"Here's what came back. Five cases evaluable, one excluded; I'll come back to the excluded one.
-[point at Lehman row] Only Lehman — the investment bank whose collapse triggered the 2008 financial crisis — lands in the top three within its peer group. Three out of thirteen. The statistical test is highly significant, BUT the effect size is small [point at warning glyph]. Both numbers matter; reporting either one alone is misleading. And as you'll see on the next slide, even on Lehman, a 1990s baseline beats my model.
-[quick scan with hand] The other four (HealthSouth, Valeant, Tyco, WorldCom) all rank no better than random expectation. The test goes the OPPOSITE direction from what we'd want. Aggregate hit rates fall at or below random.
-Now, Enron. [point at italicized row] Enron's filing date is April 2nd, 2001. Every other peer in every other case is dated later. Under the strict rule I locked in, Enron has no eligible training data.
-So I had a choice: relax the rule and rerun, or report the exclusion. I reported the exclusion. The pre-registered design was infeasible for Enron, and I didn't catch that before I locked the spec. That's a finding about pre-registration, not about fraud detection."
+"Here's what came back. Five cases I could test, one excluded. I'll come back to the excluded one.
+[point at Lehman row] Only Lehman, the investment bank whose collapse triggered the 2008 financial crisis, lands in the top three within its peer group. Three out of thirteen. The statistical test is highly significant, but the effect size is small [point at warning glyph]. Both numbers matter. Reporting either one alone would be misleading. And as you'll see on the next slide, even on Lehman, a 1990s baseline beats my model.
+[quick scan with hand] The other four (HealthSouth, Valeant, Tyco, WorldCom) all rank no better than random. The test actually goes in the OPPOSITE direction from what we'd want. Overall my hit rates are at or below random.
+Now, Enron. [point at italicized row] Enron's filing date is April 2nd, 2001. Every other peer in every other case was dated later. Under the strict rule I locked in, there's no clean filing Enron could have trained on.
+So I had a choice. Relax the rule and rerun, or report the exclusion. I reported the exclusion. The pre-registered design was infeasible for Enron, and I didn't catch that before I locked the spec. That's a finding about pre-registration, not about fraud detection."
 (Click to slide 5.)
 STAGE NOTES:
 - Hands ON the slide. Don't quote numbers from memory; point at them on the projection.
-- The forward-pointer line ("a 1990s baseline beats my model") is critical. If a listener tunes out during slide 5, they need to walk away with this on slide 4. Don't skip it.
-- The Enron exclusion is the most likely Q&amp;A target. Pre-empt it: "I had a choice: relax the rule or report the exclusion. I reported the exclusion."</a:t>
+- The forward-pointer ("a 1990s baseline beats my model") is critical. If a listener tunes out during slide 5, they need to walk away with this on slide 4. Don't skip it.
+- The Enron exclusion is the most likely Q&amp;A target. Pre-empt it: "I had a choice. Relax the rule, or report the exclusion. I reported the exclusion."</a:t>
             </a:r>
             <a:endParaRPr lang="en-US" dirty="0"/>
           </a:p>
@@ -903,20 +902,20 @@
               <a:rPr lang="en-US" dirty="0"/>
               <a:t>TARGET: 1:10. THIS IS THE LEDE OF THE TALK. DON'T RUSH.
 SAY:
-"Now the part that I think actually matters.
-After the test ran, I asked myself the question every machine-learning paper should answer and most don't: would a method from before I was born produce the same result?
-So I ran one. [point at chart] A simple word-counting method with the same compression step. The kind of thing you could have written in 1995 from a textbook. Same training data, same statistical tests, same pipeline shape. No neural network. No transformer.
-[point at chart] On four of five cases, the 1995 method TIES the modern one. [point at Lehman bar] On Lehman, the one case the modern method got, the 1995 method gets it BETTER. The p-value is many orders of magnitude smaller.
-Let me say what I'm not saying and then what I am saying.
-I am NOT saying the modern method is broken, or that neural networks are unhelpful for this kind of problem.
-I AM saying that on these five cases, with the rules I locked in, the modern method did not show a measurable advantage over a method I could have run in 1995.
-If you take one thing from this talk, this is it: a sharp baseline isn't optional. A result that loses to a baseline is not evidence for the neural model."
+"Now the part I think actually matters.
+After the test ran, I asked myself the question every machine-learning paper should answer and most don't. Would a method from before I was born produce the same result?
+So I ran one. [point at chart] A simple word-counting method. The kind of thing you could have written in 1995 from a textbook. Same training data, same statistical tests, same pipeline shape. No neural network. No transformer.
+[point at chart] On four of five cases, the 1995 method TIES the modern one. [point at Lehman bar] And on Lehman, the one case the modern method got, the 1995 method gets it BETTER. The statistical test is way more confident.
+Let me say what I'm not saying, and then what I am saying.
+I am NOT saying the modern method is broken, or that neural networks are useless for this kind of problem.
+I AM saying that on these five cases, with the rules I locked in, the modern method did not beat a method I could have run in 1995.
+If you take one thing from this talk, this is it. A sharp baseline isn't optional. A result that loses to a baseline isn't evidence for the neural model."
 (Click to slide 6.)
 STAGE NOTES:
 - The "before I was born" / "1995" framing is the kill line. Practice deadpan delivery.
 - If the room is silent after, that's fine. Keep going.
 - The "I am not saying / I am saying" structure prevents the misread "the AI didn't work."
-- Don't say "TF-IDF" or "truncated SVD" aloud unless someone asks. "1995 method" or "simple word-counting method" is the spoken phrase. The slide and chart already show the technical names.</a:t>
+- Don't say "TF-IDF" or "truncated SVD" aloud unless someone asks. "1995 method" or "simple word-counting method" is the spoken phrase.</a:t>
             </a:r>
             <a:endParaRPr lang="en-US" dirty="0"/>
           </a:p>
@@ -1007,9 +1006,9 @@
               <a:t>TARGET: 0:40. SPEED.
 SAY:
 "Three questions I expect, with quick answers so we have time for whatever else you actually want to ask.
-Did you check a trivial baseline? Yes. Same compression dimension, same training data. The 1995 baseline matches or beats the modern method on every case. The honest claim is that the modern method adds nothing here. Slide 5.
-The baseline is post-hoc, isn't that HARKing? The pre-registered hypothesis was about the modern method, and that result is reported unchanged. The 1995 baseline was added after seeing the null and is reported as post-hoc. The primary null doesn't depend on it.
-Could the embedding model have memorized 'Lehman' or 'Repo 105'? I tested that. I masked 93 such mentions in Lehman's filing with a placeholder and re-scored. Lehman's rank held at 3 out of 13. Exact-token name leakage doesn't explain the rank."
+Did you check a trivial baseline? Yes. Same training data, same compression. The 1995 baseline matches or beats the modern method on every case. The honest claim is that the modern method adds nothing here. Slide 5.
+The baseline is post-hoc, isn't that HARKing? The pre-registered hypothesis was about the modern method, and I report that result unchanged. The 1995 baseline was added after seeing the null result, and I label it as post-hoc. The main result doesn't depend on the baseline.
+Could the embedding model have memorized 'Lehman' or 'Repo 105'? I tested that. I replaced 93 of those words in Lehman's filing with a placeholder and re-scored. Lehman's rank held at 3 out of 13. So the model isn't just spotting the word 'Lehman.'"
 (Click to slide 7.)
 STAGE NOTES:
 - Three Q&amp;As live on slide. The Enron exclusion question is best handled in actual Q&amp;A if asked (already covered on slide 4).
@@ -1105,12 +1104,12 @@
               <a:rPr lang="en-US" dirty="0"/>
               <a:t>TARGET: 0:50. LAND THE URLs CLEANLY. PAUSE ONE BEAT AFTER "THANKS."
 SAY:
-"Two takeaways.
-What survived: pre-registration. The contract held. I didn't iterate the model, I didn't redefine 'clean,' I didn't retreat from the Enron exclusion when the result was uncomfortable.
-What failed: the modern method beyond the 1990s baseline. A result that loses to a baseline is not evidence for the neural model.
-What I'd do differently: confirm every held-out fraud is actually evaluable under the rule BEFORE freezing the spec. Enron was unevaluable under my own rule, and I didn't catch it until validation ran.
-Next experiment: same model, same filings, but compare each company against ITSELF across years instead of against peers. That's the falsifiable next step this study couldn't run.
-[point at footer] Try the pipeline at the link below: paste any annual report, see how it scores against the five fraud cases. Code is on GitHub. The frozen-spec git tag is in the repo.
+"Two takeaways and one next step.
+What survived: pre-registration. The contract held. I didn't tweak the model, I didn't redefine 'clean,' I didn't backtrack on the Enron exclusion when the result got uncomfortable.
+What failed: the modern method, beyond what the 1990s baseline already does. A result that loses to a baseline is not evidence for the neural model.
+What I'd do differently: make sure every held-out fraud actually has training data under the rule, BEFORE freezing the spec. Enron was unevaluable under my own rule, and I didn't catch it until validation ran.
+Next experiment: same model, same filings, but compare each company against ITSELF across years, instead of against industry peers. That's the next step this study couldn't run.
+[point at footer] Try the pipeline at the link below. Paste any annual report and see how it scores against the five fraud cases. Code is on GitHub. The frozen-spec git tag is in the repo.
 Thanks. Happy to take questions."
 (End. Open Q&amp;A.)
 STAGE NOTES:
@@ -1712,7 +1711,7 @@
                 <a:ea typeface="Calibri" pitchFamily="34" charset="-122"/>
                 <a:cs typeface="Calibri" pitchFamily="34" charset="-120"/>
               </a:rPr>
-              <a:t>five small autoencoders in PyTorch, one per held-out fraud cohort.</a:t>
+              <a:t>five small autoencoders in PyTorch, one per fraud case (each tested against industry peers).</a:t>
             </a:r>
             <a:endParaRPr lang="en-US" sz="1500" dirty="0"/>
           </a:p>
@@ -1765,7 +1764,7 @@
                 <a:ea typeface="Calibri" pitchFamily="34" charset="-122"/>
                 <a:cs typeface="Calibri" pitchFamily="34" charset="-120"/>
               </a:rPr>
-              <a:t>a pretrained MiniLM transformer, frozen, as a sentence-to-vector encoder.</a:t>
+              <a:t>MiniLM, a pretrained sentence encoder. Used as-is, no fine-tuning.</a:t>
             </a:r>
             <a:endParaRPr lang="en-US" sz="1500" dirty="0"/>
           </a:p>
@@ -2125,7 +2124,7 @@
                 <a:ea typeface="Georgia" pitchFamily="34" charset="-122"/>
                 <a:cs typeface="Georgia" pitchFamily="34" charset="-120"/>
               </a:rPr>
-              <a:t>Does an unsupervised autoencoder trained on industry-and-year-matched clean 10-K MD&amp;A text assign elevated reconstruction error to known historical fraud filings, under strictly out-of-sample evaluation?</a:t>
+              <a:t>If an autoencoder trains only on clean annual reports from the same industry and year, will it rank known fraud filings as more unusual than its peers?</a:t>
             </a:r>
             <a:endParaRPr lang="en-US" sz="2600" dirty="0"/>
           </a:p>
@@ -2231,7 +2230,7 @@
                 <a:ea typeface="Georgia" pitchFamily="34" charset="-122"/>
                 <a:cs typeface="Georgia" pitchFamily="34" charset="-120"/>
               </a:rPr>
-              <a:t>At N = 6 frauds, with strict pre-registration: no useful autoencoder signal across four of five evaluable cohorts; Enron is not evaluable under the frozen rule; the one cohort the autoencoder did rank highly (Lehman) is n = 1, and a 1990s TF-IDF baseline beats the autoencoder on it.</a:t>
+              <a:t>At N = 6 frauds, with strict pre-registration: no useful autoencoder signal in four of five test cases; Enron couldn't be evaluated under the frozen rule; the one case the autoencoder did rank highly (Lehman) is n = 1, and a 1990s TF-IDF baseline beats the autoencoder there.</a:t>
             </a:r>
             <a:endParaRPr lang="en-US" sz="1800" dirty="0"/>
           </a:p>
@@ -2745,7 +2744,7 @@
                 <a:ea typeface="Georgia" pitchFamily="34" charset="-122"/>
                 <a:cs typeface="Georgia" pitchFamily="34" charset="-120"/>
               </a:rPr>
-              <a:t>Within the LOCO training set, only filings dated on or before that fraud's filing date are eligible. The autoencoder's training corpus cannot include post-fraud disclosure language. (MiniLM pretraining is a separate caveat.)</a:t>
+              <a:t>Within the LOCO training set, only filings dated on or before that fraud's filing date are eligible. The autoencoder's training corpus cannot include post-fraud disclosure language. (The MiniLM encoder isn't time-controlled.)</a:t>
             </a:r>
             <a:endParaRPr lang="en-US" sz="1300" dirty="0"/>
           </a:p>
@@ -6476,7 +6475,7 @@
                 <a:ea typeface="Georgia" pitchFamily="34" charset="-122"/>
                 <a:cs typeface="Georgia" pitchFamily="34" charset="-120"/>
               </a:rPr>
-              <a:t>Same autoencoder, within-firm temporal delta. Does Lehman's MD&amp;A look anomalous against Lehman's own prior-year MD&amp;A?</a:t>
+              <a:t>Same autoencoder, but compare each company against its own past filings (not industry peers). Does Lehman's MD&amp;A look anomalous against Lehman's own prior-year MD&amp;A?</a:t>
             </a:r>
             <a:endParaRPr lang="en-US" sz="1300" dirty="0"/>
           </a:p>

--- a/reports/canary_deck.pptx
+++ b/reports/canary_deck.pptx
@@ -508,14 +508,7 @@
           <a:p>
             <a:r>
               <a:rPr lang="en-US" dirty="0"/>
-              <a:t>TARGET: 0:25.
-SAY:
-"I'm Arsenii Chan. The question I built this project around is simple. Do companies committing accounting fraud write their annual reports differently from honest companies? And can a machine learning model spot the difference? Six famous fraud cases. One test. Let me show you what came back."
-(Pause. Click to slide 2.)
-STAGE NOTES:
-- Don't announce the conclusion. Don't say "honestly" or "negative result"; both pre-spoil the talk.
-- Open with the question. The audience leans forward.
-- The slide shows the first half of the question. You verbally complete it ("and can a model spot the difference"). Audience reads while you fill in the rest.</a:t>
+              <a:t>I'm Arsenii Chan. The question I built this project around is simple. Do companies committing accounting fraud write their annual reports differently from honest companies? And can a machine learning model spot the difference? Six famous fraud cases. One test. Let me show you what came back.</a:t>
             </a:r>
             <a:endParaRPr lang="en-US" dirty="0"/>
           </a:p>
@@ -603,17 +596,9 @@
           <a:p>
             <a:r>
               <a:rPr lang="en-US" dirty="0"/>
-              <a:t>TARGET: 0:45.
-SAY:
-"Six historical fraud cases: Enron, WorldCom, Tyco, HealthSouth, Valeant, Lehman Brothers. Each one turned out to be misrepresenting its finances at the time it filed this report. The SEC or class-action lawsuits exposed them years later. Each cost investors over a billion dollars. I paired each fraud filing against companies in the same industry, same year, that were clean.
-The model never sees the word 'fraud' during training. It just reads the long prose section of each annual report (where management explains the year in their own words) and learns what 'normal' looks like, industry by industry. Then it ranks the unusual filings against their peers.
-[point at pull-quote] The formal question is on the slide. [point at the answer line] The plain-English answer is right below it. I'll spend the rest of the talk on the evidence."
-(Click to slide 3.)
-STAGE NOTES:
-- Don't read the pull-quote out loud. It's the formal academic version. The audience reads while you point.
-- Pointing is faster than reading.
-- Don't say MD&amp;A out loud. The phrase "long prose section where management explains the year" replaces it.
-- The context about the six companies being multi-billion-dollar frauds is critical. The audience needs to know these names matter before reaching slide 4. Don't skip it.</a:t>
+              <a:t>Six historical fraud cases: Enron, WorldCom, Tyco, HealthSouth, Valeant, Lehman Brothers. Each one turned out to be misrepresenting its finances at the time it filed this report. The SEC or class-action lawsuits exposed them years later. Each cost investors over a billion dollars. I paired each fraud filing against companies in the same industry, same year, that were clean.
+The model never sees the word 'fraud' during training. It just reads the long prose section of each annual report, where management explains the year in their own words, and learns what 'normal' looks like, industry by industry. Then it ranks the unusual filings against their peers.
+The formal question is on the slide. The plain-English answer is right below it. I'll spend the rest of the talk on the evidence.</a:t>
             </a:r>
             <a:endParaRPr lang="en-US" dirty="0"/>
           </a:p>
@@ -701,19 +686,12 @@
           <a:p>
             <a:r>
               <a:rPr lang="en-US" dirty="0"/>
-              <a:t>TARGET: 0:50. THIS IS THE MOST IMPORTANT SLIDE. SLOW DOWN.
-SAY:
-"Before I show you any number, I want to walk through the methodology. It's what makes the result mean anything.
-Three rules I locked in BEFORE I ran the test. [point at columns]
-One: the model never sees a fraud during training. For each fraud case, the model trains only on clean filings from OTHER cases. The fraud I'm testing is held out.
-Two: the model never sees the future. Within that training set, only filings dated on or before the fraud's filing date are allowed. The model can't pick up language that came out AFTER the fraud was discovered.
-Three: single pass, no tuning. The architecture, the hyperparameters, the test set: all of that was written down and locked into the repo BEFORE the test ran. [point at git-tag panel] Top right shows the actual lock. Committed and tagged on May 1st, before any result came in.
-Test ran once. Whatever it said, that's the result."
-(Click to slide 4.)
-STAGE NOTES:
-- The git-tag panel is small. Say "top right shows" rather than gesturing at the podium.
-- If anyone in the room knows what pre-registration is, this is where you've already won them over.
-- Don't say "LOCO" or "MiniLM" aloud. The slide shows them; you say "leave-one-out" or "the embedding model" if you need to.</a:t>
+              <a:t>Before I show you any number, I want to walk through the methodology. It's what makes the result mean anything.
+Three rules I locked in before I ran the test.
+One: the model never sees a fraud during training. For each fraud case, the model trains only on clean filings from other cases. The fraud I'm testing is held out.
+Two: the model never sees the future. Within that training set, only filings dated on or before the fraud's filing date are allowed. The model can't pick up language that came out after the fraud was discovered.
+Three: single pass, no tuning. The architecture, the hyperparameters, the test set: all of that was written down and locked into the repo before the test ran. Top right shows the actual lock. Committed and tagged on May 1st, before any result came in.
+Test ran once. Whatever it said, that's the result.</a:t>
             </a:r>
             <a:endParaRPr lang="en-US" dirty="0"/>
           </a:p>
@@ -801,18 +779,11 @@
           <a:p>
             <a:r>
               <a:rPr lang="en-US" dirty="0"/>
-              <a:t>TARGET: 1:00.
-SAY:
-"Here's what came back. Five cases I could test, one excluded. I'll come back to the excluded one.
-[point at Lehman row] Only Lehman, the investment bank whose collapse triggered the 2008 financial crisis, lands in the top three within its peer group. Three out of thirteen. The statistical test is highly significant, but the effect size is small [point at warning glyph]. Both numbers matter. Reporting either one alone would be misleading. And as you'll see on the next slide, even on Lehman, a 1990s baseline beats my model.
-[quick scan with hand] The other four (HealthSouth, Valeant, Tyco, WorldCom) all rank no better than random. The test actually goes in the OPPOSITE direction from what we'd want. Overall my hit rates are at or below random.
-Now, Enron. [point at italicized row] Enron's filing date is April 2nd, 2001. Every other peer in every other case was dated later. Under the strict rule I locked in, there's no clean filing Enron could have trained on.
-So I had a choice. Relax the rule and rerun, or report the exclusion. I reported the exclusion. The pre-registered design was infeasible for Enron, and I didn't catch that before I locked the spec. That's a finding about pre-registration, not about fraud detection."
-(Click to slide 5.)
-STAGE NOTES:
-- Hands ON the slide. Don't quote numbers from memory; point at them on the projection.
-- The forward-pointer ("a 1990s baseline beats my model") is critical. If a listener tunes out during slide 5, they need to walk away with this on slide 4. Don't skip it.
-- The Enron exclusion is the most likely Q&amp;A target. Pre-empt it: "I had a choice. Relax the rule, or report the exclusion. I reported the exclusion."</a:t>
+              <a:t>Here's what came back. Five cases I could test, one excluded. I'll come back to the excluded one.
+Only Lehman, the investment bank whose collapse triggered the 2008 financial crisis, lands in the top three within its peer group. Three out of thirteen. The statistical test is highly significant, but the effect size is small. Both numbers matter. Reporting either one alone would be misleading. And as you'll see on the next slide, even on Lehman, a 1990s baseline beats my model.
+The other four (HealthSouth, Valeant, Tyco, WorldCom) all rank no better than random. The test actually goes in the opposite direction from what we'd want. Overall my hit rates are at or below random.
+Now, Enron. Enron's filing date is April 2nd, 2001. Every other peer in every other case was dated later. Under the strict rule I locked in, there's no clean filing Enron could have trained on.
+So I had a choice. Relax the rule and rerun, or report the exclusion. I reported the exclusion. The pre-registered design was infeasible for Enron, and I didn't catch that before I locked the spec. That's a finding about pre-registration, not about fraud detection.</a:t>
             </a:r>
             <a:endParaRPr lang="en-US" dirty="0"/>
           </a:p>
@@ -900,22 +871,14 @@
           <a:p>
             <a:r>
               <a:rPr lang="en-US" dirty="0"/>
-              <a:t>TARGET: 1:10. THIS IS THE LEDE OF THE TALK. DON'T RUSH.
-SAY:
-"Now the part I think actually matters.
+              <a:t>Now the part I think actually matters.
 After the test ran, I asked myself the question every machine-learning paper should answer and most don't. Would a method from before I was born produce the same result?
-So I ran one. [point at chart] A simple word-counting method. The kind of thing you could have written in 1995 from a textbook. Same training data, same statistical tests, same pipeline shape. No neural network. No transformer.
-[point at chart] On four of five cases, the 1995 method TIES the modern one. [point at Lehman bar] And on Lehman, the one case the modern method got, the 1995 method gets it BETTER. The statistical test is way more confident.
+So I ran one. A simple word-counting method. The kind of thing you could have written in 1995 from a textbook. Same training data, same statistical tests, same pipeline shape. No neural network. No transformer.
+On four of five cases, the 1995 method ties the modern one. And on Lehman, the one case the modern method got, the 1995 method gets it better. The statistical test is way more confident.
 Let me say what I'm not saying, and then what I am saying.
-I am NOT saying the modern method is broken, or that neural networks are useless for this kind of problem.
-I AM saying that on these five cases, with the rules I locked in, the modern method did not beat a method I could have run in 1995.
-If you take one thing from this talk, this is it. A sharp baseline isn't optional. A result that loses to a baseline isn't evidence for the neural model."
-(Click to slide 6.)
-STAGE NOTES:
-- The "before I was born" / "1995" framing is the kill line. Practice deadpan delivery.
-- If the room is silent after, that's fine. Keep going.
-- The "I am not saying / I am saying" structure prevents the misread "the AI didn't work."
-- Don't say "TF-IDF" or "truncated SVD" aloud unless someone asks. "1995 method" or "simple word-counting method" is the spoken phrase.</a:t>
+I am not saying the modern method is broken, or that neural networks are useless for this kind of problem.
+I am saying that on these five cases, with the rules I locked in, the modern method did not beat a method I could have run in 1995.
+If you take one thing from this talk, this is it. A sharp baseline isn't optional. A result that loses to a baseline isn't evidence for the neural model.</a:t>
             </a:r>
             <a:endParaRPr lang="en-US" dirty="0"/>
           </a:p>
@@ -1003,18 +966,10 @@
           <a:p>
             <a:r>
               <a:rPr lang="en-US" dirty="0"/>
-              <a:t>TARGET: 0:40. SPEED.
-SAY:
-"Three questions I expect, with quick answers so we have time for whatever else you actually want to ask.
+              <a:t>Three questions I expect, with quick answers so we have time for whatever else you actually want to ask.
 Did you check a trivial baseline? Yes. Same training data, same compression. The 1995 baseline matches or beats the modern method on every case. The honest claim is that the modern method adds nothing here. Slide 5.
 The baseline is post-hoc, isn't that HARKing? The pre-registered hypothesis was about the modern method, and I report that result unchanged. The 1995 baseline was added after seeing the null result, and I label it as post-hoc. The main result doesn't depend on the baseline.
-Could the embedding model have memorized 'Lehman' or 'Repo 105'? I tested that. I replaced 93 of those words in Lehman's filing with a placeholder and re-scored. Lehman's rank held at 3 out of 13. So the model isn't just spotting the word 'Lehman.'"
-(Click to slide 7.)
-STAGE NOTES:
-- Three Q&amp;As live on slide. The Enron exclusion question is best handled in actual Q&amp;A if asked (already covered on slide 4).
-- Don't try to deliver all three under pressure if you're running long. Two minimum.
-- If asked about supervised classifier: "At six fraud examples a supervised classifier overfits trivially. Future work."
-- If asked about the parser: "Five failures are pre-2001 peer filings. All six fraud filings parsed at 100%."</a:t>
+Could the embedding model have memorized 'Lehman' or 'Repo 105'? I tested that. I replaced 93 of those words in Lehman's filing with a placeholder and re-scored. Lehman's rank held at 3 out of 13. So the model isn't just spotting the word 'Lehman.'</a:t>
             </a:r>
             <a:endParaRPr lang="en-US" dirty="0"/>
           </a:p>
@@ -1102,31 +1057,13 @@
           <a:p>
             <a:r>
               <a:rPr lang="en-US" dirty="0"/>
-              <a:t>TARGET: 0:50. LAND THE URLs CLEANLY. PAUSE ONE BEAT AFTER "THANKS."
-SAY:
-"Two takeaways and one next step.
+              <a:t>Two takeaways and one next step.
 What survived: pre-registration. The contract held. I didn't tweak the model, I didn't redefine 'clean,' I didn't backtrack on the Enron exclusion when the result got uncomfortable.
 What failed: the modern method, beyond what the 1990s baseline already does. A result that loses to a baseline is not evidence for the neural model.
-What I'd do differently: make sure every held-out fraud actually has training data under the rule, BEFORE freezing the spec. Enron was unevaluable under my own rule, and I didn't catch it until validation ran.
-Next experiment: same model, same filings, but compare each company against ITSELF across years, instead of against industry peers. That's the next step this study couldn't run.
-[point at footer] Try the pipeline at the link below. Paste any annual report and see how it scores against the five fraud cases. Code is on GitHub. The frozen-spec git tag is in the repo.
-Thanks. Happy to take questions."
-(End. Open Q&amp;A.)
-STAGE NOTES:
-- Pause for ONE beat after "Thanks." Don't run into the next sentence.
-- Look UP at the audience for the URL line. That's the call-to-action.
-- If you've delivered slides 1 through 7 cleanly, your face should look calm.
-Q&amp;A FALLBACK LINE if you don't know an answer:
-"That's a real gap I haven't characterized. Let me follow up after the talk."
-Don't fake numbers under pressure. "I don't know" is graduate-school behavior, not weakness.
-TIME TARGETS:
-Slide 1: 0:25  |  Slide 2: 0:45  |  Slide 3: 0:50  |  Slide 4: 1:00
-Slide 5: 1:10  |  Slide 6: 0:40  |  Slide 7: 0:45
-Total target: 5:35.  Hard ceiling: 6:55.  Buffer: 1:25.
-IF RUNNING LONG, CUTS:
-- Drop "I am not saying / I am saying" on Slide 5 (saves 15 seconds)
-- Skip third Q&amp;A on Slide 6 (saves 15 seconds)
-- Skip next-experiment line on Slide 7 (saves 10 seconds)</a:t>
+What I'd do differently: make sure every held-out fraud actually has training data under the rule, before freezing the spec. Enron was unevaluable under my own rule, and I didn't catch it until validation ran.
+Next experiment: same model, same filings, but compare each company against itself across years, instead of against industry peers. That's the next step this study couldn't run.
+Try the pipeline at the link below. Paste any annual report and see how it scores against the five fraud cases. Code is on GitHub. The frozen-spec git tag is in the repo.
+Thanks. Happy to take questions.</a:t>
             </a:r>
             <a:endParaRPr lang="en-US" dirty="0"/>
           </a:p>
